--- a/public/fun/pack/pptx/review/보장점검양식_16_본인점검_평상수박.pptx
+++ b/public/fun/pack/pptx/review/보장점검양식_16_본인점검_평상수박.pptx
@@ -3347,7 +3347,7 @@
             <a:r>
               <a:rPr sz="3600" b="1" i="0">
                 <a:solidFill>
-                  <a:srgbClr val="153C26"/>
+                  <a:srgbClr val="115F59"/>
                 </a:solidFill>
               </a:rPr>
               <a:t>우리 보험 점검 시간</a:t>
@@ -3385,7 +3385,7 @@
             <a:r>
               <a:rPr sz="1700" b="0" i="1">
                 <a:solidFill>
-                  <a:srgbClr val="153C26"/>
+                  <a:srgbClr val="115F59"/>
                 </a:solidFill>
               </a:rPr>
               <a:t>어떤 보험에 들었는지부터 적습니다</a:t>
@@ -3460,7 +3460,7 @@
     <p:bg>
       <p:bgPr>
         <a:solidFill>
-          <a:srgbClr val="F0FAF4"/>
+          <a:srgbClr val="EEFCFB"/>
         </a:solidFill>
         <a:effectLst/>
       </p:bgPr>
@@ -3489,7 +3489,7 @@
           <a:noFill/>
           <a:ln w="28575">
             <a:solidFill>
-              <a:srgbClr val="308854"/>
+              <a:srgbClr val="26C5B8"/>
             </a:solidFill>
           </a:ln>
         </p:spPr>
@@ -3518,7 +3518,7 @@
           <a:noFill/>
           <a:ln w="9525">
             <a:solidFill>
-              <a:srgbClr val="D0F1DE"/>
+              <a:srgbClr val="D1FAF7"/>
             </a:solidFill>
           </a:ln>
         </p:spPr>
@@ -3560,7 +3560,7 @@
             <a:r>
               <a:rPr sz="3000" b="1" i="0">
                 <a:solidFill>
-                  <a:srgbClr val="153C26"/>
+                  <a:srgbClr val="115F59"/>
                 </a:solidFill>
               </a:rPr>
               <a:t>점검 대상 현황</a:t>
@@ -3610,30 +3610,30 @@
                   <a:tcPr anchor="ctr" marL="73152" marR="73152">
                     <a:lnL w="9525" cap="flat" cmpd="sng" algn="ctr">
                       <a:solidFill>
-                        <a:srgbClr val="308854"/>
+                        <a:srgbClr val="26C5B8"/>
                       </a:solidFill>
                       <a:prstDash val="solid"/>
                     </a:lnL>
                     <a:lnR w="9525" cap="flat" cmpd="sng" algn="ctr">
                       <a:solidFill>
-                        <a:srgbClr val="308854"/>
+                        <a:srgbClr val="26C5B8"/>
                       </a:solidFill>
                       <a:prstDash val="solid"/>
                     </a:lnR>
                     <a:lnT w="9525" cap="flat" cmpd="sng" algn="ctr">
                       <a:solidFill>
-                        <a:srgbClr val="308854"/>
+                        <a:srgbClr val="26C5B8"/>
                       </a:solidFill>
                       <a:prstDash val="solid"/>
                     </a:lnT>
                     <a:lnB w="9525" cap="flat" cmpd="sng" algn="ctr">
                       <a:solidFill>
-                        <a:srgbClr val="308854"/>
+                        <a:srgbClr val="26C5B8"/>
                       </a:solidFill>
                       <a:prstDash val="solid"/>
                     </a:lnB>
                     <a:solidFill>
-                      <a:srgbClr val="308854"/>
+                      <a:srgbClr val="26C5B8"/>
                     </a:solidFill>
                   </a:tcPr>
                 </a:tc>
@@ -3656,30 +3656,30 @@
                   <a:tcPr anchor="ctr" marL="73152" marR="73152">
                     <a:lnL w="9525" cap="flat" cmpd="sng" algn="ctr">
                       <a:solidFill>
-                        <a:srgbClr val="308854"/>
+                        <a:srgbClr val="26C5B8"/>
                       </a:solidFill>
                       <a:prstDash val="solid"/>
                     </a:lnL>
                     <a:lnR w="9525" cap="flat" cmpd="sng" algn="ctr">
                       <a:solidFill>
-                        <a:srgbClr val="308854"/>
+                        <a:srgbClr val="26C5B8"/>
                       </a:solidFill>
                       <a:prstDash val="solid"/>
                     </a:lnR>
                     <a:lnT w="9525" cap="flat" cmpd="sng" algn="ctr">
                       <a:solidFill>
-                        <a:srgbClr val="308854"/>
+                        <a:srgbClr val="26C5B8"/>
                       </a:solidFill>
                       <a:prstDash val="solid"/>
                     </a:lnT>
                     <a:lnB w="9525" cap="flat" cmpd="sng" algn="ctr">
                       <a:solidFill>
-                        <a:srgbClr val="308854"/>
+                        <a:srgbClr val="26C5B8"/>
                       </a:solidFill>
                       <a:prstDash val="solid"/>
                     </a:lnB>
                     <a:solidFill>
-                      <a:srgbClr val="308854"/>
+                      <a:srgbClr val="26C5B8"/>
                     </a:solidFill>
                   </a:tcPr>
                 </a:tc>
@@ -3694,7 +3694,7 @@
                       <a:r>
                         <a:rPr sz="1600" b="1">
                           <a:solidFill>
-                            <a:srgbClr val="153C26"/>
+                            <a:srgbClr val="115F59"/>
                           </a:solidFill>
                         </a:rPr>
                         <a:t>이름</a:t>
@@ -3704,30 +3704,30 @@
                   <a:tcPr anchor="ctr" marL="73152" marR="73152">
                     <a:lnL w="9525" cap="flat" cmpd="sng" algn="ctr">
                       <a:solidFill>
-                        <a:srgbClr val="D0F1DE"/>
+                        <a:srgbClr val="D1FAF7"/>
                       </a:solidFill>
                       <a:prstDash val="solid"/>
                     </a:lnL>
                     <a:lnR w="9525" cap="flat" cmpd="sng" algn="ctr">
                       <a:solidFill>
-                        <a:srgbClr val="D0F1DE"/>
+                        <a:srgbClr val="D1FAF7"/>
                       </a:solidFill>
                       <a:prstDash val="solid"/>
                     </a:lnR>
                     <a:lnT w="9525" cap="flat" cmpd="sng" algn="ctr">
                       <a:solidFill>
-                        <a:srgbClr val="D0F1DE"/>
+                        <a:srgbClr val="D1FAF7"/>
                       </a:solidFill>
                       <a:prstDash val="solid"/>
                     </a:lnT>
                     <a:lnB w="9525" cap="flat" cmpd="sng" algn="ctr">
                       <a:solidFill>
-                        <a:srgbClr val="D0F1DE"/>
+                        <a:srgbClr val="D1FAF7"/>
                       </a:solidFill>
                       <a:prstDash val="solid"/>
                     </a:lnB>
                     <a:solidFill>
-                      <a:srgbClr val="D0F1DE"/>
+                      <a:srgbClr val="D1FAF7"/>
                     </a:solidFill>
                   </a:tcPr>
                 </a:tc>
@@ -3750,25 +3750,25 @@
                   <a:tcPr anchor="ctr" marL="73152" marR="73152">
                     <a:lnL w="9525" cap="flat" cmpd="sng" algn="ctr">
                       <a:solidFill>
-                        <a:srgbClr val="D0F1DE"/>
+                        <a:srgbClr val="D1FAF7"/>
                       </a:solidFill>
                       <a:prstDash val="solid"/>
                     </a:lnL>
                     <a:lnR w="9525" cap="flat" cmpd="sng" algn="ctr">
                       <a:solidFill>
-                        <a:srgbClr val="D0F1DE"/>
+                        <a:srgbClr val="D1FAF7"/>
                       </a:solidFill>
                       <a:prstDash val="solid"/>
                     </a:lnR>
                     <a:lnT w="9525" cap="flat" cmpd="sng" algn="ctr">
                       <a:solidFill>
-                        <a:srgbClr val="D0F1DE"/>
+                        <a:srgbClr val="D1FAF7"/>
                       </a:solidFill>
                       <a:prstDash val="solid"/>
                     </a:lnT>
                     <a:lnB w="9525" cap="flat" cmpd="sng" algn="ctr">
                       <a:solidFill>
-                        <a:srgbClr val="D0F1DE"/>
+                        <a:srgbClr val="D1FAF7"/>
                       </a:solidFill>
                       <a:prstDash val="solid"/>
                     </a:lnB>
@@ -3788,7 +3788,7 @@
                       <a:r>
                         <a:rPr sz="1600" b="1">
                           <a:solidFill>
-                            <a:srgbClr val="153C26"/>
+                            <a:srgbClr val="115F59"/>
                           </a:solidFill>
                         </a:rPr>
                         <a:t>나이</a:t>
@@ -3798,30 +3798,30 @@
                   <a:tcPr anchor="ctr" marL="73152" marR="73152">
                     <a:lnL w="9525" cap="flat" cmpd="sng" algn="ctr">
                       <a:solidFill>
-                        <a:srgbClr val="D0F1DE"/>
+                        <a:srgbClr val="D1FAF7"/>
                       </a:solidFill>
                       <a:prstDash val="solid"/>
                     </a:lnL>
                     <a:lnR w="9525" cap="flat" cmpd="sng" algn="ctr">
                       <a:solidFill>
-                        <a:srgbClr val="D0F1DE"/>
+                        <a:srgbClr val="D1FAF7"/>
                       </a:solidFill>
                       <a:prstDash val="solid"/>
                     </a:lnR>
                     <a:lnT w="9525" cap="flat" cmpd="sng" algn="ctr">
                       <a:solidFill>
-                        <a:srgbClr val="D0F1DE"/>
+                        <a:srgbClr val="D1FAF7"/>
                       </a:solidFill>
                       <a:prstDash val="solid"/>
                     </a:lnT>
                     <a:lnB w="9525" cap="flat" cmpd="sng" algn="ctr">
                       <a:solidFill>
-                        <a:srgbClr val="D0F1DE"/>
+                        <a:srgbClr val="D1FAF7"/>
                       </a:solidFill>
                       <a:prstDash val="solid"/>
                     </a:lnB>
                     <a:solidFill>
-                      <a:srgbClr val="D0F1DE"/>
+                      <a:srgbClr val="D1FAF7"/>
                     </a:solidFill>
                   </a:tcPr>
                 </a:tc>
@@ -3844,30 +3844,30 @@
                   <a:tcPr anchor="ctr" marL="73152" marR="73152">
                     <a:lnL w="9525" cap="flat" cmpd="sng" algn="ctr">
                       <a:solidFill>
-                        <a:srgbClr val="D0F1DE"/>
+                        <a:srgbClr val="D1FAF7"/>
                       </a:solidFill>
                       <a:prstDash val="solid"/>
                     </a:lnL>
                     <a:lnR w="9525" cap="flat" cmpd="sng" algn="ctr">
                       <a:solidFill>
-                        <a:srgbClr val="D0F1DE"/>
+                        <a:srgbClr val="D1FAF7"/>
                       </a:solidFill>
                       <a:prstDash val="solid"/>
                     </a:lnR>
                     <a:lnT w="9525" cap="flat" cmpd="sng" algn="ctr">
                       <a:solidFill>
-                        <a:srgbClr val="D0F1DE"/>
+                        <a:srgbClr val="D1FAF7"/>
                       </a:solidFill>
                       <a:prstDash val="solid"/>
                     </a:lnT>
                     <a:lnB w="9525" cap="flat" cmpd="sng" algn="ctr">
                       <a:solidFill>
-                        <a:srgbClr val="D0F1DE"/>
+                        <a:srgbClr val="D1FAF7"/>
                       </a:solidFill>
                       <a:prstDash val="solid"/>
                     </a:lnB>
                     <a:solidFill>
-                      <a:srgbClr val="F0FAF4"/>
+                      <a:srgbClr val="EEFCFB"/>
                     </a:solidFill>
                   </a:tcPr>
                 </a:tc>
@@ -3882,7 +3882,7 @@
                       <a:r>
                         <a:rPr sz="1600" b="1">
                           <a:solidFill>
-                            <a:srgbClr val="153C26"/>
+                            <a:srgbClr val="115F59"/>
                           </a:solidFill>
                         </a:rPr>
                         <a:t>직업</a:t>
@@ -3892,30 +3892,30 @@
                   <a:tcPr anchor="ctr" marL="73152" marR="73152">
                     <a:lnL w="9525" cap="flat" cmpd="sng" algn="ctr">
                       <a:solidFill>
-                        <a:srgbClr val="D0F1DE"/>
+                        <a:srgbClr val="D1FAF7"/>
                       </a:solidFill>
                       <a:prstDash val="solid"/>
                     </a:lnL>
                     <a:lnR w="9525" cap="flat" cmpd="sng" algn="ctr">
                       <a:solidFill>
-                        <a:srgbClr val="D0F1DE"/>
+                        <a:srgbClr val="D1FAF7"/>
                       </a:solidFill>
                       <a:prstDash val="solid"/>
                     </a:lnR>
                     <a:lnT w="9525" cap="flat" cmpd="sng" algn="ctr">
                       <a:solidFill>
-                        <a:srgbClr val="D0F1DE"/>
+                        <a:srgbClr val="D1FAF7"/>
                       </a:solidFill>
                       <a:prstDash val="solid"/>
                     </a:lnT>
                     <a:lnB w="9525" cap="flat" cmpd="sng" algn="ctr">
                       <a:solidFill>
-                        <a:srgbClr val="D0F1DE"/>
+                        <a:srgbClr val="D1FAF7"/>
                       </a:solidFill>
                       <a:prstDash val="solid"/>
                     </a:lnB>
                     <a:solidFill>
-                      <a:srgbClr val="D0F1DE"/>
+                      <a:srgbClr val="D1FAF7"/>
                     </a:solidFill>
                   </a:tcPr>
                 </a:tc>
@@ -3938,25 +3938,25 @@
                   <a:tcPr anchor="ctr" marL="73152" marR="73152">
                     <a:lnL w="9525" cap="flat" cmpd="sng" algn="ctr">
                       <a:solidFill>
-                        <a:srgbClr val="D0F1DE"/>
+                        <a:srgbClr val="D1FAF7"/>
                       </a:solidFill>
                       <a:prstDash val="solid"/>
                     </a:lnL>
                     <a:lnR w="9525" cap="flat" cmpd="sng" algn="ctr">
                       <a:solidFill>
-                        <a:srgbClr val="D0F1DE"/>
+                        <a:srgbClr val="D1FAF7"/>
                       </a:solidFill>
                       <a:prstDash val="solid"/>
                     </a:lnR>
                     <a:lnT w="9525" cap="flat" cmpd="sng" algn="ctr">
                       <a:solidFill>
-                        <a:srgbClr val="D0F1DE"/>
+                        <a:srgbClr val="D1FAF7"/>
                       </a:solidFill>
                       <a:prstDash val="solid"/>
                     </a:lnT>
                     <a:lnB w="9525" cap="flat" cmpd="sng" algn="ctr">
                       <a:solidFill>
-                        <a:srgbClr val="D0F1DE"/>
+                        <a:srgbClr val="D1FAF7"/>
                       </a:solidFill>
                       <a:prstDash val="solid"/>
                     </a:lnB>
@@ -3976,7 +3976,7 @@
                       <a:r>
                         <a:rPr sz="1600" b="1">
                           <a:solidFill>
-                            <a:srgbClr val="153C26"/>
+                            <a:srgbClr val="115F59"/>
                           </a:solidFill>
                         </a:rPr>
                         <a:t>가족 구성</a:t>
@@ -3986,30 +3986,30 @@
                   <a:tcPr anchor="ctr" marL="73152" marR="73152">
                     <a:lnL w="9525" cap="flat" cmpd="sng" algn="ctr">
                       <a:solidFill>
-                        <a:srgbClr val="D0F1DE"/>
+                        <a:srgbClr val="D1FAF7"/>
                       </a:solidFill>
                       <a:prstDash val="solid"/>
                     </a:lnL>
                     <a:lnR w="9525" cap="flat" cmpd="sng" algn="ctr">
                       <a:solidFill>
-                        <a:srgbClr val="D0F1DE"/>
+                        <a:srgbClr val="D1FAF7"/>
                       </a:solidFill>
                       <a:prstDash val="solid"/>
                     </a:lnR>
                     <a:lnT w="9525" cap="flat" cmpd="sng" algn="ctr">
                       <a:solidFill>
-                        <a:srgbClr val="D0F1DE"/>
+                        <a:srgbClr val="D1FAF7"/>
                       </a:solidFill>
                       <a:prstDash val="solid"/>
                     </a:lnT>
                     <a:lnB w="9525" cap="flat" cmpd="sng" algn="ctr">
                       <a:solidFill>
-                        <a:srgbClr val="D0F1DE"/>
+                        <a:srgbClr val="D1FAF7"/>
                       </a:solidFill>
                       <a:prstDash val="solid"/>
                     </a:lnB>
                     <a:solidFill>
-                      <a:srgbClr val="D0F1DE"/>
+                      <a:srgbClr val="D1FAF7"/>
                     </a:solidFill>
                   </a:tcPr>
                 </a:tc>
@@ -4032,30 +4032,30 @@
                   <a:tcPr anchor="ctr" marL="73152" marR="73152">
                     <a:lnL w="9525" cap="flat" cmpd="sng" algn="ctr">
                       <a:solidFill>
-                        <a:srgbClr val="D0F1DE"/>
+                        <a:srgbClr val="D1FAF7"/>
                       </a:solidFill>
                       <a:prstDash val="solid"/>
                     </a:lnL>
                     <a:lnR w="9525" cap="flat" cmpd="sng" algn="ctr">
                       <a:solidFill>
-                        <a:srgbClr val="D0F1DE"/>
+                        <a:srgbClr val="D1FAF7"/>
                       </a:solidFill>
                       <a:prstDash val="solid"/>
                     </a:lnR>
                     <a:lnT w="9525" cap="flat" cmpd="sng" algn="ctr">
                       <a:solidFill>
-                        <a:srgbClr val="D0F1DE"/>
+                        <a:srgbClr val="D1FAF7"/>
                       </a:solidFill>
                       <a:prstDash val="solid"/>
                     </a:lnT>
                     <a:lnB w="9525" cap="flat" cmpd="sng" algn="ctr">
                       <a:solidFill>
-                        <a:srgbClr val="D0F1DE"/>
+                        <a:srgbClr val="D1FAF7"/>
                       </a:solidFill>
                       <a:prstDash val="solid"/>
                     </a:lnB>
                     <a:solidFill>
-                      <a:srgbClr val="F0FAF4"/>
+                      <a:srgbClr val="EEFCFB"/>
                     </a:solidFill>
                   </a:tcPr>
                 </a:tc>
@@ -4078,7 +4078,7 @@
     <p:bg>
       <p:bgPr>
         <a:solidFill>
-          <a:srgbClr val="F0FAF4"/>
+          <a:srgbClr val="EEFCFB"/>
         </a:solidFill>
         <a:effectLst/>
       </p:bgPr>
@@ -4107,7 +4107,7 @@
           <a:noFill/>
           <a:ln w="28575">
             <a:solidFill>
-              <a:srgbClr val="308854"/>
+              <a:srgbClr val="26C5B8"/>
             </a:solidFill>
           </a:ln>
         </p:spPr>
@@ -4136,7 +4136,7 @@
           <a:noFill/>
           <a:ln w="9525">
             <a:solidFill>
-              <a:srgbClr val="D0F1DE"/>
+              <a:srgbClr val="D1FAF7"/>
             </a:solidFill>
           </a:ln>
         </p:spPr>
@@ -4178,7 +4178,7 @@
             <a:r>
               <a:rPr sz="3000" b="1" i="0">
                 <a:solidFill>
-                  <a:srgbClr val="153C26"/>
+                  <a:srgbClr val="115F59"/>
                 </a:solidFill>
               </a:rPr>
               <a:t>가입한 보험 목록</a:t>
@@ -4231,30 +4231,30 @@
                   <a:tcPr anchor="ctr" marL="73152" marR="73152">
                     <a:lnL w="9525" cap="flat" cmpd="sng" algn="ctr">
                       <a:solidFill>
-                        <a:srgbClr val="308854"/>
+                        <a:srgbClr val="26C5B8"/>
                       </a:solidFill>
                       <a:prstDash val="solid"/>
                     </a:lnL>
                     <a:lnR w="9525" cap="flat" cmpd="sng" algn="ctr">
                       <a:solidFill>
-                        <a:srgbClr val="308854"/>
+                        <a:srgbClr val="26C5B8"/>
                       </a:solidFill>
                       <a:prstDash val="solid"/>
                     </a:lnR>
                     <a:lnT w="9525" cap="flat" cmpd="sng" algn="ctr">
                       <a:solidFill>
-                        <a:srgbClr val="308854"/>
+                        <a:srgbClr val="26C5B8"/>
                       </a:solidFill>
                       <a:prstDash val="solid"/>
                     </a:lnT>
                     <a:lnB w="9525" cap="flat" cmpd="sng" algn="ctr">
                       <a:solidFill>
-                        <a:srgbClr val="308854"/>
+                        <a:srgbClr val="26C5B8"/>
                       </a:solidFill>
                       <a:prstDash val="solid"/>
                     </a:lnB>
                     <a:solidFill>
-                      <a:srgbClr val="308854"/>
+                      <a:srgbClr val="26C5B8"/>
                     </a:solidFill>
                   </a:tcPr>
                 </a:tc>
@@ -4277,30 +4277,30 @@
                   <a:tcPr anchor="ctr" marL="73152" marR="73152">
                     <a:lnL w="9525" cap="flat" cmpd="sng" algn="ctr">
                       <a:solidFill>
-                        <a:srgbClr val="308854"/>
+                        <a:srgbClr val="26C5B8"/>
                       </a:solidFill>
                       <a:prstDash val="solid"/>
                     </a:lnL>
                     <a:lnR w="9525" cap="flat" cmpd="sng" algn="ctr">
                       <a:solidFill>
-                        <a:srgbClr val="308854"/>
+                        <a:srgbClr val="26C5B8"/>
                       </a:solidFill>
                       <a:prstDash val="solid"/>
                     </a:lnR>
                     <a:lnT w="9525" cap="flat" cmpd="sng" algn="ctr">
                       <a:solidFill>
-                        <a:srgbClr val="308854"/>
+                        <a:srgbClr val="26C5B8"/>
                       </a:solidFill>
                       <a:prstDash val="solid"/>
                     </a:lnT>
                     <a:lnB w="9525" cap="flat" cmpd="sng" algn="ctr">
                       <a:solidFill>
-                        <a:srgbClr val="308854"/>
+                        <a:srgbClr val="26C5B8"/>
                       </a:solidFill>
                       <a:prstDash val="solid"/>
                     </a:lnB>
                     <a:solidFill>
-                      <a:srgbClr val="308854"/>
+                      <a:srgbClr val="26C5B8"/>
                     </a:solidFill>
                   </a:tcPr>
                 </a:tc>
@@ -4323,30 +4323,30 @@
                   <a:tcPr anchor="ctr" marL="73152" marR="73152">
                     <a:lnL w="9525" cap="flat" cmpd="sng" algn="ctr">
                       <a:solidFill>
-                        <a:srgbClr val="308854"/>
+                        <a:srgbClr val="26C5B8"/>
                       </a:solidFill>
                       <a:prstDash val="solid"/>
                     </a:lnL>
                     <a:lnR w="9525" cap="flat" cmpd="sng" algn="ctr">
                       <a:solidFill>
-                        <a:srgbClr val="308854"/>
+                        <a:srgbClr val="26C5B8"/>
                       </a:solidFill>
                       <a:prstDash val="solid"/>
                     </a:lnR>
                     <a:lnT w="9525" cap="flat" cmpd="sng" algn="ctr">
                       <a:solidFill>
-                        <a:srgbClr val="308854"/>
+                        <a:srgbClr val="26C5B8"/>
                       </a:solidFill>
                       <a:prstDash val="solid"/>
                     </a:lnT>
                     <a:lnB w="9525" cap="flat" cmpd="sng" algn="ctr">
                       <a:solidFill>
-                        <a:srgbClr val="308854"/>
+                        <a:srgbClr val="26C5B8"/>
                       </a:solidFill>
                       <a:prstDash val="solid"/>
                     </a:lnB>
                     <a:solidFill>
-                      <a:srgbClr val="308854"/>
+                      <a:srgbClr val="26C5B8"/>
                     </a:solidFill>
                   </a:tcPr>
                 </a:tc>
@@ -4369,30 +4369,30 @@
                   <a:tcPr anchor="ctr" marL="73152" marR="73152">
                     <a:lnL w="9525" cap="flat" cmpd="sng" algn="ctr">
                       <a:solidFill>
-                        <a:srgbClr val="308854"/>
+                        <a:srgbClr val="26C5B8"/>
                       </a:solidFill>
                       <a:prstDash val="solid"/>
                     </a:lnL>
                     <a:lnR w="9525" cap="flat" cmpd="sng" algn="ctr">
                       <a:solidFill>
-                        <a:srgbClr val="308854"/>
+                        <a:srgbClr val="26C5B8"/>
                       </a:solidFill>
                       <a:prstDash val="solid"/>
                     </a:lnR>
                     <a:lnT w="9525" cap="flat" cmpd="sng" algn="ctr">
                       <a:solidFill>
-                        <a:srgbClr val="308854"/>
+                        <a:srgbClr val="26C5B8"/>
                       </a:solidFill>
                       <a:prstDash val="solid"/>
                     </a:lnT>
                     <a:lnB w="9525" cap="flat" cmpd="sng" algn="ctr">
                       <a:solidFill>
-                        <a:srgbClr val="308854"/>
+                        <a:srgbClr val="26C5B8"/>
                       </a:solidFill>
                       <a:prstDash val="solid"/>
                     </a:lnB>
                     <a:solidFill>
-                      <a:srgbClr val="308854"/>
+                      <a:srgbClr val="26C5B8"/>
                     </a:solidFill>
                   </a:tcPr>
                 </a:tc>
@@ -4415,30 +4415,30 @@
                   <a:tcPr anchor="ctr" marL="73152" marR="73152">
                     <a:lnL w="9525" cap="flat" cmpd="sng" algn="ctr">
                       <a:solidFill>
-                        <a:srgbClr val="308854"/>
+                        <a:srgbClr val="26C5B8"/>
                       </a:solidFill>
                       <a:prstDash val="solid"/>
                     </a:lnL>
                     <a:lnR w="9525" cap="flat" cmpd="sng" algn="ctr">
                       <a:solidFill>
-                        <a:srgbClr val="308854"/>
+                        <a:srgbClr val="26C5B8"/>
                       </a:solidFill>
                       <a:prstDash val="solid"/>
                     </a:lnR>
                     <a:lnT w="9525" cap="flat" cmpd="sng" algn="ctr">
                       <a:solidFill>
-                        <a:srgbClr val="308854"/>
+                        <a:srgbClr val="26C5B8"/>
                       </a:solidFill>
                       <a:prstDash val="solid"/>
                     </a:lnT>
                     <a:lnB w="9525" cap="flat" cmpd="sng" algn="ctr">
                       <a:solidFill>
-                        <a:srgbClr val="308854"/>
+                        <a:srgbClr val="26C5B8"/>
                       </a:solidFill>
                       <a:prstDash val="solid"/>
                     </a:lnB>
                     <a:solidFill>
-                      <a:srgbClr val="308854"/>
+                      <a:srgbClr val="26C5B8"/>
                     </a:solidFill>
                   </a:tcPr>
                 </a:tc>
@@ -4463,25 +4463,25 @@
                   <a:tcPr anchor="ctr" marL="73152" marR="73152">
                     <a:lnL w="9525" cap="flat" cmpd="sng" algn="ctr">
                       <a:solidFill>
-                        <a:srgbClr val="D0F1DE"/>
+                        <a:srgbClr val="D1FAF7"/>
                       </a:solidFill>
                       <a:prstDash val="solid"/>
                     </a:lnL>
                     <a:lnR w="9525" cap="flat" cmpd="sng" algn="ctr">
                       <a:solidFill>
-                        <a:srgbClr val="D0F1DE"/>
+                        <a:srgbClr val="D1FAF7"/>
                       </a:solidFill>
                       <a:prstDash val="solid"/>
                     </a:lnR>
                     <a:lnT w="9525" cap="flat" cmpd="sng" algn="ctr">
                       <a:solidFill>
-                        <a:srgbClr val="D0F1DE"/>
+                        <a:srgbClr val="D1FAF7"/>
                       </a:solidFill>
                       <a:prstDash val="solid"/>
                     </a:lnT>
                     <a:lnB w="9525" cap="flat" cmpd="sng" algn="ctr">
                       <a:solidFill>
-                        <a:srgbClr val="D0F1DE"/>
+                        <a:srgbClr val="D1FAF7"/>
                       </a:solidFill>
                       <a:prstDash val="solid"/>
                     </a:lnB>
@@ -4509,25 +4509,25 @@
                   <a:tcPr anchor="ctr" marL="73152" marR="73152">
                     <a:lnL w="9525" cap="flat" cmpd="sng" algn="ctr">
                       <a:solidFill>
-                        <a:srgbClr val="D0F1DE"/>
+                        <a:srgbClr val="D1FAF7"/>
                       </a:solidFill>
                       <a:prstDash val="solid"/>
                     </a:lnL>
                     <a:lnR w="9525" cap="flat" cmpd="sng" algn="ctr">
                       <a:solidFill>
-                        <a:srgbClr val="D0F1DE"/>
+                        <a:srgbClr val="D1FAF7"/>
                       </a:solidFill>
                       <a:prstDash val="solid"/>
                     </a:lnR>
                     <a:lnT w="9525" cap="flat" cmpd="sng" algn="ctr">
                       <a:solidFill>
-                        <a:srgbClr val="D0F1DE"/>
+                        <a:srgbClr val="D1FAF7"/>
                       </a:solidFill>
                       <a:prstDash val="solid"/>
                     </a:lnT>
                     <a:lnB w="9525" cap="flat" cmpd="sng" algn="ctr">
                       <a:solidFill>
-                        <a:srgbClr val="D0F1DE"/>
+                        <a:srgbClr val="D1FAF7"/>
                       </a:solidFill>
                       <a:prstDash val="solid"/>
                     </a:lnB>
@@ -4555,25 +4555,25 @@
                   <a:tcPr anchor="ctr" marL="73152" marR="73152">
                     <a:lnL w="9525" cap="flat" cmpd="sng" algn="ctr">
                       <a:solidFill>
-                        <a:srgbClr val="D0F1DE"/>
+                        <a:srgbClr val="D1FAF7"/>
                       </a:solidFill>
                       <a:prstDash val="solid"/>
                     </a:lnL>
                     <a:lnR w="9525" cap="flat" cmpd="sng" algn="ctr">
                       <a:solidFill>
-                        <a:srgbClr val="D0F1DE"/>
+                        <a:srgbClr val="D1FAF7"/>
                       </a:solidFill>
                       <a:prstDash val="solid"/>
                     </a:lnR>
                     <a:lnT w="9525" cap="flat" cmpd="sng" algn="ctr">
                       <a:solidFill>
-                        <a:srgbClr val="D0F1DE"/>
+                        <a:srgbClr val="D1FAF7"/>
                       </a:solidFill>
                       <a:prstDash val="solid"/>
                     </a:lnT>
                     <a:lnB w="9525" cap="flat" cmpd="sng" algn="ctr">
                       <a:solidFill>
-                        <a:srgbClr val="D0F1DE"/>
+                        <a:srgbClr val="D1FAF7"/>
                       </a:solidFill>
                       <a:prstDash val="solid"/>
                     </a:lnB>
@@ -4601,25 +4601,25 @@
                   <a:tcPr anchor="ctr" marL="73152" marR="73152">
                     <a:lnL w="9525" cap="flat" cmpd="sng" algn="ctr">
                       <a:solidFill>
-                        <a:srgbClr val="D0F1DE"/>
+                        <a:srgbClr val="D1FAF7"/>
                       </a:solidFill>
                       <a:prstDash val="solid"/>
                     </a:lnL>
                     <a:lnR w="9525" cap="flat" cmpd="sng" algn="ctr">
                       <a:solidFill>
-                        <a:srgbClr val="D0F1DE"/>
+                        <a:srgbClr val="D1FAF7"/>
                       </a:solidFill>
                       <a:prstDash val="solid"/>
                     </a:lnR>
                     <a:lnT w="9525" cap="flat" cmpd="sng" algn="ctr">
                       <a:solidFill>
-                        <a:srgbClr val="D0F1DE"/>
+                        <a:srgbClr val="D1FAF7"/>
                       </a:solidFill>
                       <a:prstDash val="solid"/>
                     </a:lnT>
                     <a:lnB w="9525" cap="flat" cmpd="sng" algn="ctr">
                       <a:solidFill>
-                        <a:srgbClr val="D0F1DE"/>
+                        <a:srgbClr val="D1FAF7"/>
                       </a:solidFill>
                       <a:prstDash val="solid"/>
                     </a:lnB>
@@ -4647,25 +4647,25 @@
                   <a:tcPr anchor="ctr" marL="73152" marR="73152">
                     <a:lnL w="9525" cap="flat" cmpd="sng" algn="ctr">
                       <a:solidFill>
-                        <a:srgbClr val="D0F1DE"/>
+                        <a:srgbClr val="D1FAF7"/>
                       </a:solidFill>
                       <a:prstDash val="solid"/>
                     </a:lnL>
                     <a:lnR w="9525" cap="flat" cmpd="sng" algn="ctr">
                       <a:solidFill>
-                        <a:srgbClr val="D0F1DE"/>
+                        <a:srgbClr val="D1FAF7"/>
                       </a:solidFill>
                       <a:prstDash val="solid"/>
                     </a:lnR>
                     <a:lnT w="9525" cap="flat" cmpd="sng" algn="ctr">
                       <a:solidFill>
-                        <a:srgbClr val="D0F1DE"/>
+                        <a:srgbClr val="D1FAF7"/>
                       </a:solidFill>
                       <a:prstDash val="solid"/>
                     </a:lnT>
                     <a:lnB w="9525" cap="flat" cmpd="sng" algn="ctr">
                       <a:solidFill>
-                        <a:srgbClr val="D0F1DE"/>
+                        <a:srgbClr val="D1FAF7"/>
                       </a:solidFill>
                       <a:prstDash val="solid"/>
                     </a:lnB>
@@ -4695,30 +4695,30 @@
                   <a:tcPr anchor="ctr" marL="73152" marR="73152">
                     <a:lnL w="9525" cap="flat" cmpd="sng" algn="ctr">
                       <a:solidFill>
-                        <a:srgbClr val="D0F1DE"/>
+                        <a:srgbClr val="D1FAF7"/>
                       </a:solidFill>
                       <a:prstDash val="solid"/>
                     </a:lnL>
                     <a:lnR w="9525" cap="flat" cmpd="sng" algn="ctr">
                       <a:solidFill>
-                        <a:srgbClr val="D0F1DE"/>
+                        <a:srgbClr val="D1FAF7"/>
                       </a:solidFill>
                       <a:prstDash val="solid"/>
                     </a:lnR>
                     <a:lnT w="9525" cap="flat" cmpd="sng" algn="ctr">
                       <a:solidFill>
-                        <a:srgbClr val="D0F1DE"/>
+                        <a:srgbClr val="D1FAF7"/>
                       </a:solidFill>
                       <a:prstDash val="solid"/>
                     </a:lnT>
                     <a:lnB w="9525" cap="flat" cmpd="sng" algn="ctr">
                       <a:solidFill>
-                        <a:srgbClr val="D0F1DE"/>
+                        <a:srgbClr val="D1FAF7"/>
                       </a:solidFill>
                       <a:prstDash val="solid"/>
                     </a:lnB>
                     <a:solidFill>
-                      <a:srgbClr val="F0FAF4"/>
+                      <a:srgbClr val="EEFCFB"/>
                     </a:solidFill>
                   </a:tcPr>
                 </a:tc>
@@ -4741,30 +4741,30 @@
                   <a:tcPr anchor="ctr" marL="73152" marR="73152">
                     <a:lnL w="9525" cap="flat" cmpd="sng" algn="ctr">
                       <a:solidFill>
-                        <a:srgbClr val="D0F1DE"/>
+                        <a:srgbClr val="D1FAF7"/>
                       </a:solidFill>
                       <a:prstDash val="solid"/>
                     </a:lnL>
                     <a:lnR w="9525" cap="flat" cmpd="sng" algn="ctr">
                       <a:solidFill>
-                        <a:srgbClr val="D0F1DE"/>
+                        <a:srgbClr val="D1FAF7"/>
                       </a:solidFill>
                       <a:prstDash val="solid"/>
                     </a:lnR>
                     <a:lnT w="9525" cap="flat" cmpd="sng" algn="ctr">
                       <a:solidFill>
-                        <a:srgbClr val="D0F1DE"/>
+                        <a:srgbClr val="D1FAF7"/>
                       </a:solidFill>
                       <a:prstDash val="solid"/>
                     </a:lnT>
                     <a:lnB w="9525" cap="flat" cmpd="sng" algn="ctr">
                       <a:solidFill>
-                        <a:srgbClr val="D0F1DE"/>
+                        <a:srgbClr val="D1FAF7"/>
                       </a:solidFill>
                       <a:prstDash val="solid"/>
                     </a:lnB>
                     <a:solidFill>
-                      <a:srgbClr val="F0FAF4"/>
+                      <a:srgbClr val="EEFCFB"/>
                     </a:solidFill>
                   </a:tcPr>
                 </a:tc>
@@ -4787,30 +4787,30 @@
                   <a:tcPr anchor="ctr" marL="73152" marR="73152">
                     <a:lnL w="9525" cap="flat" cmpd="sng" algn="ctr">
                       <a:solidFill>
-                        <a:srgbClr val="D0F1DE"/>
+                        <a:srgbClr val="D1FAF7"/>
                       </a:solidFill>
                       <a:prstDash val="solid"/>
                     </a:lnL>
                     <a:lnR w="9525" cap="flat" cmpd="sng" algn="ctr">
                       <a:solidFill>
-                        <a:srgbClr val="D0F1DE"/>
+                        <a:srgbClr val="D1FAF7"/>
                       </a:solidFill>
                       <a:prstDash val="solid"/>
                     </a:lnR>
                     <a:lnT w="9525" cap="flat" cmpd="sng" algn="ctr">
                       <a:solidFill>
-                        <a:srgbClr val="D0F1DE"/>
+                        <a:srgbClr val="D1FAF7"/>
                       </a:solidFill>
                       <a:prstDash val="solid"/>
                     </a:lnT>
                     <a:lnB w="9525" cap="flat" cmpd="sng" algn="ctr">
                       <a:solidFill>
-                        <a:srgbClr val="D0F1DE"/>
+                        <a:srgbClr val="D1FAF7"/>
                       </a:solidFill>
                       <a:prstDash val="solid"/>
                     </a:lnB>
                     <a:solidFill>
-                      <a:srgbClr val="F0FAF4"/>
+                      <a:srgbClr val="EEFCFB"/>
                     </a:solidFill>
                   </a:tcPr>
                 </a:tc>
@@ -4833,30 +4833,30 @@
                   <a:tcPr anchor="ctr" marL="73152" marR="73152">
                     <a:lnL w="9525" cap="flat" cmpd="sng" algn="ctr">
                       <a:solidFill>
-                        <a:srgbClr val="D0F1DE"/>
+                        <a:srgbClr val="D1FAF7"/>
                       </a:solidFill>
                       <a:prstDash val="solid"/>
                     </a:lnL>
                     <a:lnR w="9525" cap="flat" cmpd="sng" algn="ctr">
                       <a:solidFill>
-                        <a:srgbClr val="D0F1DE"/>
+                        <a:srgbClr val="D1FAF7"/>
                       </a:solidFill>
                       <a:prstDash val="solid"/>
                     </a:lnR>
                     <a:lnT w="9525" cap="flat" cmpd="sng" algn="ctr">
                       <a:solidFill>
-                        <a:srgbClr val="D0F1DE"/>
+                        <a:srgbClr val="D1FAF7"/>
                       </a:solidFill>
                       <a:prstDash val="solid"/>
                     </a:lnT>
                     <a:lnB w="9525" cap="flat" cmpd="sng" algn="ctr">
                       <a:solidFill>
-                        <a:srgbClr val="D0F1DE"/>
+                        <a:srgbClr val="D1FAF7"/>
                       </a:solidFill>
                       <a:prstDash val="solid"/>
                     </a:lnB>
                     <a:solidFill>
-                      <a:srgbClr val="F0FAF4"/>
+                      <a:srgbClr val="EEFCFB"/>
                     </a:solidFill>
                   </a:tcPr>
                 </a:tc>
@@ -4879,30 +4879,30 @@
                   <a:tcPr anchor="ctr" marL="73152" marR="73152">
                     <a:lnL w="9525" cap="flat" cmpd="sng" algn="ctr">
                       <a:solidFill>
-                        <a:srgbClr val="D0F1DE"/>
+                        <a:srgbClr val="D1FAF7"/>
                       </a:solidFill>
                       <a:prstDash val="solid"/>
                     </a:lnL>
                     <a:lnR w="9525" cap="flat" cmpd="sng" algn="ctr">
                       <a:solidFill>
-                        <a:srgbClr val="D0F1DE"/>
+                        <a:srgbClr val="D1FAF7"/>
                       </a:solidFill>
                       <a:prstDash val="solid"/>
                     </a:lnR>
                     <a:lnT w="9525" cap="flat" cmpd="sng" algn="ctr">
                       <a:solidFill>
-                        <a:srgbClr val="D0F1DE"/>
+                        <a:srgbClr val="D1FAF7"/>
                       </a:solidFill>
                       <a:prstDash val="solid"/>
                     </a:lnT>
                     <a:lnB w="9525" cap="flat" cmpd="sng" algn="ctr">
                       <a:solidFill>
-                        <a:srgbClr val="D0F1DE"/>
+                        <a:srgbClr val="D1FAF7"/>
                       </a:solidFill>
                       <a:prstDash val="solid"/>
                     </a:lnB>
                     <a:solidFill>
-                      <a:srgbClr val="F0FAF4"/>
+                      <a:srgbClr val="EEFCFB"/>
                     </a:solidFill>
                   </a:tcPr>
                 </a:tc>
@@ -4927,25 +4927,25 @@
                   <a:tcPr anchor="ctr" marL="73152" marR="73152">
                     <a:lnL w="9525" cap="flat" cmpd="sng" algn="ctr">
                       <a:solidFill>
-                        <a:srgbClr val="D0F1DE"/>
+                        <a:srgbClr val="D1FAF7"/>
                       </a:solidFill>
                       <a:prstDash val="solid"/>
                     </a:lnL>
                     <a:lnR w="9525" cap="flat" cmpd="sng" algn="ctr">
                       <a:solidFill>
-                        <a:srgbClr val="D0F1DE"/>
+                        <a:srgbClr val="D1FAF7"/>
                       </a:solidFill>
                       <a:prstDash val="solid"/>
                     </a:lnR>
                     <a:lnT w="9525" cap="flat" cmpd="sng" algn="ctr">
                       <a:solidFill>
-                        <a:srgbClr val="D0F1DE"/>
+                        <a:srgbClr val="D1FAF7"/>
                       </a:solidFill>
                       <a:prstDash val="solid"/>
                     </a:lnT>
                     <a:lnB w="9525" cap="flat" cmpd="sng" algn="ctr">
                       <a:solidFill>
-                        <a:srgbClr val="D0F1DE"/>
+                        <a:srgbClr val="D1FAF7"/>
                       </a:solidFill>
                       <a:prstDash val="solid"/>
                     </a:lnB>
@@ -4973,25 +4973,25 @@
                   <a:tcPr anchor="ctr" marL="73152" marR="73152">
                     <a:lnL w="9525" cap="flat" cmpd="sng" algn="ctr">
                       <a:solidFill>
-                        <a:srgbClr val="D0F1DE"/>
+                        <a:srgbClr val="D1FAF7"/>
                       </a:solidFill>
                       <a:prstDash val="solid"/>
                     </a:lnL>
                     <a:lnR w="9525" cap="flat" cmpd="sng" algn="ctr">
                       <a:solidFill>
-                        <a:srgbClr val="D0F1DE"/>
+                        <a:srgbClr val="D1FAF7"/>
                       </a:solidFill>
                       <a:prstDash val="solid"/>
                     </a:lnR>
                     <a:lnT w="9525" cap="flat" cmpd="sng" algn="ctr">
                       <a:solidFill>
-                        <a:srgbClr val="D0F1DE"/>
+                        <a:srgbClr val="D1FAF7"/>
                       </a:solidFill>
                       <a:prstDash val="solid"/>
                     </a:lnT>
                     <a:lnB w="9525" cap="flat" cmpd="sng" algn="ctr">
                       <a:solidFill>
-                        <a:srgbClr val="D0F1DE"/>
+                        <a:srgbClr val="D1FAF7"/>
                       </a:solidFill>
                       <a:prstDash val="solid"/>
                     </a:lnB>
@@ -5019,25 +5019,25 @@
                   <a:tcPr anchor="ctr" marL="73152" marR="73152">
                     <a:lnL w="9525" cap="flat" cmpd="sng" algn="ctr">
                       <a:solidFill>
-                        <a:srgbClr val="D0F1DE"/>
+                        <a:srgbClr val="D1FAF7"/>
                       </a:solidFill>
                       <a:prstDash val="solid"/>
                     </a:lnL>
                     <a:lnR w="9525" cap="flat" cmpd="sng" algn="ctr">
                       <a:solidFill>
-                        <a:srgbClr val="D0F1DE"/>
+                        <a:srgbClr val="D1FAF7"/>
                       </a:solidFill>
                       <a:prstDash val="solid"/>
                     </a:lnR>
                     <a:lnT w="9525" cap="flat" cmpd="sng" algn="ctr">
                       <a:solidFill>
-                        <a:srgbClr val="D0F1DE"/>
+                        <a:srgbClr val="D1FAF7"/>
                       </a:solidFill>
                       <a:prstDash val="solid"/>
                     </a:lnT>
                     <a:lnB w="9525" cap="flat" cmpd="sng" algn="ctr">
                       <a:solidFill>
-                        <a:srgbClr val="D0F1DE"/>
+                        <a:srgbClr val="D1FAF7"/>
                       </a:solidFill>
                       <a:prstDash val="solid"/>
                     </a:lnB>
@@ -5065,25 +5065,25 @@
                   <a:tcPr anchor="ctr" marL="73152" marR="73152">
                     <a:lnL w="9525" cap="flat" cmpd="sng" algn="ctr">
                       <a:solidFill>
-                        <a:srgbClr val="D0F1DE"/>
+                        <a:srgbClr val="D1FAF7"/>
                       </a:solidFill>
                       <a:prstDash val="solid"/>
                     </a:lnL>
                     <a:lnR w="9525" cap="flat" cmpd="sng" algn="ctr">
                       <a:solidFill>
-                        <a:srgbClr val="D0F1DE"/>
+                        <a:srgbClr val="D1FAF7"/>
                       </a:solidFill>
                       <a:prstDash val="solid"/>
                     </a:lnR>
                     <a:lnT w="9525" cap="flat" cmpd="sng" algn="ctr">
                       <a:solidFill>
-                        <a:srgbClr val="D0F1DE"/>
+                        <a:srgbClr val="D1FAF7"/>
                       </a:solidFill>
                       <a:prstDash val="solid"/>
                     </a:lnT>
                     <a:lnB w="9525" cap="flat" cmpd="sng" algn="ctr">
                       <a:solidFill>
-                        <a:srgbClr val="D0F1DE"/>
+                        <a:srgbClr val="D1FAF7"/>
                       </a:solidFill>
                       <a:prstDash val="solid"/>
                     </a:lnB>
@@ -5111,25 +5111,25 @@
                   <a:tcPr anchor="ctr" marL="73152" marR="73152">
                     <a:lnL w="9525" cap="flat" cmpd="sng" algn="ctr">
                       <a:solidFill>
-                        <a:srgbClr val="D0F1DE"/>
+                        <a:srgbClr val="D1FAF7"/>
                       </a:solidFill>
                       <a:prstDash val="solid"/>
                     </a:lnL>
                     <a:lnR w="9525" cap="flat" cmpd="sng" algn="ctr">
                       <a:solidFill>
-                        <a:srgbClr val="D0F1DE"/>
+                        <a:srgbClr val="D1FAF7"/>
                       </a:solidFill>
                       <a:prstDash val="solid"/>
                     </a:lnR>
                     <a:lnT w="9525" cap="flat" cmpd="sng" algn="ctr">
                       <a:solidFill>
-                        <a:srgbClr val="D0F1DE"/>
+                        <a:srgbClr val="D1FAF7"/>
                       </a:solidFill>
                       <a:prstDash val="solid"/>
                     </a:lnT>
                     <a:lnB w="9525" cap="flat" cmpd="sng" algn="ctr">
                       <a:solidFill>
-                        <a:srgbClr val="D0F1DE"/>
+                        <a:srgbClr val="D1FAF7"/>
                       </a:solidFill>
                       <a:prstDash val="solid"/>
                     </a:lnB>
@@ -5159,30 +5159,30 @@
                   <a:tcPr anchor="ctr" marL="73152" marR="73152">
                     <a:lnL w="9525" cap="flat" cmpd="sng" algn="ctr">
                       <a:solidFill>
-                        <a:srgbClr val="D0F1DE"/>
+                        <a:srgbClr val="D1FAF7"/>
                       </a:solidFill>
                       <a:prstDash val="solid"/>
                     </a:lnL>
                     <a:lnR w="9525" cap="flat" cmpd="sng" algn="ctr">
                       <a:solidFill>
-                        <a:srgbClr val="D0F1DE"/>
+                        <a:srgbClr val="D1FAF7"/>
                       </a:solidFill>
                       <a:prstDash val="solid"/>
                     </a:lnR>
                     <a:lnT w="9525" cap="flat" cmpd="sng" algn="ctr">
                       <a:solidFill>
-                        <a:srgbClr val="D0F1DE"/>
+                        <a:srgbClr val="D1FAF7"/>
                       </a:solidFill>
                       <a:prstDash val="solid"/>
                     </a:lnT>
                     <a:lnB w="9525" cap="flat" cmpd="sng" algn="ctr">
                       <a:solidFill>
-                        <a:srgbClr val="D0F1DE"/>
+                        <a:srgbClr val="D1FAF7"/>
                       </a:solidFill>
                       <a:prstDash val="solid"/>
                     </a:lnB>
                     <a:solidFill>
-                      <a:srgbClr val="F0FAF4"/>
+                      <a:srgbClr val="EEFCFB"/>
                     </a:solidFill>
                   </a:tcPr>
                 </a:tc>
@@ -5205,30 +5205,30 @@
                   <a:tcPr anchor="ctr" marL="73152" marR="73152">
                     <a:lnL w="9525" cap="flat" cmpd="sng" algn="ctr">
                       <a:solidFill>
-                        <a:srgbClr val="D0F1DE"/>
+                        <a:srgbClr val="D1FAF7"/>
                       </a:solidFill>
                       <a:prstDash val="solid"/>
                     </a:lnL>
                     <a:lnR w="9525" cap="flat" cmpd="sng" algn="ctr">
                       <a:solidFill>
-                        <a:srgbClr val="D0F1DE"/>
+                        <a:srgbClr val="D1FAF7"/>
                       </a:solidFill>
                       <a:prstDash val="solid"/>
                     </a:lnR>
                     <a:lnT w="9525" cap="flat" cmpd="sng" algn="ctr">
                       <a:solidFill>
-                        <a:srgbClr val="D0F1DE"/>
+                        <a:srgbClr val="D1FAF7"/>
                       </a:solidFill>
                       <a:prstDash val="solid"/>
                     </a:lnT>
                     <a:lnB w="9525" cap="flat" cmpd="sng" algn="ctr">
                       <a:solidFill>
-                        <a:srgbClr val="D0F1DE"/>
+                        <a:srgbClr val="D1FAF7"/>
                       </a:solidFill>
                       <a:prstDash val="solid"/>
                     </a:lnB>
                     <a:solidFill>
-                      <a:srgbClr val="F0FAF4"/>
+                      <a:srgbClr val="EEFCFB"/>
                     </a:solidFill>
                   </a:tcPr>
                 </a:tc>
@@ -5251,30 +5251,30 @@
                   <a:tcPr anchor="ctr" marL="73152" marR="73152">
                     <a:lnL w="9525" cap="flat" cmpd="sng" algn="ctr">
                       <a:solidFill>
-                        <a:srgbClr val="D0F1DE"/>
+                        <a:srgbClr val="D1FAF7"/>
                       </a:solidFill>
                       <a:prstDash val="solid"/>
                     </a:lnL>
                     <a:lnR w="9525" cap="flat" cmpd="sng" algn="ctr">
                       <a:solidFill>
-                        <a:srgbClr val="D0F1DE"/>
+                        <a:srgbClr val="D1FAF7"/>
                       </a:solidFill>
                       <a:prstDash val="solid"/>
                     </a:lnR>
                     <a:lnT w="9525" cap="flat" cmpd="sng" algn="ctr">
                       <a:solidFill>
-                        <a:srgbClr val="D0F1DE"/>
+                        <a:srgbClr val="D1FAF7"/>
                       </a:solidFill>
                       <a:prstDash val="solid"/>
                     </a:lnT>
                     <a:lnB w="9525" cap="flat" cmpd="sng" algn="ctr">
                       <a:solidFill>
-                        <a:srgbClr val="D0F1DE"/>
+                        <a:srgbClr val="D1FAF7"/>
                       </a:solidFill>
                       <a:prstDash val="solid"/>
                     </a:lnB>
                     <a:solidFill>
-                      <a:srgbClr val="F0FAF4"/>
+                      <a:srgbClr val="EEFCFB"/>
                     </a:solidFill>
                   </a:tcPr>
                 </a:tc>
@@ -5297,30 +5297,30 @@
                   <a:tcPr anchor="ctr" marL="73152" marR="73152">
                     <a:lnL w="9525" cap="flat" cmpd="sng" algn="ctr">
                       <a:solidFill>
-                        <a:srgbClr val="D0F1DE"/>
+                        <a:srgbClr val="D1FAF7"/>
                       </a:solidFill>
                       <a:prstDash val="solid"/>
                     </a:lnL>
                     <a:lnR w="9525" cap="flat" cmpd="sng" algn="ctr">
                       <a:solidFill>
-                        <a:srgbClr val="D0F1DE"/>
+                        <a:srgbClr val="D1FAF7"/>
                       </a:solidFill>
                       <a:prstDash val="solid"/>
                     </a:lnR>
                     <a:lnT w="9525" cap="flat" cmpd="sng" algn="ctr">
                       <a:solidFill>
-                        <a:srgbClr val="D0F1DE"/>
+                        <a:srgbClr val="D1FAF7"/>
                       </a:solidFill>
                       <a:prstDash val="solid"/>
                     </a:lnT>
                     <a:lnB w="9525" cap="flat" cmpd="sng" algn="ctr">
                       <a:solidFill>
-                        <a:srgbClr val="D0F1DE"/>
+                        <a:srgbClr val="D1FAF7"/>
                       </a:solidFill>
                       <a:prstDash val="solid"/>
                     </a:lnB>
                     <a:solidFill>
-                      <a:srgbClr val="F0FAF4"/>
+                      <a:srgbClr val="EEFCFB"/>
                     </a:solidFill>
                   </a:tcPr>
                 </a:tc>
@@ -5343,30 +5343,30 @@
                   <a:tcPr anchor="ctr" marL="73152" marR="73152">
                     <a:lnL w="9525" cap="flat" cmpd="sng" algn="ctr">
                       <a:solidFill>
-                        <a:srgbClr val="D0F1DE"/>
+                        <a:srgbClr val="D1FAF7"/>
                       </a:solidFill>
                       <a:prstDash val="solid"/>
                     </a:lnL>
                     <a:lnR w="9525" cap="flat" cmpd="sng" algn="ctr">
                       <a:solidFill>
-                        <a:srgbClr val="D0F1DE"/>
+                        <a:srgbClr val="D1FAF7"/>
                       </a:solidFill>
                       <a:prstDash val="solid"/>
                     </a:lnR>
                     <a:lnT w="9525" cap="flat" cmpd="sng" algn="ctr">
                       <a:solidFill>
-                        <a:srgbClr val="D0F1DE"/>
+                        <a:srgbClr val="D1FAF7"/>
                       </a:solidFill>
                       <a:prstDash val="solid"/>
                     </a:lnT>
                     <a:lnB w="9525" cap="flat" cmpd="sng" algn="ctr">
                       <a:solidFill>
-                        <a:srgbClr val="D0F1DE"/>
+                        <a:srgbClr val="D1FAF7"/>
                       </a:solidFill>
                       <a:prstDash val="solid"/>
                     </a:lnB>
                     <a:solidFill>
-                      <a:srgbClr val="F0FAF4"/>
+                      <a:srgbClr val="EEFCFB"/>
                     </a:solidFill>
                   </a:tcPr>
                 </a:tc>
@@ -5391,25 +5391,25 @@
                   <a:tcPr anchor="ctr" marL="73152" marR="73152">
                     <a:lnL w="9525" cap="flat" cmpd="sng" algn="ctr">
                       <a:solidFill>
-                        <a:srgbClr val="D0F1DE"/>
+                        <a:srgbClr val="D1FAF7"/>
                       </a:solidFill>
                       <a:prstDash val="solid"/>
                     </a:lnL>
                     <a:lnR w="9525" cap="flat" cmpd="sng" algn="ctr">
                       <a:solidFill>
-                        <a:srgbClr val="D0F1DE"/>
+                        <a:srgbClr val="D1FAF7"/>
                       </a:solidFill>
                       <a:prstDash val="solid"/>
                     </a:lnR>
                     <a:lnT w="9525" cap="flat" cmpd="sng" algn="ctr">
                       <a:solidFill>
-                        <a:srgbClr val="D0F1DE"/>
+                        <a:srgbClr val="D1FAF7"/>
                       </a:solidFill>
                       <a:prstDash val="solid"/>
                     </a:lnT>
                     <a:lnB w="9525" cap="flat" cmpd="sng" algn="ctr">
                       <a:solidFill>
-                        <a:srgbClr val="D0F1DE"/>
+                        <a:srgbClr val="D1FAF7"/>
                       </a:solidFill>
                       <a:prstDash val="solid"/>
                     </a:lnB>
@@ -5437,25 +5437,25 @@
                   <a:tcPr anchor="ctr" marL="73152" marR="73152">
                     <a:lnL w="9525" cap="flat" cmpd="sng" algn="ctr">
                       <a:solidFill>
-                        <a:srgbClr val="D0F1DE"/>
+                        <a:srgbClr val="D1FAF7"/>
                       </a:solidFill>
                       <a:prstDash val="solid"/>
                     </a:lnL>
                     <a:lnR w="9525" cap="flat" cmpd="sng" algn="ctr">
                       <a:solidFill>
-                        <a:srgbClr val="D0F1DE"/>
+                        <a:srgbClr val="D1FAF7"/>
                       </a:solidFill>
                       <a:prstDash val="solid"/>
                     </a:lnR>
                     <a:lnT w="9525" cap="flat" cmpd="sng" algn="ctr">
                       <a:solidFill>
-                        <a:srgbClr val="D0F1DE"/>
+                        <a:srgbClr val="D1FAF7"/>
                       </a:solidFill>
                       <a:prstDash val="solid"/>
                     </a:lnT>
                     <a:lnB w="9525" cap="flat" cmpd="sng" algn="ctr">
                       <a:solidFill>
-                        <a:srgbClr val="D0F1DE"/>
+                        <a:srgbClr val="D1FAF7"/>
                       </a:solidFill>
                       <a:prstDash val="solid"/>
                     </a:lnB>
@@ -5483,25 +5483,25 @@
                   <a:tcPr anchor="ctr" marL="73152" marR="73152">
                     <a:lnL w="9525" cap="flat" cmpd="sng" algn="ctr">
                       <a:solidFill>
-                        <a:srgbClr val="D0F1DE"/>
+                        <a:srgbClr val="D1FAF7"/>
                       </a:solidFill>
                       <a:prstDash val="solid"/>
                     </a:lnL>
                     <a:lnR w="9525" cap="flat" cmpd="sng" algn="ctr">
                       <a:solidFill>
-                        <a:srgbClr val="D0F1DE"/>
+                        <a:srgbClr val="D1FAF7"/>
                       </a:solidFill>
                       <a:prstDash val="solid"/>
                     </a:lnR>
                     <a:lnT w="9525" cap="flat" cmpd="sng" algn="ctr">
                       <a:solidFill>
-                        <a:srgbClr val="D0F1DE"/>
+                        <a:srgbClr val="D1FAF7"/>
                       </a:solidFill>
                       <a:prstDash val="solid"/>
                     </a:lnT>
                     <a:lnB w="9525" cap="flat" cmpd="sng" algn="ctr">
                       <a:solidFill>
-                        <a:srgbClr val="D0F1DE"/>
+                        <a:srgbClr val="D1FAF7"/>
                       </a:solidFill>
                       <a:prstDash val="solid"/>
                     </a:lnB>
@@ -5529,25 +5529,25 @@
                   <a:tcPr anchor="ctr" marL="73152" marR="73152">
                     <a:lnL w="9525" cap="flat" cmpd="sng" algn="ctr">
                       <a:solidFill>
-                        <a:srgbClr val="D0F1DE"/>
+                        <a:srgbClr val="D1FAF7"/>
                       </a:solidFill>
                       <a:prstDash val="solid"/>
                     </a:lnL>
                     <a:lnR w="9525" cap="flat" cmpd="sng" algn="ctr">
                       <a:solidFill>
-                        <a:srgbClr val="D0F1DE"/>
+                        <a:srgbClr val="D1FAF7"/>
                       </a:solidFill>
                       <a:prstDash val="solid"/>
                     </a:lnR>
                     <a:lnT w="9525" cap="flat" cmpd="sng" algn="ctr">
                       <a:solidFill>
-                        <a:srgbClr val="D0F1DE"/>
+                        <a:srgbClr val="D1FAF7"/>
                       </a:solidFill>
                       <a:prstDash val="solid"/>
                     </a:lnT>
                     <a:lnB w="9525" cap="flat" cmpd="sng" algn="ctr">
                       <a:solidFill>
-                        <a:srgbClr val="D0F1DE"/>
+                        <a:srgbClr val="D1FAF7"/>
                       </a:solidFill>
                       <a:prstDash val="solid"/>
                     </a:lnB>
@@ -5575,25 +5575,25 @@
                   <a:tcPr anchor="ctr" marL="73152" marR="73152">
                     <a:lnL w="9525" cap="flat" cmpd="sng" algn="ctr">
                       <a:solidFill>
-                        <a:srgbClr val="D0F1DE"/>
+                        <a:srgbClr val="D1FAF7"/>
                       </a:solidFill>
                       <a:prstDash val="solid"/>
                     </a:lnL>
                     <a:lnR w="9525" cap="flat" cmpd="sng" algn="ctr">
                       <a:solidFill>
-                        <a:srgbClr val="D0F1DE"/>
+                        <a:srgbClr val="D1FAF7"/>
                       </a:solidFill>
                       <a:prstDash val="solid"/>
                     </a:lnR>
                     <a:lnT w="9525" cap="flat" cmpd="sng" algn="ctr">
                       <a:solidFill>
-                        <a:srgbClr val="D0F1DE"/>
+                        <a:srgbClr val="D1FAF7"/>
                       </a:solidFill>
                       <a:prstDash val="solid"/>
                     </a:lnT>
                     <a:lnB w="9525" cap="flat" cmpd="sng" algn="ctr">
                       <a:solidFill>
-                        <a:srgbClr val="D0F1DE"/>
+                        <a:srgbClr val="D1FAF7"/>
                       </a:solidFill>
                       <a:prstDash val="solid"/>
                     </a:lnB>
@@ -5623,30 +5623,30 @@
                   <a:tcPr anchor="ctr" marL="73152" marR="73152">
                     <a:lnL w="9525" cap="flat" cmpd="sng" algn="ctr">
                       <a:solidFill>
-                        <a:srgbClr val="D0F1DE"/>
+                        <a:srgbClr val="D1FAF7"/>
                       </a:solidFill>
                       <a:prstDash val="solid"/>
                     </a:lnL>
                     <a:lnR w="9525" cap="flat" cmpd="sng" algn="ctr">
                       <a:solidFill>
-                        <a:srgbClr val="D0F1DE"/>
+                        <a:srgbClr val="D1FAF7"/>
                       </a:solidFill>
                       <a:prstDash val="solid"/>
                     </a:lnR>
                     <a:lnT w="9525" cap="flat" cmpd="sng" algn="ctr">
                       <a:solidFill>
-                        <a:srgbClr val="D0F1DE"/>
+                        <a:srgbClr val="D1FAF7"/>
                       </a:solidFill>
                       <a:prstDash val="solid"/>
                     </a:lnT>
                     <a:lnB w="9525" cap="flat" cmpd="sng" algn="ctr">
                       <a:solidFill>
-                        <a:srgbClr val="D0F1DE"/>
+                        <a:srgbClr val="D1FAF7"/>
                       </a:solidFill>
                       <a:prstDash val="solid"/>
                     </a:lnB>
                     <a:solidFill>
-                      <a:srgbClr val="F0FAF4"/>
+                      <a:srgbClr val="EEFCFB"/>
                     </a:solidFill>
                   </a:tcPr>
                 </a:tc>
@@ -5669,30 +5669,30 @@
                   <a:tcPr anchor="ctr" marL="73152" marR="73152">
                     <a:lnL w="9525" cap="flat" cmpd="sng" algn="ctr">
                       <a:solidFill>
-                        <a:srgbClr val="D0F1DE"/>
+                        <a:srgbClr val="D1FAF7"/>
                       </a:solidFill>
                       <a:prstDash val="solid"/>
                     </a:lnL>
                     <a:lnR w="9525" cap="flat" cmpd="sng" algn="ctr">
                       <a:solidFill>
-                        <a:srgbClr val="D0F1DE"/>
+                        <a:srgbClr val="D1FAF7"/>
                       </a:solidFill>
                       <a:prstDash val="solid"/>
                     </a:lnR>
                     <a:lnT w="9525" cap="flat" cmpd="sng" algn="ctr">
                       <a:solidFill>
-                        <a:srgbClr val="D0F1DE"/>
+                        <a:srgbClr val="D1FAF7"/>
                       </a:solidFill>
                       <a:prstDash val="solid"/>
                     </a:lnT>
                     <a:lnB w="9525" cap="flat" cmpd="sng" algn="ctr">
                       <a:solidFill>
-                        <a:srgbClr val="D0F1DE"/>
+                        <a:srgbClr val="D1FAF7"/>
                       </a:solidFill>
                       <a:prstDash val="solid"/>
                     </a:lnB>
                     <a:solidFill>
-                      <a:srgbClr val="F0FAF4"/>
+                      <a:srgbClr val="EEFCFB"/>
                     </a:solidFill>
                   </a:tcPr>
                 </a:tc>
@@ -5715,30 +5715,30 @@
                   <a:tcPr anchor="ctr" marL="73152" marR="73152">
                     <a:lnL w="9525" cap="flat" cmpd="sng" algn="ctr">
                       <a:solidFill>
-                        <a:srgbClr val="D0F1DE"/>
+                        <a:srgbClr val="D1FAF7"/>
                       </a:solidFill>
                       <a:prstDash val="solid"/>
                     </a:lnL>
                     <a:lnR w="9525" cap="flat" cmpd="sng" algn="ctr">
                       <a:solidFill>
-                        <a:srgbClr val="D0F1DE"/>
+                        <a:srgbClr val="D1FAF7"/>
                       </a:solidFill>
                       <a:prstDash val="solid"/>
                     </a:lnR>
                     <a:lnT w="9525" cap="flat" cmpd="sng" algn="ctr">
                       <a:solidFill>
-                        <a:srgbClr val="D0F1DE"/>
+                        <a:srgbClr val="D1FAF7"/>
                       </a:solidFill>
                       <a:prstDash val="solid"/>
                     </a:lnT>
                     <a:lnB w="9525" cap="flat" cmpd="sng" algn="ctr">
                       <a:solidFill>
-                        <a:srgbClr val="D0F1DE"/>
+                        <a:srgbClr val="D1FAF7"/>
                       </a:solidFill>
                       <a:prstDash val="solid"/>
                     </a:lnB>
                     <a:solidFill>
-                      <a:srgbClr val="F0FAF4"/>
+                      <a:srgbClr val="EEFCFB"/>
                     </a:solidFill>
                   </a:tcPr>
                 </a:tc>
@@ -5761,30 +5761,30 @@
                   <a:tcPr anchor="ctr" marL="73152" marR="73152">
                     <a:lnL w="9525" cap="flat" cmpd="sng" algn="ctr">
                       <a:solidFill>
-                        <a:srgbClr val="D0F1DE"/>
+                        <a:srgbClr val="D1FAF7"/>
                       </a:solidFill>
                       <a:prstDash val="solid"/>
                     </a:lnL>
                     <a:lnR w="9525" cap="flat" cmpd="sng" algn="ctr">
                       <a:solidFill>
-                        <a:srgbClr val="D0F1DE"/>
+                        <a:srgbClr val="D1FAF7"/>
                       </a:solidFill>
                       <a:prstDash val="solid"/>
                     </a:lnR>
                     <a:lnT w="9525" cap="flat" cmpd="sng" algn="ctr">
                       <a:solidFill>
-                        <a:srgbClr val="D0F1DE"/>
+                        <a:srgbClr val="D1FAF7"/>
                       </a:solidFill>
                       <a:prstDash val="solid"/>
                     </a:lnT>
                     <a:lnB w="9525" cap="flat" cmpd="sng" algn="ctr">
                       <a:solidFill>
-                        <a:srgbClr val="D0F1DE"/>
+                        <a:srgbClr val="D1FAF7"/>
                       </a:solidFill>
                       <a:prstDash val="solid"/>
                     </a:lnB>
                     <a:solidFill>
-                      <a:srgbClr val="F0FAF4"/>
+                      <a:srgbClr val="EEFCFB"/>
                     </a:solidFill>
                   </a:tcPr>
                 </a:tc>
@@ -5807,30 +5807,30 @@
                   <a:tcPr anchor="ctr" marL="73152" marR="73152">
                     <a:lnL w="9525" cap="flat" cmpd="sng" algn="ctr">
                       <a:solidFill>
-                        <a:srgbClr val="D0F1DE"/>
+                        <a:srgbClr val="D1FAF7"/>
                       </a:solidFill>
                       <a:prstDash val="solid"/>
                     </a:lnL>
                     <a:lnR w="9525" cap="flat" cmpd="sng" algn="ctr">
                       <a:solidFill>
-                        <a:srgbClr val="D0F1DE"/>
+                        <a:srgbClr val="D1FAF7"/>
                       </a:solidFill>
                       <a:prstDash val="solid"/>
                     </a:lnR>
                     <a:lnT w="9525" cap="flat" cmpd="sng" algn="ctr">
                       <a:solidFill>
-                        <a:srgbClr val="D0F1DE"/>
+                        <a:srgbClr val="D1FAF7"/>
                       </a:solidFill>
                       <a:prstDash val="solid"/>
                     </a:lnT>
                     <a:lnB w="9525" cap="flat" cmpd="sng" algn="ctr">
                       <a:solidFill>
-                        <a:srgbClr val="D0F1DE"/>
+                        <a:srgbClr val="D1FAF7"/>
                       </a:solidFill>
                       <a:prstDash val="solid"/>
                     </a:lnB>
                     <a:solidFill>
-                      <a:srgbClr val="F0FAF4"/>
+                      <a:srgbClr val="EEFCFB"/>
                     </a:solidFill>
                   </a:tcPr>
                 </a:tc>
@@ -5853,7 +5853,7 @@
     <p:bg>
       <p:bgPr>
         <a:solidFill>
-          <a:srgbClr val="F0FAF4"/>
+          <a:srgbClr val="EEFCFB"/>
         </a:solidFill>
         <a:effectLst/>
       </p:bgPr>
@@ -5882,7 +5882,7 @@
           <a:noFill/>
           <a:ln w="28575">
             <a:solidFill>
-              <a:srgbClr val="308854"/>
+              <a:srgbClr val="26C5B8"/>
             </a:solidFill>
           </a:ln>
         </p:spPr>
@@ -5911,7 +5911,7 @@
           <a:noFill/>
           <a:ln w="9525">
             <a:solidFill>
-              <a:srgbClr val="D0F1DE"/>
+              <a:srgbClr val="D1FAF7"/>
             </a:solidFill>
           </a:ln>
         </p:spPr>
@@ -5953,7 +5953,7 @@
             <a:r>
               <a:rPr sz="3000" b="1" i="0">
                 <a:solidFill>
-                  <a:srgbClr val="153C26"/>
+                  <a:srgbClr val="115F59"/>
                 </a:solidFill>
               </a:rPr>
               <a:t>보장 항목 체크</a:t>
@@ -6005,30 +6005,30 @@
                   <a:tcPr anchor="ctr" marL="73152" marR="73152">
                     <a:lnL w="9525" cap="flat" cmpd="sng" algn="ctr">
                       <a:solidFill>
-                        <a:srgbClr val="308854"/>
+                        <a:srgbClr val="26C5B8"/>
                       </a:solidFill>
                       <a:prstDash val="solid"/>
                     </a:lnL>
                     <a:lnR w="9525" cap="flat" cmpd="sng" algn="ctr">
                       <a:solidFill>
-                        <a:srgbClr val="308854"/>
+                        <a:srgbClr val="26C5B8"/>
                       </a:solidFill>
                       <a:prstDash val="solid"/>
                     </a:lnR>
                     <a:lnT w="9525" cap="flat" cmpd="sng" algn="ctr">
                       <a:solidFill>
-                        <a:srgbClr val="308854"/>
+                        <a:srgbClr val="26C5B8"/>
                       </a:solidFill>
                       <a:prstDash val="solid"/>
                     </a:lnT>
                     <a:lnB w="9525" cap="flat" cmpd="sng" algn="ctr">
                       <a:solidFill>
-                        <a:srgbClr val="308854"/>
+                        <a:srgbClr val="26C5B8"/>
                       </a:solidFill>
                       <a:prstDash val="solid"/>
                     </a:lnB>
                     <a:solidFill>
-                      <a:srgbClr val="308854"/>
+                      <a:srgbClr val="26C5B8"/>
                     </a:solidFill>
                   </a:tcPr>
                 </a:tc>
@@ -6051,30 +6051,30 @@
                   <a:tcPr anchor="ctr" marL="73152" marR="73152">
                     <a:lnL w="9525" cap="flat" cmpd="sng" algn="ctr">
                       <a:solidFill>
-                        <a:srgbClr val="308854"/>
+                        <a:srgbClr val="26C5B8"/>
                       </a:solidFill>
                       <a:prstDash val="solid"/>
                     </a:lnL>
                     <a:lnR w="9525" cap="flat" cmpd="sng" algn="ctr">
                       <a:solidFill>
-                        <a:srgbClr val="308854"/>
+                        <a:srgbClr val="26C5B8"/>
                       </a:solidFill>
                       <a:prstDash val="solid"/>
                     </a:lnR>
                     <a:lnT w="9525" cap="flat" cmpd="sng" algn="ctr">
                       <a:solidFill>
-                        <a:srgbClr val="308854"/>
+                        <a:srgbClr val="26C5B8"/>
                       </a:solidFill>
                       <a:prstDash val="solid"/>
                     </a:lnT>
                     <a:lnB w="9525" cap="flat" cmpd="sng" algn="ctr">
                       <a:solidFill>
-                        <a:srgbClr val="308854"/>
+                        <a:srgbClr val="26C5B8"/>
                       </a:solidFill>
                       <a:prstDash val="solid"/>
                     </a:lnB>
                     <a:solidFill>
-                      <a:srgbClr val="308854"/>
+                      <a:srgbClr val="26C5B8"/>
                     </a:solidFill>
                   </a:tcPr>
                 </a:tc>
@@ -6097,30 +6097,30 @@
                   <a:tcPr anchor="ctr" marL="73152" marR="73152">
                     <a:lnL w="9525" cap="flat" cmpd="sng" algn="ctr">
                       <a:solidFill>
-                        <a:srgbClr val="308854"/>
+                        <a:srgbClr val="26C5B8"/>
                       </a:solidFill>
                       <a:prstDash val="solid"/>
                     </a:lnL>
                     <a:lnR w="9525" cap="flat" cmpd="sng" algn="ctr">
                       <a:solidFill>
-                        <a:srgbClr val="308854"/>
+                        <a:srgbClr val="26C5B8"/>
                       </a:solidFill>
                       <a:prstDash val="solid"/>
                     </a:lnR>
                     <a:lnT w="9525" cap="flat" cmpd="sng" algn="ctr">
                       <a:solidFill>
-                        <a:srgbClr val="308854"/>
+                        <a:srgbClr val="26C5B8"/>
                       </a:solidFill>
                       <a:prstDash val="solid"/>
                     </a:lnT>
                     <a:lnB w="9525" cap="flat" cmpd="sng" algn="ctr">
                       <a:solidFill>
-                        <a:srgbClr val="308854"/>
+                        <a:srgbClr val="26C5B8"/>
                       </a:solidFill>
                       <a:prstDash val="solid"/>
                     </a:lnB>
                     <a:solidFill>
-                      <a:srgbClr val="308854"/>
+                      <a:srgbClr val="26C5B8"/>
                     </a:solidFill>
                   </a:tcPr>
                 </a:tc>
@@ -6143,30 +6143,30 @@
                   <a:tcPr anchor="ctr" marL="73152" marR="73152">
                     <a:lnL w="9525" cap="flat" cmpd="sng" algn="ctr">
                       <a:solidFill>
-                        <a:srgbClr val="308854"/>
+                        <a:srgbClr val="26C5B8"/>
                       </a:solidFill>
                       <a:prstDash val="solid"/>
                     </a:lnL>
                     <a:lnR w="9525" cap="flat" cmpd="sng" algn="ctr">
                       <a:solidFill>
-                        <a:srgbClr val="308854"/>
+                        <a:srgbClr val="26C5B8"/>
                       </a:solidFill>
                       <a:prstDash val="solid"/>
                     </a:lnR>
                     <a:lnT w="9525" cap="flat" cmpd="sng" algn="ctr">
                       <a:solidFill>
-                        <a:srgbClr val="308854"/>
+                        <a:srgbClr val="26C5B8"/>
                       </a:solidFill>
                       <a:prstDash val="solid"/>
                     </a:lnT>
                     <a:lnB w="9525" cap="flat" cmpd="sng" algn="ctr">
                       <a:solidFill>
-                        <a:srgbClr val="308854"/>
+                        <a:srgbClr val="26C5B8"/>
                       </a:solidFill>
                       <a:prstDash val="solid"/>
                     </a:lnB>
                     <a:solidFill>
-                      <a:srgbClr val="308854"/>
+                      <a:srgbClr val="26C5B8"/>
                     </a:solidFill>
                   </a:tcPr>
                 </a:tc>
@@ -6181,7 +6181,7 @@
                       <a:r>
                         <a:rPr sz="1400" b="1">
                           <a:solidFill>
-                            <a:srgbClr val="153C26"/>
+                            <a:srgbClr val="115F59"/>
                           </a:solidFill>
                         </a:rPr>
                         <a:t>사망·재해</a:t>
@@ -6191,30 +6191,30 @@
                   <a:tcPr anchor="ctr" marL="73152" marR="73152">
                     <a:lnL w="9525" cap="flat" cmpd="sng" algn="ctr">
                       <a:solidFill>
-                        <a:srgbClr val="D0F1DE"/>
+                        <a:srgbClr val="D1FAF7"/>
                       </a:solidFill>
                       <a:prstDash val="solid"/>
                     </a:lnL>
                     <a:lnR w="9525" cap="flat" cmpd="sng" algn="ctr">
                       <a:solidFill>
-                        <a:srgbClr val="D0F1DE"/>
+                        <a:srgbClr val="D1FAF7"/>
                       </a:solidFill>
                       <a:prstDash val="solid"/>
                     </a:lnR>
                     <a:lnT w="9525" cap="flat" cmpd="sng" algn="ctr">
                       <a:solidFill>
-                        <a:srgbClr val="D0F1DE"/>
+                        <a:srgbClr val="D1FAF7"/>
                       </a:solidFill>
                       <a:prstDash val="solid"/>
                     </a:lnT>
                     <a:lnB w="9525" cap="flat" cmpd="sng" algn="ctr">
                       <a:solidFill>
-                        <a:srgbClr val="D0F1DE"/>
+                        <a:srgbClr val="D1FAF7"/>
                       </a:solidFill>
                       <a:prstDash val="solid"/>
                     </a:lnB>
                     <a:solidFill>
-                      <a:srgbClr val="D0F1DE"/>
+                      <a:srgbClr val="D1FAF7"/>
                     </a:solidFill>
                   </a:tcPr>
                 </a:tc>
@@ -6237,25 +6237,25 @@
                   <a:tcPr anchor="ctr" marL="73152" marR="73152">
                     <a:lnL w="9525" cap="flat" cmpd="sng" algn="ctr">
                       <a:solidFill>
-                        <a:srgbClr val="D0F1DE"/>
+                        <a:srgbClr val="D1FAF7"/>
                       </a:solidFill>
                       <a:prstDash val="solid"/>
                     </a:lnL>
                     <a:lnR w="9525" cap="flat" cmpd="sng" algn="ctr">
                       <a:solidFill>
-                        <a:srgbClr val="D0F1DE"/>
+                        <a:srgbClr val="D1FAF7"/>
                       </a:solidFill>
                       <a:prstDash val="solid"/>
                     </a:lnR>
                     <a:lnT w="9525" cap="flat" cmpd="sng" algn="ctr">
                       <a:solidFill>
-                        <a:srgbClr val="D0F1DE"/>
+                        <a:srgbClr val="D1FAF7"/>
                       </a:solidFill>
                       <a:prstDash val="solid"/>
                     </a:lnT>
                     <a:lnB w="9525" cap="flat" cmpd="sng" algn="ctr">
                       <a:solidFill>
-                        <a:srgbClr val="D0F1DE"/>
+                        <a:srgbClr val="D1FAF7"/>
                       </a:solidFill>
                       <a:prstDash val="solid"/>
                     </a:lnB>
@@ -6283,25 +6283,25 @@
                   <a:tcPr anchor="ctr" marL="73152" marR="73152">
                     <a:lnL w="9525" cap="flat" cmpd="sng" algn="ctr">
                       <a:solidFill>
-                        <a:srgbClr val="D0F1DE"/>
+                        <a:srgbClr val="D1FAF7"/>
                       </a:solidFill>
                       <a:prstDash val="solid"/>
                     </a:lnL>
                     <a:lnR w="9525" cap="flat" cmpd="sng" algn="ctr">
                       <a:solidFill>
-                        <a:srgbClr val="D0F1DE"/>
+                        <a:srgbClr val="D1FAF7"/>
                       </a:solidFill>
                       <a:prstDash val="solid"/>
                     </a:lnR>
                     <a:lnT w="9525" cap="flat" cmpd="sng" algn="ctr">
                       <a:solidFill>
-                        <a:srgbClr val="D0F1DE"/>
+                        <a:srgbClr val="D1FAF7"/>
                       </a:solidFill>
                       <a:prstDash val="solid"/>
                     </a:lnT>
                     <a:lnB w="9525" cap="flat" cmpd="sng" algn="ctr">
                       <a:solidFill>
-                        <a:srgbClr val="D0F1DE"/>
+                        <a:srgbClr val="D1FAF7"/>
                       </a:solidFill>
                       <a:prstDash val="solid"/>
                     </a:lnB>
@@ -6329,25 +6329,25 @@
                   <a:tcPr anchor="ctr" marL="73152" marR="73152">
                     <a:lnL w="9525" cap="flat" cmpd="sng" algn="ctr">
                       <a:solidFill>
-                        <a:srgbClr val="D0F1DE"/>
+                        <a:srgbClr val="D1FAF7"/>
                       </a:solidFill>
                       <a:prstDash val="solid"/>
                     </a:lnL>
                     <a:lnR w="9525" cap="flat" cmpd="sng" algn="ctr">
                       <a:solidFill>
-                        <a:srgbClr val="D0F1DE"/>
+                        <a:srgbClr val="D1FAF7"/>
                       </a:solidFill>
                       <a:prstDash val="solid"/>
                     </a:lnR>
                     <a:lnT w="9525" cap="flat" cmpd="sng" algn="ctr">
                       <a:solidFill>
-                        <a:srgbClr val="D0F1DE"/>
+                        <a:srgbClr val="D1FAF7"/>
                       </a:solidFill>
                       <a:prstDash val="solid"/>
                     </a:lnT>
                     <a:lnB w="9525" cap="flat" cmpd="sng" algn="ctr">
                       <a:solidFill>
-                        <a:srgbClr val="D0F1DE"/>
+                        <a:srgbClr val="D1FAF7"/>
                       </a:solidFill>
                       <a:prstDash val="solid"/>
                     </a:lnB>
@@ -6367,7 +6367,7 @@
                       <a:r>
                         <a:rPr sz="1400" b="1">
                           <a:solidFill>
-                            <a:srgbClr val="153C26"/>
+                            <a:srgbClr val="115F59"/>
                           </a:solidFill>
                         </a:rPr>
                         <a:t>질병 진단</a:t>
@@ -6377,30 +6377,30 @@
                   <a:tcPr anchor="ctr" marL="73152" marR="73152">
                     <a:lnL w="9525" cap="flat" cmpd="sng" algn="ctr">
                       <a:solidFill>
-                        <a:srgbClr val="D0F1DE"/>
+                        <a:srgbClr val="D1FAF7"/>
                       </a:solidFill>
                       <a:prstDash val="solid"/>
                     </a:lnL>
                     <a:lnR w="9525" cap="flat" cmpd="sng" algn="ctr">
                       <a:solidFill>
-                        <a:srgbClr val="D0F1DE"/>
+                        <a:srgbClr val="D1FAF7"/>
                       </a:solidFill>
                       <a:prstDash val="solid"/>
                     </a:lnR>
                     <a:lnT w="9525" cap="flat" cmpd="sng" algn="ctr">
                       <a:solidFill>
-                        <a:srgbClr val="D0F1DE"/>
+                        <a:srgbClr val="D1FAF7"/>
                       </a:solidFill>
                       <a:prstDash val="solid"/>
                     </a:lnT>
                     <a:lnB w="9525" cap="flat" cmpd="sng" algn="ctr">
                       <a:solidFill>
-                        <a:srgbClr val="D0F1DE"/>
+                        <a:srgbClr val="D1FAF7"/>
                       </a:solidFill>
                       <a:prstDash val="solid"/>
                     </a:lnB>
                     <a:solidFill>
-                      <a:srgbClr val="D0F1DE"/>
+                      <a:srgbClr val="D1FAF7"/>
                     </a:solidFill>
                   </a:tcPr>
                 </a:tc>
@@ -6423,30 +6423,30 @@
                   <a:tcPr anchor="ctr" marL="73152" marR="73152">
                     <a:lnL w="9525" cap="flat" cmpd="sng" algn="ctr">
                       <a:solidFill>
-                        <a:srgbClr val="D0F1DE"/>
+                        <a:srgbClr val="D1FAF7"/>
                       </a:solidFill>
                       <a:prstDash val="solid"/>
                     </a:lnL>
                     <a:lnR w="9525" cap="flat" cmpd="sng" algn="ctr">
                       <a:solidFill>
-                        <a:srgbClr val="D0F1DE"/>
+                        <a:srgbClr val="D1FAF7"/>
                       </a:solidFill>
                       <a:prstDash val="solid"/>
                     </a:lnR>
                     <a:lnT w="9525" cap="flat" cmpd="sng" algn="ctr">
                       <a:solidFill>
-                        <a:srgbClr val="D0F1DE"/>
+                        <a:srgbClr val="D1FAF7"/>
                       </a:solidFill>
                       <a:prstDash val="solid"/>
                     </a:lnT>
                     <a:lnB w="9525" cap="flat" cmpd="sng" algn="ctr">
                       <a:solidFill>
-                        <a:srgbClr val="D0F1DE"/>
+                        <a:srgbClr val="D1FAF7"/>
                       </a:solidFill>
                       <a:prstDash val="solid"/>
                     </a:lnB>
                     <a:solidFill>
-                      <a:srgbClr val="F0FAF4"/>
+                      <a:srgbClr val="EEFCFB"/>
                     </a:solidFill>
                   </a:tcPr>
                 </a:tc>
@@ -6469,30 +6469,30 @@
                   <a:tcPr anchor="ctr" marL="73152" marR="73152">
                     <a:lnL w="9525" cap="flat" cmpd="sng" algn="ctr">
                       <a:solidFill>
-                        <a:srgbClr val="D0F1DE"/>
+                        <a:srgbClr val="D1FAF7"/>
                       </a:solidFill>
                       <a:prstDash val="solid"/>
                     </a:lnL>
                     <a:lnR w="9525" cap="flat" cmpd="sng" algn="ctr">
                       <a:solidFill>
-                        <a:srgbClr val="D0F1DE"/>
+                        <a:srgbClr val="D1FAF7"/>
                       </a:solidFill>
                       <a:prstDash val="solid"/>
                     </a:lnR>
                     <a:lnT w="9525" cap="flat" cmpd="sng" algn="ctr">
                       <a:solidFill>
-                        <a:srgbClr val="D0F1DE"/>
+                        <a:srgbClr val="D1FAF7"/>
                       </a:solidFill>
                       <a:prstDash val="solid"/>
                     </a:lnT>
                     <a:lnB w="9525" cap="flat" cmpd="sng" algn="ctr">
                       <a:solidFill>
-                        <a:srgbClr val="D0F1DE"/>
+                        <a:srgbClr val="D1FAF7"/>
                       </a:solidFill>
                       <a:prstDash val="solid"/>
                     </a:lnB>
                     <a:solidFill>
-                      <a:srgbClr val="F0FAF4"/>
+                      <a:srgbClr val="EEFCFB"/>
                     </a:solidFill>
                   </a:tcPr>
                 </a:tc>
@@ -6515,30 +6515,30 @@
                   <a:tcPr anchor="ctr" marL="73152" marR="73152">
                     <a:lnL w="9525" cap="flat" cmpd="sng" algn="ctr">
                       <a:solidFill>
-                        <a:srgbClr val="D0F1DE"/>
+                        <a:srgbClr val="D1FAF7"/>
                       </a:solidFill>
                       <a:prstDash val="solid"/>
                     </a:lnL>
                     <a:lnR w="9525" cap="flat" cmpd="sng" algn="ctr">
                       <a:solidFill>
-                        <a:srgbClr val="D0F1DE"/>
+                        <a:srgbClr val="D1FAF7"/>
                       </a:solidFill>
                       <a:prstDash val="solid"/>
                     </a:lnR>
                     <a:lnT w="9525" cap="flat" cmpd="sng" algn="ctr">
                       <a:solidFill>
-                        <a:srgbClr val="D0F1DE"/>
+                        <a:srgbClr val="D1FAF7"/>
                       </a:solidFill>
                       <a:prstDash val="solid"/>
                     </a:lnT>
                     <a:lnB w="9525" cap="flat" cmpd="sng" algn="ctr">
                       <a:solidFill>
-                        <a:srgbClr val="D0F1DE"/>
+                        <a:srgbClr val="D1FAF7"/>
                       </a:solidFill>
                       <a:prstDash val="solid"/>
                     </a:lnB>
                     <a:solidFill>
-                      <a:srgbClr val="F0FAF4"/>
+                      <a:srgbClr val="EEFCFB"/>
                     </a:solidFill>
                   </a:tcPr>
                 </a:tc>
@@ -6553,7 +6553,7 @@
                       <a:r>
                         <a:rPr sz="1400" b="1">
                           <a:solidFill>
-                            <a:srgbClr val="153C26"/>
+                            <a:srgbClr val="115F59"/>
                           </a:solidFill>
                         </a:rPr>
                         <a:t>암</a:t>
@@ -6563,30 +6563,30 @@
                   <a:tcPr anchor="ctr" marL="73152" marR="73152">
                     <a:lnL w="9525" cap="flat" cmpd="sng" algn="ctr">
                       <a:solidFill>
-                        <a:srgbClr val="D0F1DE"/>
+                        <a:srgbClr val="D1FAF7"/>
                       </a:solidFill>
                       <a:prstDash val="solid"/>
                     </a:lnL>
                     <a:lnR w="9525" cap="flat" cmpd="sng" algn="ctr">
                       <a:solidFill>
-                        <a:srgbClr val="D0F1DE"/>
+                        <a:srgbClr val="D1FAF7"/>
                       </a:solidFill>
                       <a:prstDash val="solid"/>
                     </a:lnR>
                     <a:lnT w="9525" cap="flat" cmpd="sng" algn="ctr">
                       <a:solidFill>
-                        <a:srgbClr val="D0F1DE"/>
+                        <a:srgbClr val="D1FAF7"/>
                       </a:solidFill>
                       <a:prstDash val="solid"/>
                     </a:lnT>
                     <a:lnB w="9525" cap="flat" cmpd="sng" algn="ctr">
                       <a:solidFill>
-                        <a:srgbClr val="D0F1DE"/>
+                        <a:srgbClr val="D1FAF7"/>
                       </a:solidFill>
                       <a:prstDash val="solid"/>
                     </a:lnB>
                     <a:solidFill>
-                      <a:srgbClr val="D0F1DE"/>
+                      <a:srgbClr val="D1FAF7"/>
                     </a:solidFill>
                   </a:tcPr>
                 </a:tc>
@@ -6609,25 +6609,25 @@
                   <a:tcPr anchor="ctr" marL="73152" marR="73152">
                     <a:lnL w="9525" cap="flat" cmpd="sng" algn="ctr">
                       <a:solidFill>
-                        <a:srgbClr val="D0F1DE"/>
+                        <a:srgbClr val="D1FAF7"/>
                       </a:solidFill>
                       <a:prstDash val="solid"/>
                     </a:lnL>
                     <a:lnR w="9525" cap="flat" cmpd="sng" algn="ctr">
                       <a:solidFill>
-                        <a:srgbClr val="D0F1DE"/>
+                        <a:srgbClr val="D1FAF7"/>
                       </a:solidFill>
                       <a:prstDash val="solid"/>
                     </a:lnR>
                     <a:lnT w="9525" cap="flat" cmpd="sng" algn="ctr">
                       <a:solidFill>
-                        <a:srgbClr val="D0F1DE"/>
+                        <a:srgbClr val="D1FAF7"/>
                       </a:solidFill>
                       <a:prstDash val="solid"/>
                     </a:lnT>
                     <a:lnB w="9525" cap="flat" cmpd="sng" algn="ctr">
                       <a:solidFill>
-                        <a:srgbClr val="D0F1DE"/>
+                        <a:srgbClr val="D1FAF7"/>
                       </a:solidFill>
                       <a:prstDash val="solid"/>
                     </a:lnB>
@@ -6655,25 +6655,25 @@
                   <a:tcPr anchor="ctr" marL="73152" marR="73152">
                     <a:lnL w="9525" cap="flat" cmpd="sng" algn="ctr">
                       <a:solidFill>
-                        <a:srgbClr val="D0F1DE"/>
+                        <a:srgbClr val="D1FAF7"/>
                       </a:solidFill>
                       <a:prstDash val="solid"/>
                     </a:lnL>
                     <a:lnR w="9525" cap="flat" cmpd="sng" algn="ctr">
                       <a:solidFill>
-                        <a:srgbClr val="D0F1DE"/>
+                        <a:srgbClr val="D1FAF7"/>
                       </a:solidFill>
                       <a:prstDash val="solid"/>
                     </a:lnR>
                     <a:lnT w="9525" cap="flat" cmpd="sng" algn="ctr">
                       <a:solidFill>
-                        <a:srgbClr val="D0F1DE"/>
+                        <a:srgbClr val="D1FAF7"/>
                       </a:solidFill>
                       <a:prstDash val="solid"/>
                     </a:lnT>
                     <a:lnB w="9525" cap="flat" cmpd="sng" algn="ctr">
                       <a:solidFill>
-                        <a:srgbClr val="D0F1DE"/>
+                        <a:srgbClr val="D1FAF7"/>
                       </a:solidFill>
                       <a:prstDash val="solid"/>
                     </a:lnB>
@@ -6701,25 +6701,25 @@
                   <a:tcPr anchor="ctr" marL="73152" marR="73152">
                     <a:lnL w="9525" cap="flat" cmpd="sng" algn="ctr">
                       <a:solidFill>
-                        <a:srgbClr val="D0F1DE"/>
+                        <a:srgbClr val="D1FAF7"/>
                       </a:solidFill>
                       <a:prstDash val="solid"/>
                     </a:lnL>
                     <a:lnR w="9525" cap="flat" cmpd="sng" algn="ctr">
                       <a:solidFill>
-                        <a:srgbClr val="D0F1DE"/>
+                        <a:srgbClr val="D1FAF7"/>
                       </a:solidFill>
                       <a:prstDash val="solid"/>
                     </a:lnR>
                     <a:lnT w="9525" cap="flat" cmpd="sng" algn="ctr">
                       <a:solidFill>
-                        <a:srgbClr val="D0F1DE"/>
+                        <a:srgbClr val="D1FAF7"/>
                       </a:solidFill>
                       <a:prstDash val="solid"/>
                     </a:lnT>
                     <a:lnB w="9525" cap="flat" cmpd="sng" algn="ctr">
                       <a:solidFill>
-                        <a:srgbClr val="D0F1DE"/>
+                        <a:srgbClr val="D1FAF7"/>
                       </a:solidFill>
                       <a:prstDash val="solid"/>
                     </a:lnB>
@@ -6739,7 +6739,7 @@
                       <a:r>
                         <a:rPr sz="1400" b="1">
                           <a:solidFill>
-                            <a:srgbClr val="153C26"/>
+                            <a:srgbClr val="115F59"/>
                           </a:solidFill>
                         </a:rPr>
                         <a:t>뇌·심장</a:t>
@@ -6749,30 +6749,30 @@
                   <a:tcPr anchor="ctr" marL="73152" marR="73152">
                     <a:lnL w="9525" cap="flat" cmpd="sng" algn="ctr">
                       <a:solidFill>
-                        <a:srgbClr val="D0F1DE"/>
+                        <a:srgbClr val="D1FAF7"/>
                       </a:solidFill>
                       <a:prstDash val="solid"/>
                     </a:lnL>
                     <a:lnR w="9525" cap="flat" cmpd="sng" algn="ctr">
                       <a:solidFill>
-                        <a:srgbClr val="D0F1DE"/>
+                        <a:srgbClr val="D1FAF7"/>
                       </a:solidFill>
                       <a:prstDash val="solid"/>
                     </a:lnR>
                     <a:lnT w="9525" cap="flat" cmpd="sng" algn="ctr">
                       <a:solidFill>
-                        <a:srgbClr val="D0F1DE"/>
+                        <a:srgbClr val="D1FAF7"/>
                       </a:solidFill>
                       <a:prstDash val="solid"/>
                     </a:lnT>
                     <a:lnB w="9525" cap="flat" cmpd="sng" algn="ctr">
                       <a:solidFill>
-                        <a:srgbClr val="D0F1DE"/>
+                        <a:srgbClr val="D1FAF7"/>
                       </a:solidFill>
                       <a:prstDash val="solid"/>
                     </a:lnB>
                     <a:solidFill>
-                      <a:srgbClr val="D0F1DE"/>
+                      <a:srgbClr val="D1FAF7"/>
                     </a:solidFill>
                   </a:tcPr>
                 </a:tc>
@@ -6795,30 +6795,30 @@
                   <a:tcPr anchor="ctr" marL="73152" marR="73152">
                     <a:lnL w="9525" cap="flat" cmpd="sng" algn="ctr">
                       <a:solidFill>
-                        <a:srgbClr val="D0F1DE"/>
+                        <a:srgbClr val="D1FAF7"/>
                       </a:solidFill>
                       <a:prstDash val="solid"/>
                     </a:lnL>
                     <a:lnR w="9525" cap="flat" cmpd="sng" algn="ctr">
                       <a:solidFill>
-                        <a:srgbClr val="D0F1DE"/>
+                        <a:srgbClr val="D1FAF7"/>
                       </a:solidFill>
                       <a:prstDash val="solid"/>
                     </a:lnR>
                     <a:lnT w="9525" cap="flat" cmpd="sng" algn="ctr">
                       <a:solidFill>
-                        <a:srgbClr val="D0F1DE"/>
+                        <a:srgbClr val="D1FAF7"/>
                       </a:solidFill>
                       <a:prstDash val="solid"/>
                     </a:lnT>
                     <a:lnB w="9525" cap="flat" cmpd="sng" algn="ctr">
                       <a:solidFill>
-                        <a:srgbClr val="D0F1DE"/>
+                        <a:srgbClr val="D1FAF7"/>
                       </a:solidFill>
                       <a:prstDash val="solid"/>
                     </a:lnB>
                     <a:solidFill>
-                      <a:srgbClr val="F0FAF4"/>
+                      <a:srgbClr val="EEFCFB"/>
                     </a:solidFill>
                   </a:tcPr>
                 </a:tc>
@@ -6841,30 +6841,30 @@
                   <a:tcPr anchor="ctr" marL="73152" marR="73152">
                     <a:lnL w="9525" cap="flat" cmpd="sng" algn="ctr">
                       <a:solidFill>
-                        <a:srgbClr val="D0F1DE"/>
+                        <a:srgbClr val="D1FAF7"/>
                       </a:solidFill>
                       <a:prstDash val="solid"/>
                     </a:lnL>
                     <a:lnR w="9525" cap="flat" cmpd="sng" algn="ctr">
                       <a:solidFill>
-                        <a:srgbClr val="D0F1DE"/>
+                        <a:srgbClr val="D1FAF7"/>
                       </a:solidFill>
                       <a:prstDash val="solid"/>
                     </a:lnR>
                     <a:lnT w="9525" cap="flat" cmpd="sng" algn="ctr">
                       <a:solidFill>
-                        <a:srgbClr val="D0F1DE"/>
+                        <a:srgbClr val="D1FAF7"/>
                       </a:solidFill>
                       <a:prstDash val="solid"/>
                     </a:lnT>
                     <a:lnB w="9525" cap="flat" cmpd="sng" algn="ctr">
                       <a:solidFill>
-                        <a:srgbClr val="D0F1DE"/>
+                        <a:srgbClr val="D1FAF7"/>
                       </a:solidFill>
                       <a:prstDash val="solid"/>
                     </a:lnB>
                     <a:solidFill>
-                      <a:srgbClr val="F0FAF4"/>
+                      <a:srgbClr val="EEFCFB"/>
                     </a:solidFill>
                   </a:tcPr>
                 </a:tc>
@@ -6887,30 +6887,30 @@
                   <a:tcPr anchor="ctr" marL="73152" marR="73152">
                     <a:lnL w="9525" cap="flat" cmpd="sng" algn="ctr">
                       <a:solidFill>
-                        <a:srgbClr val="D0F1DE"/>
+                        <a:srgbClr val="D1FAF7"/>
                       </a:solidFill>
                       <a:prstDash val="solid"/>
                     </a:lnL>
                     <a:lnR w="9525" cap="flat" cmpd="sng" algn="ctr">
                       <a:solidFill>
-                        <a:srgbClr val="D0F1DE"/>
+                        <a:srgbClr val="D1FAF7"/>
                       </a:solidFill>
                       <a:prstDash val="solid"/>
                     </a:lnR>
                     <a:lnT w="9525" cap="flat" cmpd="sng" algn="ctr">
                       <a:solidFill>
-                        <a:srgbClr val="D0F1DE"/>
+                        <a:srgbClr val="D1FAF7"/>
                       </a:solidFill>
                       <a:prstDash val="solid"/>
                     </a:lnT>
                     <a:lnB w="9525" cap="flat" cmpd="sng" algn="ctr">
                       <a:solidFill>
-                        <a:srgbClr val="D0F1DE"/>
+                        <a:srgbClr val="D1FAF7"/>
                       </a:solidFill>
                       <a:prstDash val="solid"/>
                     </a:lnB>
                     <a:solidFill>
-                      <a:srgbClr val="F0FAF4"/>
+                      <a:srgbClr val="EEFCFB"/>
                     </a:solidFill>
                   </a:tcPr>
                 </a:tc>
@@ -6925,7 +6925,7 @@
                       <a:r>
                         <a:rPr sz="1400" b="1">
                           <a:solidFill>
-                            <a:srgbClr val="153C26"/>
+                            <a:srgbClr val="115F59"/>
                           </a:solidFill>
                         </a:rPr>
                         <a:t>입원·수술</a:t>
@@ -6935,30 +6935,30 @@
                   <a:tcPr anchor="ctr" marL="73152" marR="73152">
                     <a:lnL w="9525" cap="flat" cmpd="sng" algn="ctr">
                       <a:solidFill>
-                        <a:srgbClr val="D0F1DE"/>
+                        <a:srgbClr val="D1FAF7"/>
                       </a:solidFill>
                       <a:prstDash val="solid"/>
                     </a:lnL>
                     <a:lnR w="9525" cap="flat" cmpd="sng" algn="ctr">
                       <a:solidFill>
-                        <a:srgbClr val="D0F1DE"/>
+                        <a:srgbClr val="D1FAF7"/>
                       </a:solidFill>
                       <a:prstDash val="solid"/>
                     </a:lnR>
                     <a:lnT w="9525" cap="flat" cmpd="sng" algn="ctr">
                       <a:solidFill>
-                        <a:srgbClr val="D0F1DE"/>
+                        <a:srgbClr val="D1FAF7"/>
                       </a:solidFill>
                       <a:prstDash val="solid"/>
                     </a:lnT>
                     <a:lnB w="9525" cap="flat" cmpd="sng" algn="ctr">
                       <a:solidFill>
-                        <a:srgbClr val="D0F1DE"/>
+                        <a:srgbClr val="D1FAF7"/>
                       </a:solidFill>
                       <a:prstDash val="solid"/>
                     </a:lnB>
                     <a:solidFill>
-                      <a:srgbClr val="D0F1DE"/>
+                      <a:srgbClr val="D1FAF7"/>
                     </a:solidFill>
                   </a:tcPr>
                 </a:tc>
@@ -6981,25 +6981,25 @@
                   <a:tcPr anchor="ctr" marL="73152" marR="73152">
                     <a:lnL w="9525" cap="flat" cmpd="sng" algn="ctr">
                       <a:solidFill>
-                        <a:srgbClr val="D0F1DE"/>
+                        <a:srgbClr val="D1FAF7"/>
                       </a:solidFill>
                       <a:prstDash val="solid"/>
                     </a:lnL>
                     <a:lnR w="9525" cap="flat" cmpd="sng" algn="ctr">
                       <a:solidFill>
-                        <a:srgbClr val="D0F1DE"/>
+                        <a:srgbClr val="D1FAF7"/>
                       </a:solidFill>
                       <a:prstDash val="solid"/>
                     </a:lnR>
                     <a:lnT w="9525" cap="flat" cmpd="sng" algn="ctr">
                       <a:solidFill>
-                        <a:srgbClr val="D0F1DE"/>
+                        <a:srgbClr val="D1FAF7"/>
                       </a:solidFill>
                       <a:prstDash val="solid"/>
                     </a:lnT>
                     <a:lnB w="9525" cap="flat" cmpd="sng" algn="ctr">
                       <a:solidFill>
-                        <a:srgbClr val="D0F1DE"/>
+                        <a:srgbClr val="D1FAF7"/>
                       </a:solidFill>
                       <a:prstDash val="solid"/>
                     </a:lnB>
@@ -7027,25 +7027,25 @@
                   <a:tcPr anchor="ctr" marL="73152" marR="73152">
                     <a:lnL w="9525" cap="flat" cmpd="sng" algn="ctr">
                       <a:solidFill>
-                        <a:srgbClr val="D0F1DE"/>
+                        <a:srgbClr val="D1FAF7"/>
                       </a:solidFill>
                       <a:prstDash val="solid"/>
                     </a:lnL>
                     <a:lnR w="9525" cap="flat" cmpd="sng" algn="ctr">
                       <a:solidFill>
-                        <a:srgbClr val="D0F1DE"/>
+                        <a:srgbClr val="D1FAF7"/>
                       </a:solidFill>
                       <a:prstDash val="solid"/>
                     </a:lnR>
                     <a:lnT w="9525" cap="flat" cmpd="sng" algn="ctr">
                       <a:solidFill>
-                        <a:srgbClr val="D0F1DE"/>
+                        <a:srgbClr val="D1FAF7"/>
                       </a:solidFill>
                       <a:prstDash val="solid"/>
                     </a:lnT>
                     <a:lnB w="9525" cap="flat" cmpd="sng" algn="ctr">
                       <a:solidFill>
-                        <a:srgbClr val="D0F1DE"/>
+                        <a:srgbClr val="D1FAF7"/>
                       </a:solidFill>
                       <a:prstDash val="solid"/>
                     </a:lnB>
@@ -7073,25 +7073,25 @@
                   <a:tcPr anchor="ctr" marL="73152" marR="73152">
                     <a:lnL w="9525" cap="flat" cmpd="sng" algn="ctr">
                       <a:solidFill>
-                        <a:srgbClr val="D0F1DE"/>
+                        <a:srgbClr val="D1FAF7"/>
                       </a:solidFill>
                       <a:prstDash val="solid"/>
                     </a:lnL>
                     <a:lnR w="9525" cap="flat" cmpd="sng" algn="ctr">
                       <a:solidFill>
-                        <a:srgbClr val="D0F1DE"/>
+                        <a:srgbClr val="D1FAF7"/>
                       </a:solidFill>
                       <a:prstDash val="solid"/>
                     </a:lnR>
                     <a:lnT w="9525" cap="flat" cmpd="sng" algn="ctr">
                       <a:solidFill>
-                        <a:srgbClr val="D0F1DE"/>
+                        <a:srgbClr val="D1FAF7"/>
                       </a:solidFill>
                       <a:prstDash val="solid"/>
                     </a:lnT>
                     <a:lnB w="9525" cap="flat" cmpd="sng" algn="ctr">
                       <a:solidFill>
-                        <a:srgbClr val="D0F1DE"/>
+                        <a:srgbClr val="D1FAF7"/>
                       </a:solidFill>
                       <a:prstDash val="solid"/>
                     </a:lnB>
@@ -7111,7 +7111,7 @@
                       <a:r>
                         <a:rPr sz="1400" b="1">
                           <a:solidFill>
-                            <a:srgbClr val="153C26"/>
+                            <a:srgbClr val="115F59"/>
                           </a:solidFill>
                         </a:rPr>
                         <a:t>상해</a:t>
@@ -7121,30 +7121,30 @@
                   <a:tcPr anchor="ctr" marL="73152" marR="73152">
                     <a:lnL w="9525" cap="flat" cmpd="sng" algn="ctr">
                       <a:solidFill>
-                        <a:srgbClr val="D0F1DE"/>
+                        <a:srgbClr val="D1FAF7"/>
                       </a:solidFill>
                       <a:prstDash val="solid"/>
                     </a:lnL>
                     <a:lnR w="9525" cap="flat" cmpd="sng" algn="ctr">
                       <a:solidFill>
-                        <a:srgbClr val="D0F1DE"/>
+                        <a:srgbClr val="D1FAF7"/>
                       </a:solidFill>
                       <a:prstDash val="solid"/>
                     </a:lnR>
                     <a:lnT w="9525" cap="flat" cmpd="sng" algn="ctr">
                       <a:solidFill>
-                        <a:srgbClr val="D0F1DE"/>
+                        <a:srgbClr val="D1FAF7"/>
                       </a:solidFill>
                       <a:prstDash val="solid"/>
                     </a:lnT>
                     <a:lnB w="9525" cap="flat" cmpd="sng" algn="ctr">
                       <a:solidFill>
-                        <a:srgbClr val="D0F1DE"/>
+                        <a:srgbClr val="D1FAF7"/>
                       </a:solidFill>
                       <a:prstDash val="solid"/>
                     </a:lnB>
                     <a:solidFill>
-                      <a:srgbClr val="D0F1DE"/>
+                      <a:srgbClr val="D1FAF7"/>
                     </a:solidFill>
                   </a:tcPr>
                 </a:tc>
@@ -7167,30 +7167,30 @@
                   <a:tcPr anchor="ctr" marL="73152" marR="73152">
                     <a:lnL w="9525" cap="flat" cmpd="sng" algn="ctr">
                       <a:solidFill>
-                        <a:srgbClr val="D0F1DE"/>
+                        <a:srgbClr val="D1FAF7"/>
                       </a:solidFill>
                       <a:prstDash val="solid"/>
                     </a:lnL>
                     <a:lnR w="9525" cap="flat" cmpd="sng" algn="ctr">
                       <a:solidFill>
-                        <a:srgbClr val="D0F1DE"/>
+                        <a:srgbClr val="D1FAF7"/>
                       </a:solidFill>
                       <a:prstDash val="solid"/>
                     </a:lnR>
                     <a:lnT w="9525" cap="flat" cmpd="sng" algn="ctr">
                       <a:solidFill>
-                        <a:srgbClr val="D0F1DE"/>
+                        <a:srgbClr val="D1FAF7"/>
                       </a:solidFill>
                       <a:prstDash val="solid"/>
                     </a:lnT>
                     <a:lnB w="9525" cap="flat" cmpd="sng" algn="ctr">
                       <a:solidFill>
-                        <a:srgbClr val="D0F1DE"/>
+                        <a:srgbClr val="D1FAF7"/>
                       </a:solidFill>
                       <a:prstDash val="solid"/>
                     </a:lnB>
                     <a:solidFill>
-                      <a:srgbClr val="F0FAF4"/>
+                      <a:srgbClr val="EEFCFB"/>
                     </a:solidFill>
                   </a:tcPr>
                 </a:tc>
@@ -7213,30 +7213,30 @@
                   <a:tcPr anchor="ctr" marL="73152" marR="73152">
                     <a:lnL w="9525" cap="flat" cmpd="sng" algn="ctr">
                       <a:solidFill>
-                        <a:srgbClr val="D0F1DE"/>
+                        <a:srgbClr val="D1FAF7"/>
                       </a:solidFill>
                       <a:prstDash val="solid"/>
                     </a:lnL>
                     <a:lnR w="9525" cap="flat" cmpd="sng" algn="ctr">
                       <a:solidFill>
-                        <a:srgbClr val="D0F1DE"/>
+                        <a:srgbClr val="D1FAF7"/>
                       </a:solidFill>
                       <a:prstDash val="solid"/>
                     </a:lnR>
                     <a:lnT w="9525" cap="flat" cmpd="sng" algn="ctr">
                       <a:solidFill>
-                        <a:srgbClr val="D0F1DE"/>
+                        <a:srgbClr val="D1FAF7"/>
                       </a:solidFill>
                       <a:prstDash val="solid"/>
                     </a:lnT>
                     <a:lnB w="9525" cap="flat" cmpd="sng" algn="ctr">
                       <a:solidFill>
-                        <a:srgbClr val="D0F1DE"/>
+                        <a:srgbClr val="D1FAF7"/>
                       </a:solidFill>
                       <a:prstDash val="solid"/>
                     </a:lnB>
                     <a:solidFill>
-                      <a:srgbClr val="F0FAF4"/>
+                      <a:srgbClr val="EEFCFB"/>
                     </a:solidFill>
                   </a:tcPr>
                 </a:tc>
@@ -7259,30 +7259,30 @@
                   <a:tcPr anchor="ctr" marL="73152" marR="73152">
                     <a:lnL w="9525" cap="flat" cmpd="sng" algn="ctr">
                       <a:solidFill>
-                        <a:srgbClr val="D0F1DE"/>
+                        <a:srgbClr val="D1FAF7"/>
                       </a:solidFill>
                       <a:prstDash val="solid"/>
                     </a:lnL>
                     <a:lnR w="9525" cap="flat" cmpd="sng" algn="ctr">
                       <a:solidFill>
-                        <a:srgbClr val="D0F1DE"/>
+                        <a:srgbClr val="D1FAF7"/>
                       </a:solidFill>
                       <a:prstDash val="solid"/>
                     </a:lnR>
                     <a:lnT w="9525" cap="flat" cmpd="sng" algn="ctr">
                       <a:solidFill>
-                        <a:srgbClr val="D0F1DE"/>
+                        <a:srgbClr val="D1FAF7"/>
                       </a:solidFill>
                       <a:prstDash val="solid"/>
                     </a:lnT>
                     <a:lnB w="9525" cap="flat" cmpd="sng" algn="ctr">
                       <a:solidFill>
-                        <a:srgbClr val="D0F1DE"/>
+                        <a:srgbClr val="D1FAF7"/>
                       </a:solidFill>
                       <a:prstDash val="solid"/>
                     </a:lnB>
                     <a:solidFill>
-                      <a:srgbClr val="F0FAF4"/>
+                      <a:srgbClr val="EEFCFB"/>
                     </a:solidFill>
                   </a:tcPr>
                 </a:tc>
@@ -7297,7 +7297,7 @@
                       <a:r>
                         <a:rPr sz="1400" b="1">
                           <a:solidFill>
-                            <a:srgbClr val="153C26"/>
+                            <a:srgbClr val="115F59"/>
                           </a:solidFill>
                         </a:rPr>
                         <a:t>실손의료</a:t>
@@ -7307,30 +7307,30 @@
                   <a:tcPr anchor="ctr" marL="73152" marR="73152">
                     <a:lnL w="9525" cap="flat" cmpd="sng" algn="ctr">
                       <a:solidFill>
-                        <a:srgbClr val="D0F1DE"/>
+                        <a:srgbClr val="D1FAF7"/>
                       </a:solidFill>
                       <a:prstDash val="solid"/>
                     </a:lnL>
                     <a:lnR w="9525" cap="flat" cmpd="sng" algn="ctr">
                       <a:solidFill>
-                        <a:srgbClr val="D0F1DE"/>
+                        <a:srgbClr val="D1FAF7"/>
                       </a:solidFill>
                       <a:prstDash val="solid"/>
                     </a:lnR>
                     <a:lnT w="9525" cap="flat" cmpd="sng" algn="ctr">
                       <a:solidFill>
-                        <a:srgbClr val="D0F1DE"/>
+                        <a:srgbClr val="D1FAF7"/>
                       </a:solidFill>
                       <a:prstDash val="solid"/>
                     </a:lnT>
                     <a:lnB w="9525" cap="flat" cmpd="sng" algn="ctr">
                       <a:solidFill>
-                        <a:srgbClr val="D0F1DE"/>
+                        <a:srgbClr val="D1FAF7"/>
                       </a:solidFill>
                       <a:prstDash val="solid"/>
                     </a:lnB>
                     <a:solidFill>
-                      <a:srgbClr val="D0F1DE"/>
+                      <a:srgbClr val="D1FAF7"/>
                     </a:solidFill>
                   </a:tcPr>
                 </a:tc>
@@ -7353,25 +7353,25 @@
                   <a:tcPr anchor="ctr" marL="73152" marR="73152">
                     <a:lnL w="9525" cap="flat" cmpd="sng" algn="ctr">
                       <a:solidFill>
-                        <a:srgbClr val="D0F1DE"/>
+                        <a:srgbClr val="D1FAF7"/>
                       </a:solidFill>
                       <a:prstDash val="solid"/>
                     </a:lnL>
                     <a:lnR w="9525" cap="flat" cmpd="sng" algn="ctr">
                       <a:solidFill>
-                        <a:srgbClr val="D0F1DE"/>
+                        <a:srgbClr val="D1FAF7"/>
                       </a:solidFill>
                       <a:prstDash val="solid"/>
                     </a:lnR>
                     <a:lnT w="9525" cap="flat" cmpd="sng" algn="ctr">
                       <a:solidFill>
-                        <a:srgbClr val="D0F1DE"/>
+                        <a:srgbClr val="D1FAF7"/>
                       </a:solidFill>
                       <a:prstDash val="solid"/>
                     </a:lnT>
                     <a:lnB w="9525" cap="flat" cmpd="sng" algn="ctr">
                       <a:solidFill>
-                        <a:srgbClr val="D0F1DE"/>
+                        <a:srgbClr val="D1FAF7"/>
                       </a:solidFill>
                       <a:prstDash val="solid"/>
                     </a:lnB>
@@ -7399,25 +7399,25 @@
                   <a:tcPr anchor="ctr" marL="73152" marR="73152">
                     <a:lnL w="9525" cap="flat" cmpd="sng" algn="ctr">
                       <a:solidFill>
-                        <a:srgbClr val="D0F1DE"/>
+                        <a:srgbClr val="D1FAF7"/>
                       </a:solidFill>
                       <a:prstDash val="solid"/>
                     </a:lnL>
                     <a:lnR w="9525" cap="flat" cmpd="sng" algn="ctr">
                       <a:solidFill>
-                        <a:srgbClr val="D0F1DE"/>
+                        <a:srgbClr val="D1FAF7"/>
                       </a:solidFill>
                       <a:prstDash val="solid"/>
                     </a:lnR>
                     <a:lnT w="9525" cap="flat" cmpd="sng" algn="ctr">
                       <a:solidFill>
-                        <a:srgbClr val="D0F1DE"/>
+                        <a:srgbClr val="D1FAF7"/>
                       </a:solidFill>
                       <a:prstDash val="solid"/>
                     </a:lnT>
                     <a:lnB w="9525" cap="flat" cmpd="sng" algn="ctr">
                       <a:solidFill>
-                        <a:srgbClr val="D0F1DE"/>
+                        <a:srgbClr val="D1FAF7"/>
                       </a:solidFill>
                       <a:prstDash val="solid"/>
                     </a:lnB>
@@ -7445,25 +7445,25 @@
                   <a:tcPr anchor="ctr" marL="73152" marR="73152">
                     <a:lnL w="9525" cap="flat" cmpd="sng" algn="ctr">
                       <a:solidFill>
-                        <a:srgbClr val="D0F1DE"/>
+                        <a:srgbClr val="D1FAF7"/>
                       </a:solidFill>
                       <a:prstDash val="solid"/>
                     </a:lnL>
                     <a:lnR w="9525" cap="flat" cmpd="sng" algn="ctr">
                       <a:solidFill>
-                        <a:srgbClr val="D0F1DE"/>
+                        <a:srgbClr val="D1FAF7"/>
                       </a:solidFill>
                       <a:prstDash val="solid"/>
                     </a:lnR>
                     <a:lnT w="9525" cap="flat" cmpd="sng" algn="ctr">
                       <a:solidFill>
-                        <a:srgbClr val="D0F1DE"/>
+                        <a:srgbClr val="D1FAF7"/>
                       </a:solidFill>
                       <a:prstDash val="solid"/>
                     </a:lnT>
                     <a:lnB w="9525" cap="flat" cmpd="sng" algn="ctr">
                       <a:solidFill>
-                        <a:srgbClr val="D0F1DE"/>
+                        <a:srgbClr val="D1FAF7"/>
                       </a:solidFill>
                       <a:prstDash val="solid"/>
                     </a:lnB>
@@ -7483,7 +7483,7 @@
                       <a:r>
                         <a:rPr sz="1400" b="1">
                           <a:solidFill>
-                            <a:srgbClr val="153C26"/>
+                            <a:srgbClr val="115F59"/>
                           </a:solidFill>
                         </a:rPr>
                         <a:t>연금·노후자금</a:t>
@@ -7493,30 +7493,30 @@
                   <a:tcPr anchor="ctr" marL="73152" marR="73152">
                     <a:lnL w="9525" cap="flat" cmpd="sng" algn="ctr">
                       <a:solidFill>
-                        <a:srgbClr val="D0F1DE"/>
+                        <a:srgbClr val="D1FAF7"/>
                       </a:solidFill>
                       <a:prstDash val="solid"/>
                     </a:lnL>
                     <a:lnR w="9525" cap="flat" cmpd="sng" algn="ctr">
                       <a:solidFill>
-                        <a:srgbClr val="D0F1DE"/>
+                        <a:srgbClr val="D1FAF7"/>
                       </a:solidFill>
                       <a:prstDash val="solid"/>
                     </a:lnR>
                     <a:lnT w="9525" cap="flat" cmpd="sng" algn="ctr">
                       <a:solidFill>
-                        <a:srgbClr val="D0F1DE"/>
+                        <a:srgbClr val="D1FAF7"/>
                       </a:solidFill>
                       <a:prstDash val="solid"/>
                     </a:lnT>
                     <a:lnB w="9525" cap="flat" cmpd="sng" algn="ctr">
                       <a:solidFill>
-                        <a:srgbClr val="D0F1DE"/>
+                        <a:srgbClr val="D1FAF7"/>
                       </a:solidFill>
                       <a:prstDash val="solid"/>
                     </a:lnB>
                     <a:solidFill>
-                      <a:srgbClr val="D0F1DE"/>
+                      <a:srgbClr val="D1FAF7"/>
                     </a:solidFill>
                   </a:tcPr>
                 </a:tc>
@@ -7539,30 +7539,30 @@
                   <a:tcPr anchor="ctr" marL="73152" marR="73152">
                     <a:lnL w="9525" cap="flat" cmpd="sng" algn="ctr">
                       <a:solidFill>
-                        <a:srgbClr val="D0F1DE"/>
+                        <a:srgbClr val="D1FAF7"/>
                       </a:solidFill>
                       <a:prstDash val="solid"/>
                     </a:lnL>
                     <a:lnR w="9525" cap="flat" cmpd="sng" algn="ctr">
                       <a:solidFill>
-                        <a:srgbClr val="D0F1DE"/>
+                        <a:srgbClr val="D1FAF7"/>
                       </a:solidFill>
                       <a:prstDash val="solid"/>
                     </a:lnR>
                     <a:lnT w="9525" cap="flat" cmpd="sng" algn="ctr">
                       <a:solidFill>
-                        <a:srgbClr val="D0F1DE"/>
+                        <a:srgbClr val="D1FAF7"/>
                       </a:solidFill>
                       <a:prstDash val="solid"/>
                     </a:lnT>
                     <a:lnB w="9525" cap="flat" cmpd="sng" algn="ctr">
                       <a:solidFill>
-                        <a:srgbClr val="D0F1DE"/>
+                        <a:srgbClr val="D1FAF7"/>
                       </a:solidFill>
                       <a:prstDash val="solid"/>
                     </a:lnB>
                     <a:solidFill>
-                      <a:srgbClr val="F0FAF4"/>
+                      <a:srgbClr val="EEFCFB"/>
                     </a:solidFill>
                   </a:tcPr>
                 </a:tc>
@@ -7585,30 +7585,30 @@
                   <a:tcPr anchor="ctr" marL="73152" marR="73152">
                     <a:lnL w="9525" cap="flat" cmpd="sng" algn="ctr">
                       <a:solidFill>
-                        <a:srgbClr val="D0F1DE"/>
+                        <a:srgbClr val="D1FAF7"/>
                       </a:solidFill>
                       <a:prstDash val="solid"/>
                     </a:lnL>
                     <a:lnR w="9525" cap="flat" cmpd="sng" algn="ctr">
                       <a:solidFill>
-                        <a:srgbClr val="D0F1DE"/>
+                        <a:srgbClr val="D1FAF7"/>
                       </a:solidFill>
                       <a:prstDash val="solid"/>
                     </a:lnR>
                     <a:lnT w="9525" cap="flat" cmpd="sng" algn="ctr">
                       <a:solidFill>
-                        <a:srgbClr val="D0F1DE"/>
+                        <a:srgbClr val="D1FAF7"/>
                       </a:solidFill>
                       <a:prstDash val="solid"/>
                     </a:lnT>
                     <a:lnB w="9525" cap="flat" cmpd="sng" algn="ctr">
                       <a:solidFill>
-                        <a:srgbClr val="D0F1DE"/>
+                        <a:srgbClr val="D1FAF7"/>
                       </a:solidFill>
                       <a:prstDash val="solid"/>
                     </a:lnB>
                     <a:solidFill>
-                      <a:srgbClr val="F0FAF4"/>
+                      <a:srgbClr val="EEFCFB"/>
                     </a:solidFill>
                   </a:tcPr>
                 </a:tc>
@@ -7631,30 +7631,30 @@
                   <a:tcPr anchor="ctr" marL="73152" marR="73152">
                     <a:lnL w="9525" cap="flat" cmpd="sng" algn="ctr">
                       <a:solidFill>
-                        <a:srgbClr val="D0F1DE"/>
+                        <a:srgbClr val="D1FAF7"/>
                       </a:solidFill>
                       <a:prstDash val="solid"/>
                     </a:lnL>
                     <a:lnR w="9525" cap="flat" cmpd="sng" algn="ctr">
                       <a:solidFill>
-                        <a:srgbClr val="D0F1DE"/>
+                        <a:srgbClr val="D1FAF7"/>
                       </a:solidFill>
                       <a:prstDash val="solid"/>
                     </a:lnR>
                     <a:lnT w="9525" cap="flat" cmpd="sng" algn="ctr">
                       <a:solidFill>
-                        <a:srgbClr val="D0F1DE"/>
+                        <a:srgbClr val="D1FAF7"/>
                       </a:solidFill>
                       <a:prstDash val="solid"/>
                     </a:lnT>
                     <a:lnB w="9525" cap="flat" cmpd="sng" algn="ctr">
                       <a:solidFill>
-                        <a:srgbClr val="D0F1DE"/>
+                        <a:srgbClr val="D1FAF7"/>
                       </a:solidFill>
                       <a:prstDash val="solid"/>
                     </a:lnB>
                     <a:solidFill>
-                      <a:srgbClr val="F0FAF4"/>
+                      <a:srgbClr val="EEFCFB"/>
                     </a:solidFill>
                   </a:tcPr>
                 </a:tc>
@@ -7677,7 +7677,7 @@
     <p:bg>
       <p:bgPr>
         <a:solidFill>
-          <a:srgbClr val="F0FAF4"/>
+          <a:srgbClr val="EEFCFB"/>
         </a:solidFill>
         <a:effectLst/>
       </p:bgPr>
@@ -7706,7 +7706,7 @@
           <a:noFill/>
           <a:ln w="28575">
             <a:solidFill>
-              <a:srgbClr val="308854"/>
+              <a:srgbClr val="26C5B8"/>
             </a:solidFill>
           </a:ln>
         </p:spPr>
@@ -7735,7 +7735,7 @@
           <a:noFill/>
           <a:ln w="9525">
             <a:solidFill>
-              <a:srgbClr val="D0F1DE"/>
+              <a:srgbClr val="D1FAF7"/>
             </a:solidFill>
           </a:ln>
         </p:spPr>
@@ -7777,7 +7777,7 @@
             <a:r>
               <a:rPr sz="3000" b="1" i="0">
                 <a:solidFill>
-                  <a:srgbClr val="153C26"/>
+                  <a:srgbClr val="115F59"/>
                 </a:solidFill>
               </a:rPr>
               <a:t>월 보험료 한눈에</a:t>
@@ -7802,11 +7802,11 @@
             </a:avLst>
           </a:prstGeom>
           <a:solidFill>
-            <a:srgbClr val="F0FAF4"/>
+            <a:srgbClr val="EEFCFB"/>
           </a:solidFill>
           <a:ln w="15875">
             <a:solidFill>
-              <a:srgbClr val="D0F1DE"/>
+              <a:srgbClr val="D1FAF7"/>
             </a:solidFill>
           </a:ln>
         </p:spPr>
@@ -7833,7 +7833,7 @@
             <a:avLst/>
           </a:prstGeom>
           <a:solidFill>
-            <a:srgbClr val="308854"/>
+            <a:srgbClr val="26C5B8"/>
           </a:solidFill>
           <a:ln>
             <a:noFill/>
@@ -7891,7 +7891,7 @@
             <a:r>
               <a:rPr sz="1700" b="1" i="0">
                 <a:solidFill>
-                  <a:srgbClr val="153C26"/>
+                  <a:srgbClr val="115F59"/>
                 </a:solidFill>
               </a:rPr>
               <a:t>월 보험료 합계</a:t>
@@ -7954,11 +7954,11 @@
             </a:avLst>
           </a:prstGeom>
           <a:solidFill>
-            <a:srgbClr val="F0FAF4"/>
+            <a:srgbClr val="EEFCFB"/>
           </a:solidFill>
           <a:ln w="15875">
             <a:solidFill>
-              <a:srgbClr val="D0F1DE"/>
+              <a:srgbClr val="D1FAF7"/>
             </a:solidFill>
           </a:ln>
         </p:spPr>
@@ -7985,7 +7985,7 @@
             <a:avLst/>
           </a:prstGeom>
           <a:solidFill>
-            <a:srgbClr val="308854"/>
+            <a:srgbClr val="26C5B8"/>
           </a:solidFill>
           <a:ln>
             <a:noFill/>
@@ -8043,7 +8043,7 @@
             <a:r>
               <a:rPr sz="1700" b="1" i="0">
                 <a:solidFill>
-                  <a:srgbClr val="153C26"/>
+                  <a:srgbClr val="115F59"/>
                 </a:solidFill>
               </a:rPr>
               <a:t>연 보험료 합계</a:t>
@@ -8106,11 +8106,11 @@
             </a:avLst>
           </a:prstGeom>
           <a:solidFill>
-            <a:srgbClr val="F0FAF4"/>
+            <a:srgbClr val="EEFCFB"/>
           </a:solidFill>
           <a:ln w="15875">
             <a:solidFill>
-              <a:srgbClr val="D0F1DE"/>
+              <a:srgbClr val="D1FAF7"/>
             </a:solidFill>
           </a:ln>
         </p:spPr>
@@ -8137,7 +8137,7 @@
             <a:avLst/>
           </a:prstGeom>
           <a:solidFill>
-            <a:srgbClr val="308854"/>
+            <a:srgbClr val="26C5B8"/>
           </a:solidFill>
           <a:ln>
             <a:noFill/>
@@ -8195,7 +8195,7 @@
             <a:r>
               <a:rPr sz="1700" b="1" i="0">
                 <a:solidFill>
-                  <a:srgbClr val="153C26"/>
+                  <a:srgbClr val="115F59"/>
                 </a:solidFill>
               </a:rPr>
               <a:t>월 소득 대비</a:t>
@@ -8293,7 +8293,7 @@
     <p:bg>
       <p:bgPr>
         <a:solidFill>
-          <a:srgbClr val="F0FAF4"/>
+          <a:srgbClr val="EEFCFB"/>
         </a:solidFill>
         <a:effectLst/>
       </p:bgPr>
@@ -8322,7 +8322,7 @@
           <a:noFill/>
           <a:ln w="28575">
             <a:solidFill>
-              <a:srgbClr val="308854"/>
+              <a:srgbClr val="26C5B8"/>
             </a:solidFill>
           </a:ln>
         </p:spPr>
@@ -8351,7 +8351,7 @@
           <a:noFill/>
           <a:ln w="9525">
             <a:solidFill>
-              <a:srgbClr val="D0F1DE"/>
+              <a:srgbClr val="D1FAF7"/>
             </a:solidFill>
           </a:ln>
         </p:spPr>
@@ -8393,7 +8393,7 @@
             <a:r>
               <a:rPr sz="3000" b="1" i="0">
                 <a:solidFill>
-                  <a:srgbClr val="153C26"/>
+                  <a:srgbClr val="115F59"/>
                 </a:solidFill>
               </a:rPr>
               <a:t>점검 메모와 다음 할 일</a:t>
@@ -8418,11 +8418,11 @@
             </a:avLst>
           </a:prstGeom>
           <a:solidFill>
-            <a:srgbClr val="F0FAF4"/>
+            <a:srgbClr val="EEFCFB"/>
           </a:solidFill>
           <a:ln w="15875">
             <a:solidFill>
-              <a:srgbClr val="D0F1DE"/>
+              <a:srgbClr val="D1FAF7"/>
             </a:solidFill>
           </a:ln>
         </p:spPr>
@@ -8449,7 +8449,7 @@
             <a:avLst/>
           </a:prstGeom>
           <a:solidFill>
-            <a:srgbClr val="308854"/>
+            <a:srgbClr val="26C5B8"/>
           </a:solidFill>
           <a:ln>
             <a:noFill/>
@@ -8507,7 +8507,7 @@
             <a:r>
               <a:rPr sz="1800" b="1" i="0">
                 <a:solidFill>
-                  <a:srgbClr val="153C26"/>
+                  <a:srgbClr val="115F59"/>
                 </a:solidFill>
               </a:rPr>
               <a:t>확인할 것</a:t>
@@ -8570,11 +8570,11 @@
             </a:avLst>
           </a:prstGeom>
           <a:solidFill>
-            <a:srgbClr val="F0FAF4"/>
+            <a:srgbClr val="EEFCFB"/>
           </a:solidFill>
           <a:ln w="15875">
             <a:solidFill>
-              <a:srgbClr val="D0F1DE"/>
+              <a:srgbClr val="D1FAF7"/>
             </a:solidFill>
           </a:ln>
         </p:spPr>
@@ -8601,7 +8601,7 @@
             <a:avLst/>
           </a:prstGeom>
           <a:solidFill>
-            <a:srgbClr val="308854"/>
+            <a:srgbClr val="26C5B8"/>
           </a:solidFill>
           <a:ln>
             <a:noFill/>
@@ -8659,7 +8659,7 @@
             <a:r>
               <a:rPr sz="1800" b="1" i="0">
                 <a:solidFill>
-                  <a:srgbClr val="153C26"/>
+                  <a:srgbClr val="115F59"/>
                 </a:solidFill>
               </a:rPr>
               <a:t>문의할 것</a:t>
@@ -8722,11 +8722,11 @@
             </a:avLst>
           </a:prstGeom>
           <a:solidFill>
-            <a:srgbClr val="F0FAF4"/>
+            <a:srgbClr val="EEFCFB"/>
           </a:solidFill>
           <a:ln w="15875">
             <a:solidFill>
-              <a:srgbClr val="D0F1DE"/>
+              <a:srgbClr val="D1FAF7"/>
             </a:solidFill>
           </a:ln>
         </p:spPr>
@@ -8753,7 +8753,7 @@
             <a:avLst/>
           </a:prstGeom>
           <a:solidFill>
-            <a:srgbClr val="308854"/>
+            <a:srgbClr val="26C5B8"/>
           </a:solidFill>
           <a:ln>
             <a:noFill/>
@@ -8811,7 +8811,7 @@
             <a:r>
               <a:rPr sz="1800" b="1" i="0">
                 <a:solidFill>
-                  <a:srgbClr val="153C26"/>
+                  <a:srgbClr val="115F59"/>
                 </a:solidFill>
               </a:rPr>
               <a:t>정리할 날짜</a:t>
@@ -8914,34 +8914,34 @@
         <a:sysClr val="window" lastClr="FFFFFF"/>
       </a:lt1>
       <a:dk2>
-        <a:srgbClr val="153C26"/>
+        <a:srgbClr val="115F59"/>
       </a:dk2>
       <a:lt2>
-        <a:srgbClr val="F0FAF4"/>
+        <a:srgbClr val="EEFCFB"/>
       </a:lt2>
       <a:accent1>
-        <a:srgbClr val="308854"/>
+        <a:srgbClr val="26C5B8"/>
       </a:accent1>
       <a:accent2>
-        <a:srgbClr val="8A3B91"/>
+        <a:srgbClr val="209DB6"/>
       </a:accent2>
       <a:accent3>
-        <a:srgbClr val="153C26"/>
+        <a:srgbClr val="115F59"/>
       </a:accent3>
       <a:accent4>
-        <a:srgbClr val="D0F1DE"/>
+        <a:srgbClr val="D1FAF7"/>
       </a:accent4>
       <a:accent5>
-        <a:srgbClr val="5D6272"/>
+        <a:srgbClr val="23B1B7"/>
       </a:accent5>
       <a:accent6>
-        <a:srgbClr val="738A7D"/>
+        <a:srgbClr val="709F9B"/>
       </a:accent6>
       <a:hlink>
-        <a:srgbClr val="308854"/>
+        <a:srgbClr val="26C5B8"/>
       </a:hlink>
       <a:folHlink>
-        <a:srgbClr val="153C26"/>
+        <a:srgbClr val="115F59"/>
       </a:folHlink>
     </a:clrScheme>
     <a:fontScheme name="Office">

--- a/public/fun/pack/pptx/review/보장점검양식_16_본인점검_평상수박.pptx
+++ b/public/fun/pack/pptx/review/보장점검양식_16_본인점검_평상수박.pptx
@@ -3286,6 +3286,14 @@
 <file path=ppt/slides/slide1.xml><?xml version="1.0" encoding="utf-8"?>
 <p:sld xmlns:a="http://schemas.openxmlformats.org/drawingml/2006/main" xmlns:p="http://schemas.openxmlformats.org/presentationml/2006/main" xmlns:r="http://schemas.openxmlformats.org/officeDocument/2006/relationships">
   <p:cSld>
+    <p:bg>
+      <p:bgPr>
+        <a:solidFill>
+          <a:srgbClr val="274935"/>
+        </a:solidFill>
+        <a:effectLst/>
+      </p:bgPr>
+    </p:bg>
     <p:spTree>
       <p:nvGrpSpPr>
         <p:cNvPr id="1" name=""/>
@@ -3293,30 +3301,140 @@
         <p:nvPr/>
       </p:nvGrpSpPr>
       <p:grpSpPr/>
-      <p:pic>
-        <p:nvPicPr>
-          <p:cNvPr id="3" name="표지 그림" descr="review-16.jpg"/>
-          <p:cNvPicPr>
-            <a:picLocks noChangeAspect="1"/>
-          </p:cNvPicPr>
+      <p:sp>
+        <p:nvSpPr>
+          <p:cNvPr id="3" name="장식"/>
+          <p:cNvSpPr/>
           <p:nvPr/>
-        </p:nvPicPr>
-        <p:blipFill>
-          <a:blip r:embed="rId2"/>
-          <a:stretch>
-            <a:fillRect/>
-          </a:stretch>
-        </p:blipFill>
-        <p:spPr>
-          <a:xfrm>
-            <a:off x="0" y="0"/>
-            <a:ext cx="12191695" cy="6858000"/>
+        </p:nvSpPr>
+        <p:spPr>
+          <a:xfrm>
+            <a:off x="6827349" y="2057400"/>
+            <a:ext cx="1463003" cy="4800600"/>
+          </a:xfrm>
+          <a:prstGeom prst="round2SameRect">
+            <a:avLst>
+              <a:gd name="adj1" fmla="val 50000"/>
+              <a:gd name="adj2" fmla="val 0"/>
+            </a:avLst>
+          </a:prstGeom>
+          <a:solidFill>
+            <a:srgbClr val="5EB280"/>
+          </a:solidFill>
+          <a:ln>
+            <a:noFill/>
+          </a:ln>
+        </p:spPr>
+        <p:txBody>
+          <a:bodyPr rtlCol="0" anchor="ctr"/>
+          <a:lstStyle/>
+          <a:p>
+            <a:pPr algn="ctr"/>
+          </a:p>
+        </p:txBody>
+      </p:sp>
+      <p:sp>
+        <p:nvSpPr>
+          <p:cNvPr id="4" name="장식"/>
+          <p:cNvSpPr/>
+          <p:nvPr/>
+        </p:nvSpPr>
+        <p:spPr>
+          <a:xfrm>
+            <a:off x="8412269" y="1577339"/>
+            <a:ext cx="1463003" cy="5280660"/>
+          </a:xfrm>
+          <a:prstGeom prst="round2SameRect">
+            <a:avLst>
+              <a:gd name="adj1" fmla="val 50000"/>
+              <a:gd name="adj2" fmla="val 0"/>
+            </a:avLst>
+          </a:prstGeom>
+          <a:solidFill>
+            <a:srgbClr val="7BEAA9"/>
+          </a:solidFill>
+          <a:ln>
+            <a:noFill/>
+          </a:ln>
+        </p:spPr>
+        <p:txBody>
+          <a:bodyPr rtlCol="0" anchor="ctr"/>
+          <a:lstStyle/>
+          <a:p>
+            <a:pPr algn="ctr"/>
+          </a:p>
+        </p:txBody>
+      </p:sp>
+      <p:sp>
+        <p:nvSpPr>
+          <p:cNvPr id="5" name="장식"/>
+          <p:cNvSpPr/>
+          <p:nvPr/>
+        </p:nvSpPr>
+        <p:spPr>
+          <a:xfrm>
+            <a:off x="9997190" y="1097279"/>
+            <a:ext cx="1463003" cy="5760720"/>
+          </a:xfrm>
+          <a:prstGeom prst="round2SameRect">
+            <a:avLst>
+              <a:gd name="adj1" fmla="val 50000"/>
+              <a:gd name="adj2" fmla="val 0"/>
+            </a:avLst>
+          </a:prstGeom>
+          <a:solidFill>
+            <a:srgbClr val="5EB280"/>
+          </a:solidFill>
+          <a:ln>
+            <a:noFill/>
+          </a:ln>
+        </p:spPr>
+        <p:txBody>
+          <a:bodyPr rtlCol="0" anchor="ctr"/>
+          <a:lstStyle/>
+          <a:p>
+            <a:pPr algn="ctr"/>
+          </a:p>
+        </p:txBody>
+      </p:sp>
+      <p:sp>
+        <p:nvSpPr>
+          <p:cNvPr id="6" name="라벨"/>
+          <p:cNvSpPr txBox="1"/>
+          <p:nvPr/>
+        </p:nvSpPr>
+        <p:spPr>
+          <a:xfrm>
+            <a:off x="822960" y="2148840"/>
+            <a:ext cx="5608179" cy="274320"/>
           </a:xfrm>
           <a:prstGeom prst="rect">
             <a:avLst/>
           </a:prstGeom>
-        </p:spPr>
-      </p:pic>
+          <a:noFill/>
+        </p:spPr>
+        <p:txBody>
+          <a:bodyPr wrap="square" lIns="54864" rIns="54864" tIns="27432" bIns="27432" anchor="t">
+            <a:noAutofit/>
+          </a:bodyPr>
+          <a:lstStyle/>
+          <a:p>
+            <a:pPr algn="l">
+              <a:lnSpc>
+                <a:spcPct val="115000"/>
+              </a:lnSpc>
+            </a:pPr>
+            <a:r>
+              <a:rPr sz="1000" b="1" i="0" spc="250">
+                <a:solidFill>
+                  <a:srgbClr val="FFFFFF"/>
+                </a:solidFill>
+              </a:rPr>
+              <a:t>INSURANCE CHECK</a:t>
+            </a:r>
+          </a:p>
+        </p:txBody>
+      </p:sp>
       <p:sp>
         <p:nvSpPr>
           <p:cNvPr id="2" name="Title 1"/>
@@ -3329,8 +3447,8 @@
         </p:nvSpPr>
         <p:spPr>
           <a:xfrm>
-            <a:off x="853418" y="2057400"/>
-            <a:ext cx="6095847" cy="1554480"/>
+            <a:off x="822960" y="2606040"/>
+            <a:ext cx="5608179" cy="1188720"/>
           </a:xfrm>
         </p:spPr>
         <p:txBody>
@@ -3347,7 +3465,7 @@
             <a:r>
               <a:rPr sz="3600" b="1" i="0">
                 <a:solidFill>
-                  <a:srgbClr val="115F59"/>
+                  <a:srgbClr val="FFFFFF"/>
                 </a:solidFill>
               </a:rPr>
               <a:t>우리 보험 점검 시간</a:t>
@@ -3357,14 +3475,14 @@
       </p:sp>
       <p:sp>
         <p:nvSpPr>
-          <p:cNvPr id="4" name="한 줄 문구"/>
+          <p:cNvPr id="7" name="한 줄 문구"/>
           <p:cNvSpPr txBox="1"/>
           <p:nvPr/>
         </p:nvSpPr>
         <p:spPr>
           <a:xfrm>
-            <a:off x="853418" y="3749039"/>
-            <a:ext cx="6095847" cy="822960"/>
+            <a:off x="822960" y="3886200"/>
+            <a:ext cx="5608179" cy="822960"/>
           </a:xfrm>
           <a:prstGeom prst="rect">
             <a:avLst/>
@@ -3383,9 +3501,9 @@
               </a:lnSpc>
             </a:pPr>
             <a:r>
-              <a:rPr sz="1700" b="0" i="1">
+              <a:rPr sz="1700" b="0" i="0">
                 <a:solidFill>
-                  <a:srgbClr val="115F59"/>
+                  <a:srgbClr val="FFFFFF"/>
                 </a:solidFill>
               </a:rPr>
               <a:t>어떤 보험에 들었는지부터 적습니다</a:t>
@@ -3395,14 +3513,14 @@
       </p:sp>
       <p:sp>
         <p:nvSpPr>
-          <p:cNvPr id="5" name="안내 문구"/>
+          <p:cNvPr id="8" name="안내 문구"/>
           <p:cNvSpPr txBox="1"/>
           <p:nvPr/>
         </p:nvSpPr>
         <p:spPr>
           <a:xfrm>
-            <a:off x="853418" y="4617720"/>
-            <a:ext cx="6095847" cy="914400"/>
+            <a:off x="822960" y="4754880"/>
+            <a:ext cx="5608179" cy="914400"/>
           </a:xfrm>
           <a:prstGeom prst="rect">
             <a:avLst/>
@@ -3423,10 +3541,10 @@
             <a:r>
               <a:rPr sz="1400" b="0" i="0">
                 <a:solidFill>
-                  <a:srgbClr val="666666"/>
+                  <a:srgbClr val="FFFFFF"/>
                 </a:solidFill>
               </a:rPr>
-              <a:t>본인 점검 · 2027. 00. 00</a:t>
+              <a:t>본인 점검 · 날짜 입력</a:t>
             </a:r>
           </a:p>
           <a:p>
@@ -3438,7 +3556,7 @@
             <a:r>
               <a:rPr sz="1400" b="0" i="0">
                 <a:solidFill>
-                  <a:srgbClr val="666666"/>
+                  <a:srgbClr val="FFFFFF"/>
                 </a:solidFill>
               </a:rPr>
               <a:t>가입 내용을 정리하고 함께 확인하는 양식</a:t>
@@ -3460,7 +3578,7 @@
     <p:bg>
       <p:bgPr>
         <a:solidFill>
-          <a:srgbClr val="EEFCFB"/>
+          <a:srgbClr val="EAFDF2"/>
         </a:solidFill>
         <a:effectLst/>
       </p:bgPr>
@@ -3480,46 +3598,84 @@
         </p:nvSpPr>
         <p:spPr>
           <a:xfrm>
-            <a:off x="256032" y="256032"/>
-            <a:ext cx="11679631" cy="6345936"/>
+            <a:off x="640080" y="566928"/>
+            <a:ext cx="10911535" cy="10972"/>
+          </a:xfrm>
+          <a:prstGeom prst="rect">
+            <a:avLst/>
+          </a:prstGeom>
+          <a:solidFill>
+            <a:srgbClr val="26231F"/>
+          </a:solidFill>
+          <a:ln>
+            <a:noFill/>
+          </a:ln>
+        </p:spPr>
+        <p:txBody>
+          <a:bodyPr rtlCol="0" anchor="ctr"/>
+          <a:lstStyle/>
+          <a:p>
+            <a:pPr algn="ctr"/>
+          </a:p>
+        </p:txBody>
+      </p:sp>
+      <p:sp>
+        <p:nvSpPr>
+          <p:cNvPr id="4" name="상단 라벨"/>
+          <p:cNvSpPr txBox="1"/>
+          <p:nvPr/>
+        </p:nvSpPr>
+        <p:spPr>
+          <a:xfrm>
+            <a:off x="640080" y="237744"/>
+            <a:ext cx="5486400" cy="274320"/>
           </a:xfrm>
           <a:prstGeom prst="rect">
             <a:avLst/>
           </a:prstGeom>
           <a:noFill/>
-          <a:ln w="28575">
-            <a:solidFill>
-              <a:srgbClr val="26C5B8"/>
-            </a:solidFill>
-          </a:ln>
-        </p:spPr>
-        <p:txBody>
-          <a:bodyPr rtlCol="0" anchor="ctr"/>
-          <a:lstStyle/>
-          <a:p>
-            <a:pPr algn="ctr"/>
-          </a:p>
-        </p:txBody>
-      </p:sp>
-      <p:sp>
-        <p:nvSpPr>
-          <p:cNvPr id="4" name="장식"/>
+        </p:spPr>
+        <p:txBody>
+          <a:bodyPr wrap="square" lIns="54864" rIns="54864" tIns="27432" bIns="27432" anchor="ctr">
+            <a:noAutofit/>
+          </a:bodyPr>
+          <a:lstStyle/>
+          <a:p>
+            <a:pPr algn="l">
+              <a:lnSpc>
+                <a:spcPct val="115000"/>
+              </a:lnSpc>
+            </a:pPr>
+            <a:r>
+              <a:rPr sz="900" b="1" i="0" spc="250">
+                <a:solidFill>
+                  <a:srgbClr val="26231F"/>
+                </a:solidFill>
+              </a:rPr>
+              <a:t>INSURANCE CHECK</a:t>
+            </a:r>
+          </a:p>
+        </p:txBody>
+      </p:sp>
+      <p:sp>
+        <p:nvSpPr>
+          <p:cNvPr id="5" name="포인트"/>
           <p:cNvSpPr/>
           <p:nvPr/>
         </p:nvSpPr>
         <p:spPr>
           <a:xfrm>
-            <a:off x="384048" y="384048"/>
-            <a:ext cx="11423599" cy="6089904"/>
-          </a:xfrm>
-          <a:prstGeom prst="rect">
+            <a:off x="11204143" y="246888"/>
+            <a:ext cx="237744" cy="237744"/>
+          </a:xfrm>
+          <a:prstGeom prst="round2SameRect">
             <a:avLst/>
           </a:prstGeom>
-          <a:noFill/>
-          <a:ln w="9525">
-            <a:solidFill>
-              <a:srgbClr val="D1FAF7"/>
-            </a:solidFill>
+          <a:solidFill>
+            <a:srgbClr val="7BEAA9"/>
+          </a:solidFill>
+          <a:ln>
+            <a:noFill/>
           </a:ln>
         </p:spPr>
         <p:txBody>
@@ -3542,8 +3698,8 @@
         </p:nvSpPr>
         <p:spPr>
           <a:xfrm>
-            <a:off x="822960" y="548640"/>
-            <a:ext cx="9265615" cy="822960"/>
+            <a:off x="640080" y="731520"/>
+            <a:ext cx="10911535" cy="822960"/>
           </a:xfrm>
         </p:spPr>
         <p:txBody>
@@ -3560,7 +3716,7 @@
             <a:r>
               <a:rPr sz="3000" b="1" i="0">
                 <a:solidFill>
-                  <a:srgbClr val="115F59"/>
+                  <a:srgbClr val="26231F"/>
                 </a:solidFill>
               </a:rPr>
               <a:t>점검 대상 현황</a:t>
@@ -3570,15 +3726,15 @@
       </p:sp>
       <p:graphicFrame>
         <p:nvGraphicFramePr>
-          <p:cNvPr id="5" name="표"/>
+          <p:cNvPr id="6" name="표"/>
           <p:cNvGraphicFramePr>
             <a:graphicFrameLocks noGrp="1"/>
           </p:cNvGraphicFramePr>
           <p:nvPr/>
         </p:nvGraphicFramePr>
         <p:xfrm>
-          <a:off x="822960" y="1554480"/>
-          <a:ext cx="10545774" cy="3657600"/>
+          <a:off x="640080" y="1783080"/>
+          <a:ext cx="10911534" cy="3657600"/>
         </p:xfrm>
         <a:graphic>
           <a:graphicData uri="http://schemas.openxmlformats.org/drawingml/2006/table">
@@ -3587,8 +3743,8 @@
                 <a:tableStyleId>{5C22544A-7EE6-4342-B048-85BDC9FD1C3A}</a:tableStyleId>
               </a:tblPr>
               <a:tblGrid>
-                <a:gridCol w="5272887"/>
-                <a:gridCol w="5272887"/>
+                <a:gridCol w="5455767"/>
+                <a:gridCol w="5455767"/>
               </a:tblGrid>
               <a:tr h="731520">
                 <a:tc>
@@ -3600,7 +3756,7 @@
                       <a:r>
                         <a:rPr sz="1600" b="1">
                           <a:solidFill>
-                            <a:srgbClr val="FFFFFF"/>
+                            <a:srgbClr val="26231F"/>
                           </a:solidFill>
                         </a:rPr>
                         <a:t>구분</a:t>
@@ -3610,30 +3766,30 @@
                   <a:tcPr anchor="ctr" marL="73152" marR="73152">
                     <a:lnL w="9525" cap="flat" cmpd="sng" algn="ctr">
                       <a:solidFill>
-                        <a:srgbClr val="26C5B8"/>
+                        <a:srgbClr val="7BEAA9"/>
                       </a:solidFill>
                       <a:prstDash val="solid"/>
                     </a:lnL>
                     <a:lnR w="9525" cap="flat" cmpd="sng" algn="ctr">
                       <a:solidFill>
-                        <a:srgbClr val="26C5B8"/>
+                        <a:srgbClr val="7BEAA9"/>
                       </a:solidFill>
                       <a:prstDash val="solid"/>
                     </a:lnR>
                     <a:lnT w="9525" cap="flat" cmpd="sng" algn="ctr">
                       <a:solidFill>
-                        <a:srgbClr val="26C5B8"/>
+                        <a:srgbClr val="7BEAA9"/>
                       </a:solidFill>
                       <a:prstDash val="solid"/>
                     </a:lnT>
                     <a:lnB w="9525" cap="flat" cmpd="sng" algn="ctr">
                       <a:solidFill>
-                        <a:srgbClr val="26C5B8"/>
+                        <a:srgbClr val="7BEAA9"/>
                       </a:solidFill>
                       <a:prstDash val="solid"/>
                     </a:lnB>
                     <a:solidFill>
-                      <a:srgbClr val="26C5B8"/>
+                      <a:srgbClr val="7BEAA9"/>
                     </a:solidFill>
                   </a:tcPr>
                 </a:tc>
@@ -3646,7 +3802,7 @@
                       <a:r>
                         <a:rPr sz="1600" b="1">
                           <a:solidFill>
-                            <a:srgbClr val="FFFFFF"/>
+                            <a:srgbClr val="26231F"/>
                           </a:solidFill>
                         </a:rPr>
                         <a:t>내용</a:t>
@@ -3656,30 +3812,30 @@
                   <a:tcPr anchor="ctr" marL="73152" marR="73152">
                     <a:lnL w="9525" cap="flat" cmpd="sng" algn="ctr">
                       <a:solidFill>
-                        <a:srgbClr val="26C5B8"/>
+                        <a:srgbClr val="7BEAA9"/>
                       </a:solidFill>
                       <a:prstDash val="solid"/>
                     </a:lnL>
                     <a:lnR w="9525" cap="flat" cmpd="sng" algn="ctr">
                       <a:solidFill>
-                        <a:srgbClr val="26C5B8"/>
+                        <a:srgbClr val="7BEAA9"/>
                       </a:solidFill>
                       <a:prstDash val="solid"/>
                     </a:lnR>
                     <a:lnT w="9525" cap="flat" cmpd="sng" algn="ctr">
                       <a:solidFill>
-                        <a:srgbClr val="26C5B8"/>
+                        <a:srgbClr val="7BEAA9"/>
                       </a:solidFill>
                       <a:prstDash val="solid"/>
                     </a:lnT>
                     <a:lnB w="9525" cap="flat" cmpd="sng" algn="ctr">
                       <a:solidFill>
-                        <a:srgbClr val="26C5B8"/>
+                        <a:srgbClr val="7BEAA9"/>
                       </a:solidFill>
                       <a:prstDash val="solid"/>
                     </a:lnB>
                     <a:solidFill>
-                      <a:srgbClr val="26C5B8"/>
+                      <a:srgbClr val="7BEAA9"/>
                     </a:solidFill>
                   </a:tcPr>
                 </a:tc>
@@ -3694,7 +3850,7 @@
                       <a:r>
                         <a:rPr sz="1600" b="1">
                           <a:solidFill>
-                            <a:srgbClr val="115F59"/>
+                            <a:srgbClr val="274935"/>
                           </a:solidFill>
                         </a:rPr>
                         <a:t>이름</a:t>
@@ -3704,30 +3860,30 @@
                   <a:tcPr anchor="ctr" marL="73152" marR="73152">
                     <a:lnL w="9525" cap="flat" cmpd="sng" algn="ctr">
                       <a:solidFill>
-                        <a:srgbClr val="D1FAF7"/>
+                        <a:srgbClr val="D1FAE2"/>
                       </a:solidFill>
                       <a:prstDash val="solid"/>
                     </a:lnL>
                     <a:lnR w="9525" cap="flat" cmpd="sng" algn="ctr">
                       <a:solidFill>
-                        <a:srgbClr val="D1FAF7"/>
+                        <a:srgbClr val="D1FAE2"/>
                       </a:solidFill>
                       <a:prstDash val="solid"/>
                     </a:lnR>
                     <a:lnT w="9525" cap="flat" cmpd="sng" algn="ctr">
                       <a:solidFill>
-                        <a:srgbClr val="D1FAF7"/>
+                        <a:srgbClr val="D1FAE2"/>
                       </a:solidFill>
                       <a:prstDash val="solid"/>
                     </a:lnT>
                     <a:lnB w="9525" cap="flat" cmpd="sng" algn="ctr">
                       <a:solidFill>
-                        <a:srgbClr val="D1FAF7"/>
+                        <a:srgbClr val="D1FAE2"/>
                       </a:solidFill>
                       <a:prstDash val="solid"/>
                     </a:lnB>
                     <a:solidFill>
-                      <a:srgbClr val="D1FAF7"/>
+                      <a:srgbClr val="D1FAE2"/>
                     </a:solidFill>
                   </a:tcPr>
                 </a:tc>
@@ -3740,7 +3896,7 @@
                       <a:r>
                         <a:rPr sz="1600" b="0">
                           <a:solidFill>
-                            <a:srgbClr val="2B2B2B"/>
+                            <a:srgbClr val="26231F"/>
                           </a:solidFill>
                         </a:rPr>
                         <a:t/>
@@ -3750,25 +3906,25 @@
                   <a:tcPr anchor="ctr" marL="73152" marR="73152">
                     <a:lnL w="9525" cap="flat" cmpd="sng" algn="ctr">
                       <a:solidFill>
-                        <a:srgbClr val="D1FAF7"/>
+                        <a:srgbClr val="D1FAE2"/>
                       </a:solidFill>
                       <a:prstDash val="solid"/>
                     </a:lnL>
                     <a:lnR w="9525" cap="flat" cmpd="sng" algn="ctr">
                       <a:solidFill>
-                        <a:srgbClr val="D1FAF7"/>
+                        <a:srgbClr val="D1FAE2"/>
                       </a:solidFill>
                       <a:prstDash val="solid"/>
                     </a:lnR>
                     <a:lnT w="9525" cap="flat" cmpd="sng" algn="ctr">
                       <a:solidFill>
-                        <a:srgbClr val="D1FAF7"/>
+                        <a:srgbClr val="D1FAE2"/>
                       </a:solidFill>
                       <a:prstDash val="solid"/>
                     </a:lnT>
                     <a:lnB w="9525" cap="flat" cmpd="sng" algn="ctr">
                       <a:solidFill>
-                        <a:srgbClr val="D1FAF7"/>
+                        <a:srgbClr val="D1FAE2"/>
                       </a:solidFill>
                       <a:prstDash val="solid"/>
                     </a:lnB>
@@ -3788,7 +3944,7 @@
                       <a:r>
                         <a:rPr sz="1600" b="1">
                           <a:solidFill>
-                            <a:srgbClr val="115F59"/>
+                            <a:srgbClr val="274935"/>
                           </a:solidFill>
                         </a:rPr>
                         <a:t>나이</a:t>
@@ -3798,30 +3954,30 @@
                   <a:tcPr anchor="ctr" marL="73152" marR="73152">
                     <a:lnL w="9525" cap="flat" cmpd="sng" algn="ctr">
                       <a:solidFill>
-                        <a:srgbClr val="D1FAF7"/>
+                        <a:srgbClr val="D1FAE2"/>
                       </a:solidFill>
                       <a:prstDash val="solid"/>
                     </a:lnL>
                     <a:lnR w="9525" cap="flat" cmpd="sng" algn="ctr">
                       <a:solidFill>
-                        <a:srgbClr val="D1FAF7"/>
+                        <a:srgbClr val="D1FAE2"/>
                       </a:solidFill>
                       <a:prstDash val="solid"/>
                     </a:lnR>
                     <a:lnT w="9525" cap="flat" cmpd="sng" algn="ctr">
                       <a:solidFill>
-                        <a:srgbClr val="D1FAF7"/>
+                        <a:srgbClr val="D1FAE2"/>
                       </a:solidFill>
                       <a:prstDash val="solid"/>
                     </a:lnT>
                     <a:lnB w="9525" cap="flat" cmpd="sng" algn="ctr">
                       <a:solidFill>
-                        <a:srgbClr val="D1FAF7"/>
+                        <a:srgbClr val="D1FAE2"/>
                       </a:solidFill>
                       <a:prstDash val="solid"/>
                     </a:lnB>
                     <a:solidFill>
-                      <a:srgbClr val="D1FAF7"/>
+                      <a:srgbClr val="D1FAE2"/>
                     </a:solidFill>
                   </a:tcPr>
                 </a:tc>
@@ -3834,7 +3990,7 @@
                       <a:r>
                         <a:rPr sz="1600" b="0">
                           <a:solidFill>
-                            <a:srgbClr val="2B2B2B"/>
+                            <a:srgbClr val="26231F"/>
                           </a:solidFill>
                         </a:rPr>
                         <a:t/>
@@ -3844,30 +4000,30 @@
                   <a:tcPr anchor="ctr" marL="73152" marR="73152">
                     <a:lnL w="9525" cap="flat" cmpd="sng" algn="ctr">
                       <a:solidFill>
-                        <a:srgbClr val="D1FAF7"/>
+                        <a:srgbClr val="D1FAE2"/>
                       </a:solidFill>
                       <a:prstDash val="solid"/>
                     </a:lnL>
                     <a:lnR w="9525" cap="flat" cmpd="sng" algn="ctr">
                       <a:solidFill>
-                        <a:srgbClr val="D1FAF7"/>
+                        <a:srgbClr val="D1FAE2"/>
                       </a:solidFill>
                       <a:prstDash val="solid"/>
                     </a:lnR>
                     <a:lnT w="9525" cap="flat" cmpd="sng" algn="ctr">
                       <a:solidFill>
-                        <a:srgbClr val="D1FAF7"/>
+                        <a:srgbClr val="D1FAE2"/>
                       </a:solidFill>
                       <a:prstDash val="solid"/>
                     </a:lnT>
                     <a:lnB w="9525" cap="flat" cmpd="sng" algn="ctr">
                       <a:solidFill>
-                        <a:srgbClr val="D1FAF7"/>
+                        <a:srgbClr val="D1FAE2"/>
                       </a:solidFill>
                       <a:prstDash val="solid"/>
                     </a:lnB>
                     <a:solidFill>
-                      <a:srgbClr val="EEFCFB"/>
+                      <a:srgbClr val="EAFDF2"/>
                     </a:solidFill>
                   </a:tcPr>
                 </a:tc>
@@ -3882,7 +4038,7 @@
                       <a:r>
                         <a:rPr sz="1600" b="1">
                           <a:solidFill>
-                            <a:srgbClr val="115F59"/>
+                            <a:srgbClr val="274935"/>
                           </a:solidFill>
                         </a:rPr>
                         <a:t>직업</a:t>
@@ -3892,30 +4048,30 @@
                   <a:tcPr anchor="ctr" marL="73152" marR="73152">
                     <a:lnL w="9525" cap="flat" cmpd="sng" algn="ctr">
                       <a:solidFill>
-                        <a:srgbClr val="D1FAF7"/>
+                        <a:srgbClr val="D1FAE2"/>
                       </a:solidFill>
                       <a:prstDash val="solid"/>
                     </a:lnL>
                     <a:lnR w="9525" cap="flat" cmpd="sng" algn="ctr">
                       <a:solidFill>
-                        <a:srgbClr val="D1FAF7"/>
+                        <a:srgbClr val="D1FAE2"/>
                       </a:solidFill>
                       <a:prstDash val="solid"/>
                     </a:lnR>
                     <a:lnT w="9525" cap="flat" cmpd="sng" algn="ctr">
                       <a:solidFill>
-                        <a:srgbClr val="D1FAF7"/>
+                        <a:srgbClr val="D1FAE2"/>
                       </a:solidFill>
                       <a:prstDash val="solid"/>
                     </a:lnT>
                     <a:lnB w="9525" cap="flat" cmpd="sng" algn="ctr">
                       <a:solidFill>
-                        <a:srgbClr val="D1FAF7"/>
+                        <a:srgbClr val="D1FAE2"/>
                       </a:solidFill>
                       <a:prstDash val="solid"/>
                     </a:lnB>
                     <a:solidFill>
-                      <a:srgbClr val="D1FAF7"/>
+                      <a:srgbClr val="D1FAE2"/>
                     </a:solidFill>
                   </a:tcPr>
                 </a:tc>
@@ -3928,7 +4084,7 @@
                       <a:r>
                         <a:rPr sz="1600" b="0">
                           <a:solidFill>
-                            <a:srgbClr val="2B2B2B"/>
+                            <a:srgbClr val="26231F"/>
                           </a:solidFill>
                         </a:rPr>
                         <a:t/>
@@ -3938,25 +4094,25 @@
                   <a:tcPr anchor="ctr" marL="73152" marR="73152">
                     <a:lnL w="9525" cap="flat" cmpd="sng" algn="ctr">
                       <a:solidFill>
-                        <a:srgbClr val="D1FAF7"/>
+                        <a:srgbClr val="D1FAE2"/>
                       </a:solidFill>
                       <a:prstDash val="solid"/>
                     </a:lnL>
                     <a:lnR w="9525" cap="flat" cmpd="sng" algn="ctr">
                       <a:solidFill>
-                        <a:srgbClr val="D1FAF7"/>
+                        <a:srgbClr val="D1FAE2"/>
                       </a:solidFill>
                       <a:prstDash val="solid"/>
                     </a:lnR>
                     <a:lnT w="9525" cap="flat" cmpd="sng" algn="ctr">
                       <a:solidFill>
-                        <a:srgbClr val="D1FAF7"/>
+                        <a:srgbClr val="D1FAE2"/>
                       </a:solidFill>
                       <a:prstDash val="solid"/>
                     </a:lnT>
                     <a:lnB w="9525" cap="flat" cmpd="sng" algn="ctr">
                       <a:solidFill>
-                        <a:srgbClr val="D1FAF7"/>
+                        <a:srgbClr val="D1FAE2"/>
                       </a:solidFill>
                       <a:prstDash val="solid"/>
                     </a:lnB>
@@ -3976,7 +4132,7 @@
                       <a:r>
                         <a:rPr sz="1600" b="1">
                           <a:solidFill>
-                            <a:srgbClr val="115F59"/>
+                            <a:srgbClr val="274935"/>
                           </a:solidFill>
                         </a:rPr>
                         <a:t>가족 구성</a:t>
@@ -3986,30 +4142,30 @@
                   <a:tcPr anchor="ctr" marL="73152" marR="73152">
                     <a:lnL w="9525" cap="flat" cmpd="sng" algn="ctr">
                       <a:solidFill>
-                        <a:srgbClr val="D1FAF7"/>
+                        <a:srgbClr val="D1FAE2"/>
                       </a:solidFill>
                       <a:prstDash val="solid"/>
                     </a:lnL>
                     <a:lnR w="9525" cap="flat" cmpd="sng" algn="ctr">
                       <a:solidFill>
-                        <a:srgbClr val="D1FAF7"/>
+                        <a:srgbClr val="D1FAE2"/>
                       </a:solidFill>
                       <a:prstDash val="solid"/>
                     </a:lnR>
                     <a:lnT w="9525" cap="flat" cmpd="sng" algn="ctr">
                       <a:solidFill>
-                        <a:srgbClr val="D1FAF7"/>
+                        <a:srgbClr val="D1FAE2"/>
                       </a:solidFill>
                       <a:prstDash val="solid"/>
                     </a:lnT>
                     <a:lnB w="9525" cap="flat" cmpd="sng" algn="ctr">
                       <a:solidFill>
-                        <a:srgbClr val="D1FAF7"/>
+                        <a:srgbClr val="D1FAE2"/>
                       </a:solidFill>
                       <a:prstDash val="solid"/>
                     </a:lnB>
                     <a:solidFill>
-                      <a:srgbClr val="D1FAF7"/>
+                      <a:srgbClr val="D1FAE2"/>
                     </a:solidFill>
                   </a:tcPr>
                 </a:tc>
@@ -4022,7 +4178,7 @@
                       <a:r>
                         <a:rPr sz="1600" b="0">
                           <a:solidFill>
-                            <a:srgbClr val="2B2B2B"/>
+                            <a:srgbClr val="26231F"/>
                           </a:solidFill>
                         </a:rPr>
                         <a:t/>
@@ -4032,30 +4188,30 @@
                   <a:tcPr anchor="ctr" marL="73152" marR="73152">
                     <a:lnL w="9525" cap="flat" cmpd="sng" algn="ctr">
                       <a:solidFill>
-                        <a:srgbClr val="D1FAF7"/>
+                        <a:srgbClr val="D1FAE2"/>
                       </a:solidFill>
                       <a:prstDash val="solid"/>
                     </a:lnL>
                     <a:lnR w="9525" cap="flat" cmpd="sng" algn="ctr">
                       <a:solidFill>
-                        <a:srgbClr val="D1FAF7"/>
+                        <a:srgbClr val="D1FAE2"/>
                       </a:solidFill>
                       <a:prstDash val="solid"/>
                     </a:lnR>
                     <a:lnT w="9525" cap="flat" cmpd="sng" algn="ctr">
                       <a:solidFill>
-                        <a:srgbClr val="D1FAF7"/>
+                        <a:srgbClr val="D1FAE2"/>
                       </a:solidFill>
                       <a:prstDash val="solid"/>
                     </a:lnT>
                     <a:lnB w="9525" cap="flat" cmpd="sng" algn="ctr">
                       <a:solidFill>
-                        <a:srgbClr val="D1FAF7"/>
+                        <a:srgbClr val="D1FAE2"/>
                       </a:solidFill>
                       <a:prstDash val="solid"/>
                     </a:lnB>
                     <a:solidFill>
-                      <a:srgbClr val="EEFCFB"/>
+                      <a:srgbClr val="EAFDF2"/>
                     </a:solidFill>
                   </a:tcPr>
                 </a:tc>
@@ -4078,7 +4234,7 @@
     <p:bg>
       <p:bgPr>
         <a:solidFill>
-          <a:srgbClr val="EEFCFB"/>
+          <a:srgbClr val="EAFDF2"/>
         </a:solidFill>
         <a:effectLst/>
       </p:bgPr>
@@ -4098,46 +4254,84 @@
         </p:nvSpPr>
         <p:spPr>
           <a:xfrm>
-            <a:off x="256032" y="256032"/>
-            <a:ext cx="11679631" cy="6345936"/>
+            <a:off x="640080" y="566928"/>
+            <a:ext cx="10911535" cy="10972"/>
+          </a:xfrm>
+          <a:prstGeom prst="rect">
+            <a:avLst/>
+          </a:prstGeom>
+          <a:solidFill>
+            <a:srgbClr val="26231F"/>
+          </a:solidFill>
+          <a:ln>
+            <a:noFill/>
+          </a:ln>
+        </p:spPr>
+        <p:txBody>
+          <a:bodyPr rtlCol="0" anchor="ctr"/>
+          <a:lstStyle/>
+          <a:p>
+            <a:pPr algn="ctr"/>
+          </a:p>
+        </p:txBody>
+      </p:sp>
+      <p:sp>
+        <p:nvSpPr>
+          <p:cNvPr id="4" name="상단 라벨"/>
+          <p:cNvSpPr txBox="1"/>
+          <p:nvPr/>
+        </p:nvSpPr>
+        <p:spPr>
+          <a:xfrm>
+            <a:off x="640080" y="237744"/>
+            <a:ext cx="5486400" cy="274320"/>
           </a:xfrm>
           <a:prstGeom prst="rect">
             <a:avLst/>
           </a:prstGeom>
           <a:noFill/>
-          <a:ln w="28575">
-            <a:solidFill>
-              <a:srgbClr val="26C5B8"/>
-            </a:solidFill>
-          </a:ln>
-        </p:spPr>
-        <p:txBody>
-          <a:bodyPr rtlCol="0" anchor="ctr"/>
-          <a:lstStyle/>
-          <a:p>
-            <a:pPr algn="ctr"/>
-          </a:p>
-        </p:txBody>
-      </p:sp>
-      <p:sp>
-        <p:nvSpPr>
-          <p:cNvPr id="4" name="장식"/>
+        </p:spPr>
+        <p:txBody>
+          <a:bodyPr wrap="square" lIns="54864" rIns="54864" tIns="27432" bIns="27432" anchor="ctr">
+            <a:noAutofit/>
+          </a:bodyPr>
+          <a:lstStyle/>
+          <a:p>
+            <a:pPr algn="l">
+              <a:lnSpc>
+                <a:spcPct val="115000"/>
+              </a:lnSpc>
+            </a:pPr>
+            <a:r>
+              <a:rPr sz="900" b="1" i="0" spc="250">
+                <a:solidFill>
+                  <a:srgbClr val="26231F"/>
+                </a:solidFill>
+              </a:rPr>
+              <a:t>INSURANCE CHECK</a:t>
+            </a:r>
+          </a:p>
+        </p:txBody>
+      </p:sp>
+      <p:sp>
+        <p:nvSpPr>
+          <p:cNvPr id="5" name="포인트"/>
           <p:cNvSpPr/>
           <p:nvPr/>
         </p:nvSpPr>
         <p:spPr>
           <a:xfrm>
-            <a:off x="384048" y="384048"/>
-            <a:ext cx="11423599" cy="6089904"/>
-          </a:xfrm>
-          <a:prstGeom prst="rect">
+            <a:off x="11204143" y="246888"/>
+            <a:ext cx="237744" cy="237744"/>
+          </a:xfrm>
+          <a:prstGeom prst="round2SameRect">
             <a:avLst/>
           </a:prstGeom>
-          <a:noFill/>
-          <a:ln w="9525">
-            <a:solidFill>
-              <a:srgbClr val="D1FAF7"/>
-            </a:solidFill>
+          <a:solidFill>
+            <a:srgbClr val="7BEAA9"/>
+          </a:solidFill>
+          <a:ln>
+            <a:noFill/>
           </a:ln>
         </p:spPr>
         <p:txBody>
@@ -4160,8 +4354,8 @@
         </p:nvSpPr>
         <p:spPr>
           <a:xfrm>
-            <a:off x="822960" y="548640"/>
-            <a:ext cx="9265615" cy="822960"/>
+            <a:off x="640080" y="731520"/>
+            <a:ext cx="10911535" cy="822960"/>
           </a:xfrm>
         </p:spPr>
         <p:txBody>
@@ -4178,7 +4372,7 @@
             <a:r>
               <a:rPr sz="3000" b="1" i="0">
                 <a:solidFill>
-                  <a:srgbClr val="115F59"/>
+                  <a:srgbClr val="26231F"/>
                 </a:solidFill>
               </a:rPr>
               <a:t>가입한 보험 목록</a:t>
@@ -4188,15 +4382,15 @@
       </p:sp>
       <p:graphicFrame>
         <p:nvGraphicFramePr>
-          <p:cNvPr id="5" name="표"/>
+          <p:cNvPr id="6" name="표"/>
           <p:cNvGraphicFramePr>
             <a:graphicFrameLocks noGrp="1"/>
           </p:cNvGraphicFramePr>
           <p:nvPr/>
         </p:nvGraphicFramePr>
         <p:xfrm>
-          <a:off x="822960" y="1554480"/>
-          <a:ext cx="10545775" cy="4224528"/>
+          <a:off x="640080" y="1783080"/>
+          <a:ext cx="10911535" cy="4224528"/>
         </p:xfrm>
         <a:graphic>
           <a:graphicData uri="http://schemas.openxmlformats.org/drawingml/2006/table">
@@ -4209,7 +4403,7 @@
                 <a:gridCol w="3108960"/>
                 <a:gridCol w="1828800"/>
                 <a:gridCol w="1828800"/>
-                <a:gridCol w="1767535"/>
+                <a:gridCol w="2133295"/>
               </a:tblGrid>
               <a:tr h="603504">
                 <a:tc>
@@ -4221,7 +4415,7 @@
                       <a:r>
                         <a:rPr sz="1400" b="1">
                           <a:solidFill>
-                            <a:srgbClr val="FFFFFF"/>
+                            <a:srgbClr val="26231F"/>
                           </a:solidFill>
                         </a:rPr>
                         <a:t>보험회사</a:t>
@@ -4231,30 +4425,30 @@
                   <a:tcPr anchor="ctr" marL="73152" marR="73152">
                     <a:lnL w="9525" cap="flat" cmpd="sng" algn="ctr">
                       <a:solidFill>
-                        <a:srgbClr val="26C5B8"/>
+                        <a:srgbClr val="7BEAA9"/>
                       </a:solidFill>
                       <a:prstDash val="solid"/>
                     </a:lnL>
                     <a:lnR w="9525" cap="flat" cmpd="sng" algn="ctr">
                       <a:solidFill>
-                        <a:srgbClr val="26C5B8"/>
+                        <a:srgbClr val="7BEAA9"/>
                       </a:solidFill>
                       <a:prstDash val="solid"/>
                     </a:lnR>
                     <a:lnT w="9525" cap="flat" cmpd="sng" algn="ctr">
                       <a:solidFill>
-                        <a:srgbClr val="26C5B8"/>
+                        <a:srgbClr val="7BEAA9"/>
                       </a:solidFill>
                       <a:prstDash val="solid"/>
                     </a:lnT>
                     <a:lnB w="9525" cap="flat" cmpd="sng" algn="ctr">
                       <a:solidFill>
-                        <a:srgbClr val="26C5B8"/>
+                        <a:srgbClr val="7BEAA9"/>
                       </a:solidFill>
                       <a:prstDash val="solid"/>
                     </a:lnB>
                     <a:solidFill>
-                      <a:srgbClr val="26C5B8"/>
+                      <a:srgbClr val="7BEAA9"/>
                     </a:solidFill>
                   </a:tcPr>
                 </a:tc>
@@ -4267,7 +4461,7 @@
                       <a:r>
                         <a:rPr sz="1400" b="1">
                           <a:solidFill>
-                            <a:srgbClr val="FFFFFF"/>
+                            <a:srgbClr val="26231F"/>
                           </a:solidFill>
                         </a:rPr>
                         <a:t>상품명</a:t>
@@ -4277,30 +4471,30 @@
                   <a:tcPr anchor="ctr" marL="73152" marR="73152">
                     <a:lnL w="9525" cap="flat" cmpd="sng" algn="ctr">
                       <a:solidFill>
-                        <a:srgbClr val="26C5B8"/>
+                        <a:srgbClr val="7BEAA9"/>
                       </a:solidFill>
                       <a:prstDash val="solid"/>
                     </a:lnL>
                     <a:lnR w="9525" cap="flat" cmpd="sng" algn="ctr">
                       <a:solidFill>
-                        <a:srgbClr val="26C5B8"/>
+                        <a:srgbClr val="7BEAA9"/>
                       </a:solidFill>
                       <a:prstDash val="solid"/>
                     </a:lnR>
                     <a:lnT w="9525" cap="flat" cmpd="sng" algn="ctr">
                       <a:solidFill>
-                        <a:srgbClr val="26C5B8"/>
+                        <a:srgbClr val="7BEAA9"/>
                       </a:solidFill>
                       <a:prstDash val="solid"/>
                     </a:lnT>
                     <a:lnB w="9525" cap="flat" cmpd="sng" algn="ctr">
                       <a:solidFill>
-                        <a:srgbClr val="26C5B8"/>
+                        <a:srgbClr val="7BEAA9"/>
                       </a:solidFill>
                       <a:prstDash val="solid"/>
                     </a:lnB>
                     <a:solidFill>
-                      <a:srgbClr val="26C5B8"/>
+                      <a:srgbClr val="7BEAA9"/>
                     </a:solidFill>
                   </a:tcPr>
                 </a:tc>
@@ -4313,7 +4507,7 @@
                       <a:r>
                         <a:rPr sz="1400" b="1">
                           <a:solidFill>
-                            <a:srgbClr val="FFFFFF"/>
+                            <a:srgbClr val="26231F"/>
                           </a:solidFill>
                         </a:rPr>
                         <a:t>종류</a:t>
@@ -4323,30 +4517,30 @@
                   <a:tcPr anchor="ctr" marL="73152" marR="73152">
                     <a:lnL w="9525" cap="flat" cmpd="sng" algn="ctr">
                       <a:solidFill>
-                        <a:srgbClr val="26C5B8"/>
+                        <a:srgbClr val="7BEAA9"/>
                       </a:solidFill>
                       <a:prstDash val="solid"/>
                     </a:lnL>
                     <a:lnR w="9525" cap="flat" cmpd="sng" algn="ctr">
                       <a:solidFill>
-                        <a:srgbClr val="26C5B8"/>
+                        <a:srgbClr val="7BEAA9"/>
                       </a:solidFill>
                       <a:prstDash val="solid"/>
                     </a:lnR>
                     <a:lnT w="9525" cap="flat" cmpd="sng" algn="ctr">
                       <a:solidFill>
-                        <a:srgbClr val="26C5B8"/>
+                        <a:srgbClr val="7BEAA9"/>
                       </a:solidFill>
                       <a:prstDash val="solid"/>
                     </a:lnT>
                     <a:lnB w="9525" cap="flat" cmpd="sng" algn="ctr">
                       <a:solidFill>
-                        <a:srgbClr val="26C5B8"/>
+                        <a:srgbClr val="7BEAA9"/>
                       </a:solidFill>
                       <a:prstDash val="solid"/>
                     </a:lnB>
                     <a:solidFill>
-                      <a:srgbClr val="26C5B8"/>
+                      <a:srgbClr val="7BEAA9"/>
                     </a:solidFill>
                   </a:tcPr>
                 </a:tc>
@@ -4359,7 +4553,7 @@
                       <a:r>
                         <a:rPr sz="1400" b="1">
                           <a:solidFill>
-                            <a:srgbClr val="FFFFFF"/>
+                            <a:srgbClr val="26231F"/>
                           </a:solidFill>
                         </a:rPr>
                         <a:t>만기일</a:t>
@@ -4369,30 +4563,30 @@
                   <a:tcPr anchor="ctr" marL="73152" marR="73152">
                     <a:lnL w="9525" cap="flat" cmpd="sng" algn="ctr">
                       <a:solidFill>
-                        <a:srgbClr val="26C5B8"/>
+                        <a:srgbClr val="7BEAA9"/>
                       </a:solidFill>
                       <a:prstDash val="solid"/>
                     </a:lnL>
                     <a:lnR w="9525" cap="flat" cmpd="sng" algn="ctr">
                       <a:solidFill>
-                        <a:srgbClr val="26C5B8"/>
+                        <a:srgbClr val="7BEAA9"/>
                       </a:solidFill>
                       <a:prstDash val="solid"/>
                     </a:lnR>
                     <a:lnT w="9525" cap="flat" cmpd="sng" algn="ctr">
                       <a:solidFill>
-                        <a:srgbClr val="26C5B8"/>
+                        <a:srgbClr val="7BEAA9"/>
                       </a:solidFill>
                       <a:prstDash val="solid"/>
                     </a:lnT>
                     <a:lnB w="9525" cap="flat" cmpd="sng" algn="ctr">
                       <a:solidFill>
-                        <a:srgbClr val="26C5B8"/>
+                        <a:srgbClr val="7BEAA9"/>
                       </a:solidFill>
                       <a:prstDash val="solid"/>
                     </a:lnB>
                     <a:solidFill>
-                      <a:srgbClr val="26C5B8"/>
+                      <a:srgbClr val="7BEAA9"/>
                     </a:solidFill>
                   </a:tcPr>
                 </a:tc>
@@ -4405,7 +4599,7 @@
                       <a:r>
                         <a:rPr sz="1400" b="1">
                           <a:solidFill>
-                            <a:srgbClr val="FFFFFF"/>
+                            <a:srgbClr val="26231F"/>
                           </a:solidFill>
                         </a:rPr>
                         <a:t>월 보험료</a:t>
@@ -4415,30 +4609,30 @@
                   <a:tcPr anchor="ctr" marL="73152" marR="73152">
                     <a:lnL w="9525" cap="flat" cmpd="sng" algn="ctr">
                       <a:solidFill>
-                        <a:srgbClr val="26C5B8"/>
+                        <a:srgbClr val="7BEAA9"/>
                       </a:solidFill>
                       <a:prstDash val="solid"/>
                     </a:lnL>
                     <a:lnR w="9525" cap="flat" cmpd="sng" algn="ctr">
                       <a:solidFill>
-                        <a:srgbClr val="26C5B8"/>
+                        <a:srgbClr val="7BEAA9"/>
                       </a:solidFill>
                       <a:prstDash val="solid"/>
                     </a:lnR>
                     <a:lnT w="9525" cap="flat" cmpd="sng" algn="ctr">
                       <a:solidFill>
-                        <a:srgbClr val="26C5B8"/>
+                        <a:srgbClr val="7BEAA9"/>
                       </a:solidFill>
                       <a:prstDash val="solid"/>
                     </a:lnT>
                     <a:lnB w="9525" cap="flat" cmpd="sng" algn="ctr">
                       <a:solidFill>
-                        <a:srgbClr val="26C5B8"/>
+                        <a:srgbClr val="7BEAA9"/>
                       </a:solidFill>
                       <a:prstDash val="solid"/>
                     </a:lnB>
                     <a:solidFill>
-                      <a:srgbClr val="26C5B8"/>
+                      <a:srgbClr val="7BEAA9"/>
                     </a:solidFill>
                   </a:tcPr>
                 </a:tc>
@@ -4453,7 +4647,7 @@
                       <a:r>
                         <a:rPr sz="1400" b="0">
                           <a:solidFill>
-                            <a:srgbClr val="2B2B2B"/>
+                            <a:srgbClr val="26231F"/>
                           </a:solidFill>
                         </a:rPr>
                         <a:t/>
@@ -4463,25 +4657,25 @@
                   <a:tcPr anchor="ctr" marL="73152" marR="73152">
                     <a:lnL w="9525" cap="flat" cmpd="sng" algn="ctr">
                       <a:solidFill>
-                        <a:srgbClr val="D1FAF7"/>
+                        <a:srgbClr val="D1FAE2"/>
                       </a:solidFill>
                       <a:prstDash val="solid"/>
                     </a:lnL>
                     <a:lnR w="9525" cap="flat" cmpd="sng" algn="ctr">
                       <a:solidFill>
-                        <a:srgbClr val="D1FAF7"/>
+                        <a:srgbClr val="D1FAE2"/>
                       </a:solidFill>
                       <a:prstDash val="solid"/>
                     </a:lnR>
                     <a:lnT w="9525" cap="flat" cmpd="sng" algn="ctr">
                       <a:solidFill>
-                        <a:srgbClr val="D1FAF7"/>
+                        <a:srgbClr val="D1FAE2"/>
                       </a:solidFill>
                       <a:prstDash val="solid"/>
                     </a:lnT>
                     <a:lnB w="9525" cap="flat" cmpd="sng" algn="ctr">
                       <a:solidFill>
-                        <a:srgbClr val="D1FAF7"/>
+                        <a:srgbClr val="D1FAE2"/>
                       </a:solidFill>
                       <a:prstDash val="solid"/>
                     </a:lnB>
@@ -4499,7 +4693,7 @@
                       <a:r>
                         <a:rPr sz="1400" b="0">
                           <a:solidFill>
-                            <a:srgbClr val="2B2B2B"/>
+                            <a:srgbClr val="26231F"/>
                           </a:solidFill>
                         </a:rPr>
                         <a:t/>
@@ -4509,25 +4703,25 @@
                   <a:tcPr anchor="ctr" marL="73152" marR="73152">
                     <a:lnL w="9525" cap="flat" cmpd="sng" algn="ctr">
                       <a:solidFill>
-                        <a:srgbClr val="D1FAF7"/>
+                        <a:srgbClr val="D1FAE2"/>
                       </a:solidFill>
                       <a:prstDash val="solid"/>
                     </a:lnL>
                     <a:lnR w="9525" cap="flat" cmpd="sng" algn="ctr">
                       <a:solidFill>
-                        <a:srgbClr val="D1FAF7"/>
+                        <a:srgbClr val="D1FAE2"/>
                       </a:solidFill>
                       <a:prstDash val="solid"/>
                     </a:lnR>
                     <a:lnT w="9525" cap="flat" cmpd="sng" algn="ctr">
                       <a:solidFill>
-                        <a:srgbClr val="D1FAF7"/>
+                        <a:srgbClr val="D1FAE2"/>
                       </a:solidFill>
                       <a:prstDash val="solid"/>
                     </a:lnT>
                     <a:lnB w="9525" cap="flat" cmpd="sng" algn="ctr">
                       <a:solidFill>
-                        <a:srgbClr val="D1FAF7"/>
+                        <a:srgbClr val="D1FAE2"/>
                       </a:solidFill>
                       <a:prstDash val="solid"/>
                     </a:lnB>
@@ -4545,7 +4739,7 @@
                       <a:r>
                         <a:rPr sz="1400" b="0">
                           <a:solidFill>
-                            <a:srgbClr val="2B2B2B"/>
+                            <a:srgbClr val="26231F"/>
                           </a:solidFill>
                         </a:rPr>
                         <a:t/>
@@ -4555,25 +4749,25 @@
                   <a:tcPr anchor="ctr" marL="73152" marR="73152">
                     <a:lnL w="9525" cap="flat" cmpd="sng" algn="ctr">
                       <a:solidFill>
-                        <a:srgbClr val="D1FAF7"/>
+                        <a:srgbClr val="D1FAE2"/>
                       </a:solidFill>
                       <a:prstDash val="solid"/>
                     </a:lnL>
                     <a:lnR w="9525" cap="flat" cmpd="sng" algn="ctr">
                       <a:solidFill>
-                        <a:srgbClr val="D1FAF7"/>
+                        <a:srgbClr val="D1FAE2"/>
                       </a:solidFill>
                       <a:prstDash val="solid"/>
                     </a:lnR>
                     <a:lnT w="9525" cap="flat" cmpd="sng" algn="ctr">
                       <a:solidFill>
-                        <a:srgbClr val="D1FAF7"/>
+                        <a:srgbClr val="D1FAE2"/>
                       </a:solidFill>
                       <a:prstDash val="solid"/>
                     </a:lnT>
                     <a:lnB w="9525" cap="flat" cmpd="sng" algn="ctr">
                       <a:solidFill>
-                        <a:srgbClr val="D1FAF7"/>
+                        <a:srgbClr val="D1FAE2"/>
                       </a:solidFill>
                       <a:prstDash val="solid"/>
                     </a:lnB>
@@ -4591,7 +4785,7 @@
                       <a:r>
                         <a:rPr sz="1400" b="0">
                           <a:solidFill>
-                            <a:srgbClr val="2B2B2B"/>
+                            <a:srgbClr val="26231F"/>
                           </a:solidFill>
                         </a:rPr>
                         <a:t/>
@@ -4601,25 +4795,25 @@
                   <a:tcPr anchor="ctr" marL="73152" marR="73152">
                     <a:lnL w="9525" cap="flat" cmpd="sng" algn="ctr">
                       <a:solidFill>
-                        <a:srgbClr val="D1FAF7"/>
+                        <a:srgbClr val="D1FAE2"/>
                       </a:solidFill>
                       <a:prstDash val="solid"/>
                     </a:lnL>
                     <a:lnR w="9525" cap="flat" cmpd="sng" algn="ctr">
                       <a:solidFill>
-                        <a:srgbClr val="D1FAF7"/>
+                        <a:srgbClr val="D1FAE2"/>
                       </a:solidFill>
                       <a:prstDash val="solid"/>
                     </a:lnR>
                     <a:lnT w="9525" cap="flat" cmpd="sng" algn="ctr">
                       <a:solidFill>
-                        <a:srgbClr val="D1FAF7"/>
+                        <a:srgbClr val="D1FAE2"/>
                       </a:solidFill>
                       <a:prstDash val="solid"/>
                     </a:lnT>
                     <a:lnB w="9525" cap="flat" cmpd="sng" algn="ctr">
                       <a:solidFill>
-                        <a:srgbClr val="D1FAF7"/>
+                        <a:srgbClr val="D1FAE2"/>
                       </a:solidFill>
                       <a:prstDash val="solid"/>
                     </a:lnB>
@@ -4637,7 +4831,7 @@
                       <a:r>
                         <a:rPr sz="1400" b="0">
                           <a:solidFill>
-                            <a:srgbClr val="2B2B2B"/>
+                            <a:srgbClr val="26231F"/>
                           </a:solidFill>
                         </a:rPr>
                         <a:t/>
@@ -4647,25 +4841,25 @@
                   <a:tcPr anchor="ctr" marL="73152" marR="73152">
                     <a:lnL w="9525" cap="flat" cmpd="sng" algn="ctr">
                       <a:solidFill>
-                        <a:srgbClr val="D1FAF7"/>
+                        <a:srgbClr val="D1FAE2"/>
                       </a:solidFill>
                       <a:prstDash val="solid"/>
                     </a:lnL>
                     <a:lnR w="9525" cap="flat" cmpd="sng" algn="ctr">
                       <a:solidFill>
-                        <a:srgbClr val="D1FAF7"/>
+                        <a:srgbClr val="D1FAE2"/>
                       </a:solidFill>
                       <a:prstDash val="solid"/>
                     </a:lnR>
                     <a:lnT w="9525" cap="flat" cmpd="sng" algn="ctr">
                       <a:solidFill>
-                        <a:srgbClr val="D1FAF7"/>
+                        <a:srgbClr val="D1FAE2"/>
                       </a:solidFill>
                       <a:prstDash val="solid"/>
                     </a:lnT>
                     <a:lnB w="9525" cap="flat" cmpd="sng" algn="ctr">
                       <a:solidFill>
-                        <a:srgbClr val="D1FAF7"/>
+                        <a:srgbClr val="D1FAE2"/>
                       </a:solidFill>
                       <a:prstDash val="solid"/>
                     </a:lnB>
@@ -4685,7 +4879,7 @@
                       <a:r>
                         <a:rPr sz="1400" b="0">
                           <a:solidFill>
-                            <a:srgbClr val="2B2B2B"/>
+                            <a:srgbClr val="26231F"/>
                           </a:solidFill>
                         </a:rPr>
                         <a:t/>
@@ -4695,30 +4889,30 @@
                   <a:tcPr anchor="ctr" marL="73152" marR="73152">
                     <a:lnL w="9525" cap="flat" cmpd="sng" algn="ctr">
                       <a:solidFill>
-                        <a:srgbClr val="D1FAF7"/>
+                        <a:srgbClr val="D1FAE2"/>
                       </a:solidFill>
                       <a:prstDash val="solid"/>
                     </a:lnL>
                     <a:lnR w="9525" cap="flat" cmpd="sng" algn="ctr">
                       <a:solidFill>
-                        <a:srgbClr val="D1FAF7"/>
+                        <a:srgbClr val="D1FAE2"/>
                       </a:solidFill>
                       <a:prstDash val="solid"/>
                     </a:lnR>
                     <a:lnT w="9525" cap="flat" cmpd="sng" algn="ctr">
                       <a:solidFill>
-                        <a:srgbClr val="D1FAF7"/>
+                        <a:srgbClr val="D1FAE2"/>
                       </a:solidFill>
                       <a:prstDash val="solid"/>
                     </a:lnT>
                     <a:lnB w="9525" cap="flat" cmpd="sng" algn="ctr">
                       <a:solidFill>
-                        <a:srgbClr val="D1FAF7"/>
+                        <a:srgbClr val="D1FAE2"/>
                       </a:solidFill>
                       <a:prstDash val="solid"/>
                     </a:lnB>
                     <a:solidFill>
-                      <a:srgbClr val="EEFCFB"/>
+                      <a:srgbClr val="EAFDF2"/>
                     </a:solidFill>
                   </a:tcPr>
                 </a:tc>
@@ -4731,7 +4925,7 @@
                       <a:r>
                         <a:rPr sz="1400" b="0">
                           <a:solidFill>
-                            <a:srgbClr val="2B2B2B"/>
+                            <a:srgbClr val="26231F"/>
                           </a:solidFill>
                         </a:rPr>
                         <a:t/>
@@ -4741,30 +4935,30 @@
                   <a:tcPr anchor="ctr" marL="73152" marR="73152">
                     <a:lnL w="9525" cap="flat" cmpd="sng" algn="ctr">
                       <a:solidFill>
-                        <a:srgbClr val="D1FAF7"/>
+                        <a:srgbClr val="D1FAE2"/>
                       </a:solidFill>
                       <a:prstDash val="solid"/>
                     </a:lnL>
                     <a:lnR w="9525" cap="flat" cmpd="sng" algn="ctr">
                       <a:solidFill>
-                        <a:srgbClr val="D1FAF7"/>
+                        <a:srgbClr val="D1FAE2"/>
                       </a:solidFill>
                       <a:prstDash val="solid"/>
                     </a:lnR>
                     <a:lnT w="9525" cap="flat" cmpd="sng" algn="ctr">
                       <a:solidFill>
-                        <a:srgbClr val="D1FAF7"/>
+                        <a:srgbClr val="D1FAE2"/>
                       </a:solidFill>
                       <a:prstDash val="solid"/>
                     </a:lnT>
                     <a:lnB w="9525" cap="flat" cmpd="sng" algn="ctr">
                       <a:solidFill>
-                        <a:srgbClr val="D1FAF7"/>
+                        <a:srgbClr val="D1FAE2"/>
                       </a:solidFill>
                       <a:prstDash val="solid"/>
                     </a:lnB>
                     <a:solidFill>
-                      <a:srgbClr val="EEFCFB"/>
+                      <a:srgbClr val="EAFDF2"/>
                     </a:solidFill>
                   </a:tcPr>
                 </a:tc>
@@ -4777,7 +4971,7 @@
                       <a:r>
                         <a:rPr sz="1400" b="0">
                           <a:solidFill>
-                            <a:srgbClr val="2B2B2B"/>
+                            <a:srgbClr val="26231F"/>
                           </a:solidFill>
                         </a:rPr>
                         <a:t/>
@@ -4787,30 +4981,30 @@
                   <a:tcPr anchor="ctr" marL="73152" marR="73152">
                     <a:lnL w="9525" cap="flat" cmpd="sng" algn="ctr">
                       <a:solidFill>
-                        <a:srgbClr val="D1FAF7"/>
+                        <a:srgbClr val="D1FAE2"/>
                       </a:solidFill>
                       <a:prstDash val="solid"/>
                     </a:lnL>
                     <a:lnR w="9525" cap="flat" cmpd="sng" algn="ctr">
                       <a:solidFill>
-                        <a:srgbClr val="D1FAF7"/>
+                        <a:srgbClr val="D1FAE2"/>
                       </a:solidFill>
                       <a:prstDash val="solid"/>
                     </a:lnR>
                     <a:lnT w="9525" cap="flat" cmpd="sng" algn="ctr">
                       <a:solidFill>
-                        <a:srgbClr val="D1FAF7"/>
+                        <a:srgbClr val="D1FAE2"/>
                       </a:solidFill>
                       <a:prstDash val="solid"/>
                     </a:lnT>
                     <a:lnB w="9525" cap="flat" cmpd="sng" algn="ctr">
                       <a:solidFill>
-                        <a:srgbClr val="D1FAF7"/>
+                        <a:srgbClr val="D1FAE2"/>
                       </a:solidFill>
                       <a:prstDash val="solid"/>
                     </a:lnB>
                     <a:solidFill>
-                      <a:srgbClr val="EEFCFB"/>
+                      <a:srgbClr val="EAFDF2"/>
                     </a:solidFill>
                   </a:tcPr>
                 </a:tc>
@@ -4823,7 +5017,7 @@
                       <a:r>
                         <a:rPr sz="1400" b="0">
                           <a:solidFill>
-                            <a:srgbClr val="2B2B2B"/>
+                            <a:srgbClr val="26231F"/>
                           </a:solidFill>
                         </a:rPr>
                         <a:t/>
@@ -4833,30 +5027,30 @@
                   <a:tcPr anchor="ctr" marL="73152" marR="73152">
                     <a:lnL w="9525" cap="flat" cmpd="sng" algn="ctr">
                       <a:solidFill>
-                        <a:srgbClr val="D1FAF7"/>
+                        <a:srgbClr val="D1FAE2"/>
                       </a:solidFill>
                       <a:prstDash val="solid"/>
                     </a:lnL>
                     <a:lnR w="9525" cap="flat" cmpd="sng" algn="ctr">
                       <a:solidFill>
-                        <a:srgbClr val="D1FAF7"/>
+                        <a:srgbClr val="D1FAE2"/>
                       </a:solidFill>
                       <a:prstDash val="solid"/>
                     </a:lnR>
                     <a:lnT w="9525" cap="flat" cmpd="sng" algn="ctr">
                       <a:solidFill>
-                        <a:srgbClr val="D1FAF7"/>
+                        <a:srgbClr val="D1FAE2"/>
                       </a:solidFill>
                       <a:prstDash val="solid"/>
                     </a:lnT>
                     <a:lnB w="9525" cap="flat" cmpd="sng" algn="ctr">
                       <a:solidFill>
-                        <a:srgbClr val="D1FAF7"/>
+                        <a:srgbClr val="D1FAE2"/>
                       </a:solidFill>
                       <a:prstDash val="solid"/>
                     </a:lnB>
                     <a:solidFill>
-                      <a:srgbClr val="EEFCFB"/>
+                      <a:srgbClr val="EAFDF2"/>
                     </a:solidFill>
                   </a:tcPr>
                 </a:tc>
@@ -4869,7 +5063,7 @@
                       <a:r>
                         <a:rPr sz="1400" b="0">
                           <a:solidFill>
-                            <a:srgbClr val="2B2B2B"/>
+                            <a:srgbClr val="26231F"/>
                           </a:solidFill>
                         </a:rPr>
                         <a:t/>
@@ -4879,30 +5073,30 @@
                   <a:tcPr anchor="ctr" marL="73152" marR="73152">
                     <a:lnL w="9525" cap="flat" cmpd="sng" algn="ctr">
                       <a:solidFill>
-                        <a:srgbClr val="D1FAF7"/>
+                        <a:srgbClr val="D1FAE2"/>
                       </a:solidFill>
                       <a:prstDash val="solid"/>
                     </a:lnL>
                     <a:lnR w="9525" cap="flat" cmpd="sng" algn="ctr">
                       <a:solidFill>
-                        <a:srgbClr val="D1FAF7"/>
+                        <a:srgbClr val="D1FAE2"/>
                       </a:solidFill>
                       <a:prstDash val="solid"/>
                     </a:lnR>
                     <a:lnT w="9525" cap="flat" cmpd="sng" algn="ctr">
                       <a:solidFill>
-                        <a:srgbClr val="D1FAF7"/>
+                        <a:srgbClr val="D1FAE2"/>
                       </a:solidFill>
                       <a:prstDash val="solid"/>
                     </a:lnT>
                     <a:lnB w="9525" cap="flat" cmpd="sng" algn="ctr">
                       <a:solidFill>
-                        <a:srgbClr val="D1FAF7"/>
+                        <a:srgbClr val="D1FAE2"/>
                       </a:solidFill>
                       <a:prstDash val="solid"/>
                     </a:lnB>
                     <a:solidFill>
-                      <a:srgbClr val="EEFCFB"/>
+                      <a:srgbClr val="EAFDF2"/>
                     </a:solidFill>
                   </a:tcPr>
                 </a:tc>
@@ -4917,7 +5111,7 @@
                       <a:r>
                         <a:rPr sz="1400" b="0">
                           <a:solidFill>
-                            <a:srgbClr val="2B2B2B"/>
+                            <a:srgbClr val="26231F"/>
                           </a:solidFill>
                         </a:rPr>
                         <a:t/>
@@ -4927,25 +5121,25 @@
                   <a:tcPr anchor="ctr" marL="73152" marR="73152">
                     <a:lnL w="9525" cap="flat" cmpd="sng" algn="ctr">
                       <a:solidFill>
-                        <a:srgbClr val="D1FAF7"/>
+                        <a:srgbClr val="D1FAE2"/>
                       </a:solidFill>
                       <a:prstDash val="solid"/>
                     </a:lnL>
                     <a:lnR w="9525" cap="flat" cmpd="sng" algn="ctr">
                       <a:solidFill>
-                        <a:srgbClr val="D1FAF7"/>
+                        <a:srgbClr val="D1FAE2"/>
                       </a:solidFill>
                       <a:prstDash val="solid"/>
                     </a:lnR>
                     <a:lnT w="9525" cap="flat" cmpd="sng" algn="ctr">
                       <a:solidFill>
-                        <a:srgbClr val="D1FAF7"/>
+                        <a:srgbClr val="D1FAE2"/>
                       </a:solidFill>
                       <a:prstDash val="solid"/>
                     </a:lnT>
                     <a:lnB w="9525" cap="flat" cmpd="sng" algn="ctr">
                       <a:solidFill>
-                        <a:srgbClr val="D1FAF7"/>
+                        <a:srgbClr val="D1FAE2"/>
                       </a:solidFill>
                       <a:prstDash val="solid"/>
                     </a:lnB>
@@ -4963,7 +5157,7 @@
                       <a:r>
                         <a:rPr sz="1400" b="0">
                           <a:solidFill>
-                            <a:srgbClr val="2B2B2B"/>
+                            <a:srgbClr val="26231F"/>
                           </a:solidFill>
                         </a:rPr>
                         <a:t/>
@@ -4973,25 +5167,25 @@
                   <a:tcPr anchor="ctr" marL="73152" marR="73152">
                     <a:lnL w="9525" cap="flat" cmpd="sng" algn="ctr">
                       <a:solidFill>
-                        <a:srgbClr val="D1FAF7"/>
+                        <a:srgbClr val="D1FAE2"/>
                       </a:solidFill>
                       <a:prstDash val="solid"/>
                     </a:lnL>
                     <a:lnR w="9525" cap="flat" cmpd="sng" algn="ctr">
                       <a:solidFill>
-                        <a:srgbClr val="D1FAF7"/>
+                        <a:srgbClr val="D1FAE2"/>
                       </a:solidFill>
                       <a:prstDash val="solid"/>
                     </a:lnR>
                     <a:lnT w="9525" cap="flat" cmpd="sng" algn="ctr">
                       <a:solidFill>
-                        <a:srgbClr val="D1FAF7"/>
+                        <a:srgbClr val="D1FAE2"/>
                       </a:solidFill>
                       <a:prstDash val="solid"/>
                     </a:lnT>
                     <a:lnB w="9525" cap="flat" cmpd="sng" algn="ctr">
                       <a:solidFill>
-                        <a:srgbClr val="D1FAF7"/>
+                        <a:srgbClr val="D1FAE2"/>
                       </a:solidFill>
                       <a:prstDash val="solid"/>
                     </a:lnB>
@@ -5009,7 +5203,7 @@
                       <a:r>
                         <a:rPr sz="1400" b="0">
                           <a:solidFill>
-                            <a:srgbClr val="2B2B2B"/>
+                            <a:srgbClr val="26231F"/>
                           </a:solidFill>
                         </a:rPr>
                         <a:t/>
@@ -5019,25 +5213,25 @@
                   <a:tcPr anchor="ctr" marL="73152" marR="73152">
                     <a:lnL w="9525" cap="flat" cmpd="sng" algn="ctr">
                       <a:solidFill>
-                        <a:srgbClr val="D1FAF7"/>
+                        <a:srgbClr val="D1FAE2"/>
                       </a:solidFill>
                       <a:prstDash val="solid"/>
                     </a:lnL>
                     <a:lnR w="9525" cap="flat" cmpd="sng" algn="ctr">
                       <a:solidFill>
-                        <a:srgbClr val="D1FAF7"/>
+                        <a:srgbClr val="D1FAE2"/>
                       </a:solidFill>
                       <a:prstDash val="solid"/>
                     </a:lnR>
                     <a:lnT w="9525" cap="flat" cmpd="sng" algn="ctr">
                       <a:solidFill>
-                        <a:srgbClr val="D1FAF7"/>
+                        <a:srgbClr val="D1FAE2"/>
                       </a:solidFill>
                       <a:prstDash val="solid"/>
                     </a:lnT>
                     <a:lnB w="9525" cap="flat" cmpd="sng" algn="ctr">
                       <a:solidFill>
-                        <a:srgbClr val="D1FAF7"/>
+                        <a:srgbClr val="D1FAE2"/>
                       </a:solidFill>
                       <a:prstDash val="solid"/>
                     </a:lnB>
@@ -5055,7 +5249,7 @@
                       <a:r>
                         <a:rPr sz="1400" b="0">
                           <a:solidFill>
-                            <a:srgbClr val="2B2B2B"/>
+                            <a:srgbClr val="26231F"/>
                           </a:solidFill>
                         </a:rPr>
                         <a:t/>
@@ -5065,25 +5259,25 @@
                   <a:tcPr anchor="ctr" marL="73152" marR="73152">
                     <a:lnL w="9525" cap="flat" cmpd="sng" algn="ctr">
                       <a:solidFill>
-                        <a:srgbClr val="D1FAF7"/>
+                        <a:srgbClr val="D1FAE2"/>
                       </a:solidFill>
                       <a:prstDash val="solid"/>
                     </a:lnL>
                     <a:lnR w="9525" cap="flat" cmpd="sng" algn="ctr">
                       <a:solidFill>
-                        <a:srgbClr val="D1FAF7"/>
+                        <a:srgbClr val="D1FAE2"/>
                       </a:solidFill>
                       <a:prstDash val="solid"/>
                     </a:lnR>
                     <a:lnT w="9525" cap="flat" cmpd="sng" algn="ctr">
                       <a:solidFill>
-                        <a:srgbClr val="D1FAF7"/>
+                        <a:srgbClr val="D1FAE2"/>
                       </a:solidFill>
                       <a:prstDash val="solid"/>
                     </a:lnT>
                     <a:lnB w="9525" cap="flat" cmpd="sng" algn="ctr">
                       <a:solidFill>
-                        <a:srgbClr val="D1FAF7"/>
+                        <a:srgbClr val="D1FAE2"/>
                       </a:solidFill>
                       <a:prstDash val="solid"/>
                     </a:lnB>
@@ -5101,7 +5295,7 @@
                       <a:r>
                         <a:rPr sz="1400" b="0">
                           <a:solidFill>
-                            <a:srgbClr val="2B2B2B"/>
+                            <a:srgbClr val="26231F"/>
                           </a:solidFill>
                         </a:rPr>
                         <a:t/>
@@ -5111,25 +5305,25 @@
                   <a:tcPr anchor="ctr" marL="73152" marR="73152">
                     <a:lnL w="9525" cap="flat" cmpd="sng" algn="ctr">
                       <a:solidFill>
-                        <a:srgbClr val="D1FAF7"/>
+                        <a:srgbClr val="D1FAE2"/>
                       </a:solidFill>
                       <a:prstDash val="solid"/>
                     </a:lnL>
                     <a:lnR w="9525" cap="flat" cmpd="sng" algn="ctr">
                       <a:solidFill>
-                        <a:srgbClr val="D1FAF7"/>
+                        <a:srgbClr val="D1FAE2"/>
                       </a:solidFill>
                       <a:prstDash val="solid"/>
                     </a:lnR>
                     <a:lnT w="9525" cap="flat" cmpd="sng" algn="ctr">
                       <a:solidFill>
-                        <a:srgbClr val="D1FAF7"/>
+                        <a:srgbClr val="D1FAE2"/>
                       </a:solidFill>
                       <a:prstDash val="solid"/>
                     </a:lnT>
                     <a:lnB w="9525" cap="flat" cmpd="sng" algn="ctr">
                       <a:solidFill>
-                        <a:srgbClr val="D1FAF7"/>
+                        <a:srgbClr val="D1FAE2"/>
                       </a:solidFill>
                       <a:prstDash val="solid"/>
                     </a:lnB>
@@ -5149,7 +5343,7 @@
                       <a:r>
                         <a:rPr sz="1400" b="0">
                           <a:solidFill>
-                            <a:srgbClr val="2B2B2B"/>
+                            <a:srgbClr val="26231F"/>
                           </a:solidFill>
                         </a:rPr>
                         <a:t/>
@@ -5159,30 +5353,30 @@
                   <a:tcPr anchor="ctr" marL="73152" marR="73152">
                     <a:lnL w="9525" cap="flat" cmpd="sng" algn="ctr">
                       <a:solidFill>
-                        <a:srgbClr val="D1FAF7"/>
+                        <a:srgbClr val="D1FAE2"/>
                       </a:solidFill>
                       <a:prstDash val="solid"/>
                     </a:lnL>
                     <a:lnR w="9525" cap="flat" cmpd="sng" algn="ctr">
                       <a:solidFill>
-                        <a:srgbClr val="D1FAF7"/>
+                        <a:srgbClr val="D1FAE2"/>
                       </a:solidFill>
                       <a:prstDash val="solid"/>
                     </a:lnR>
                     <a:lnT w="9525" cap="flat" cmpd="sng" algn="ctr">
                       <a:solidFill>
-                        <a:srgbClr val="D1FAF7"/>
+                        <a:srgbClr val="D1FAE2"/>
                       </a:solidFill>
                       <a:prstDash val="solid"/>
                     </a:lnT>
                     <a:lnB w="9525" cap="flat" cmpd="sng" algn="ctr">
                       <a:solidFill>
-                        <a:srgbClr val="D1FAF7"/>
+                        <a:srgbClr val="D1FAE2"/>
                       </a:solidFill>
                       <a:prstDash val="solid"/>
                     </a:lnB>
                     <a:solidFill>
-                      <a:srgbClr val="EEFCFB"/>
+                      <a:srgbClr val="EAFDF2"/>
                     </a:solidFill>
                   </a:tcPr>
                 </a:tc>
@@ -5195,7 +5389,7 @@
                       <a:r>
                         <a:rPr sz="1400" b="0">
                           <a:solidFill>
-                            <a:srgbClr val="2B2B2B"/>
+                            <a:srgbClr val="26231F"/>
                           </a:solidFill>
                         </a:rPr>
                         <a:t/>
@@ -5205,30 +5399,30 @@
                   <a:tcPr anchor="ctr" marL="73152" marR="73152">
                     <a:lnL w="9525" cap="flat" cmpd="sng" algn="ctr">
                       <a:solidFill>
-                        <a:srgbClr val="D1FAF7"/>
+                        <a:srgbClr val="D1FAE2"/>
                       </a:solidFill>
                       <a:prstDash val="solid"/>
                     </a:lnL>
                     <a:lnR w="9525" cap="flat" cmpd="sng" algn="ctr">
                       <a:solidFill>
-                        <a:srgbClr val="D1FAF7"/>
+                        <a:srgbClr val="D1FAE2"/>
                       </a:solidFill>
                       <a:prstDash val="solid"/>
                     </a:lnR>
                     <a:lnT w="9525" cap="flat" cmpd="sng" algn="ctr">
                       <a:solidFill>
-                        <a:srgbClr val="D1FAF7"/>
+                        <a:srgbClr val="D1FAE2"/>
                       </a:solidFill>
                       <a:prstDash val="solid"/>
                     </a:lnT>
                     <a:lnB w="9525" cap="flat" cmpd="sng" algn="ctr">
                       <a:solidFill>
-                        <a:srgbClr val="D1FAF7"/>
+                        <a:srgbClr val="D1FAE2"/>
                       </a:solidFill>
                       <a:prstDash val="solid"/>
                     </a:lnB>
                     <a:solidFill>
-                      <a:srgbClr val="EEFCFB"/>
+                      <a:srgbClr val="EAFDF2"/>
                     </a:solidFill>
                   </a:tcPr>
                 </a:tc>
@@ -5241,7 +5435,7 @@
                       <a:r>
                         <a:rPr sz="1400" b="0">
                           <a:solidFill>
-                            <a:srgbClr val="2B2B2B"/>
+                            <a:srgbClr val="26231F"/>
                           </a:solidFill>
                         </a:rPr>
                         <a:t/>
@@ -5251,30 +5445,30 @@
                   <a:tcPr anchor="ctr" marL="73152" marR="73152">
                     <a:lnL w="9525" cap="flat" cmpd="sng" algn="ctr">
                       <a:solidFill>
-                        <a:srgbClr val="D1FAF7"/>
+                        <a:srgbClr val="D1FAE2"/>
                       </a:solidFill>
                       <a:prstDash val="solid"/>
                     </a:lnL>
                     <a:lnR w="9525" cap="flat" cmpd="sng" algn="ctr">
                       <a:solidFill>
-                        <a:srgbClr val="D1FAF7"/>
+                        <a:srgbClr val="D1FAE2"/>
                       </a:solidFill>
                       <a:prstDash val="solid"/>
                     </a:lnR>
                     <a:lnT w="9525" cap="flat" cmpd="sng" algn="ctr">
                       <a:solidFill>
-                        <a:srgbClr val="D1FAF7"/>
+                        <a:srgbClr val="D1FAE2"/>
                       </a:solidFill>
                       <a:prstDash val="solid"/>
                     </a:lnT>
                     <a:lnB w="9525" cap="flat" cmpd="sng" algn="ctr">
                       <a:solidFill>
-                        <a:srgbClr val="D1FAF7"/>
+                        <a:srgbClr val="D1FAE2"/>
                       </a:solidFill>
                       <a:prstDash val="solid"/>
                     </a:lnB>
                     <a:solidFill>
-                      <a:srgbClr val="EEFCFB"/>
+                      <a:srgbClr val="EAFDF2"/>
                     </a:solidFill>
                   </a:tcPr>
                 </a:tc>
@@ -5287,7 +5481,7 @@
                       <a:r>
                         <a:rPr sz="1400" b="0">
                           <a:solidFill>
-                            <a:srgbClr val="2B2B2B"/>
+                            <a:srgbClr val="26231F"/>
                           </a:solidFill>
                         </a:rPr>
                         <a:t/>
@@ -5297,30 +5491,30 @@
                   <a:tcPr anchor="ctr" marL="73152" marR="73152">
                     <a:lnL w="9525" cap="flat" cmpd="sng" algn="ctr">
                       <a:solidFill>
-                        <a:srgbClr val="D1FAF7"/>
+                        <a:srgbClr val="D1FAE2"/>
                       </a:solidFill>
                       <a:prstDash val="solid"/>
                     </a:lnL>
                     <a:lnR w="9525" cap="flat" cmpd="sng" algn="ctr">
                       <a:solidFill>
-                        <a:srgbClr val="D1FAF7"/>
+                        <a:srgbClr val="D1FAE2"/>
                       </a:solidFill>
                       <a:prstDash val="solid"/>
                     </a:lnR>
                     <a:lnT w="9525" cap="flat" cmpd="sng" algn="ctr">
                       <a:solidFill>
-                        <a:srgbClr val="D1FAF7"/>
+                        <a:srgbClr val="D1FAE2"/>
                       </a:solidFill>
                       <a:prstDash val="solid"/>
                     </a:lnT>
                     <a:lnB w="9525" cap="flat" cmpd="sng" algn="ctr">
                       <a:solidFill>
-                        <a:srgbClr val="D1FAF7"/>
+                        <a:srgbClr val="D1FAE2"/>
                       </a:solidFill>
                       <a:prstDash val="solid"/>
                     </a:lnB>
                     <a:solidFill>
-                      <a:srgbClr val="EEFCFB"/>
+                      <a:srgbClr val="EAFDF2"/>
                     </a:solidFill>
                   </a:tcPr>
                 </a:tc>
@@ -5333,7 +5527,7 @@
                       <a:r>
                         <a:rPr sz="1400" b="0">
                           <a:solidFill>
-                            <a:srgbClr val="2B2B2B"/>
+                            <a:srgbClr val="26231F"/>
                           </a:solidFill>
                         </a:rPr>
                         <a:t/>
@@ -5343,30 +5537,30 @@
                   <a:tcPr anchor="ctr" marL="73152" marR="73152">
                     <a:lnL w="9525" cap="flat" cmpd="sng" algn="ctr">
                       <a:solidFill>
-                        <a:srgbClr val="D1FAF7"/>
+                        <a:srgbClr val="D1FAE2"/>
                       </a:solidFill>
                       <a:prstDash val="solid"/>
                     </a:lnL>
                     <a:lnR w="9525" cap="flat" cmpd="sng" algn="ctr">
                       <a:solidFill>
-                        <a:srgbClr val="D1FAF7"/>
+                        <a:srgbClr val="D1FAE2"/>
                       </a:solidFill>
                       <a:prstDash val="solid"/>
                     </a:lnR>
                     <a:lnT w="9525" cap="flat" cmpd="sng" algn="ctr">
                       <a:solidFill>
-                        <a:srgbClr val="D1FAF7"/>
+                        <a:srgbClr val="D1FAE2"/>
                       </a:solidFill>
                       <a:prstDash val="solid"/>
                     </a:lnT>
                     <a:lnB w="9525" cap="flat" cmpd="sng" algn="ctr">
                       <a:solidFill>
-                        <a:srgbClr val="D1FAF7"/>
+                        <a:srgbClr val="D1FAE2"/>
                       </a:solidFill>
                       <a:prstDash val="solid"/>
                     </a:lnB>
                     <a:solidFill>
-                      <a:srgbClr val="EEFCFB"/>
+                      <a:srgbClr val="EAFDF2"/>
                     </a:solidFill>
                   </a:tcPr>
                 </a:tc>
@@ -5381,7 +5575,7 @@
                       <a:r>
                         <a:rPr sz="1400" b="0">
                           <a:solidFill>
-                            <a:srgbClr val="2B2B2B"/>
+                            <a:srgbClr val="26231F"/>
                           </a:solidFill>
                         </a:rPr>
                         <a:t/>
@@ -5391,25 +5585,25 @@
                   <a:tcPr anchor="ctr" marL="73152" marR="73152">
                     <a:lnL w="9525" cap="flat" cmpd="sng" algn="ctr">
                       <a:solidFill>
-                        <a:srgbClr val="D1FAF7"/>
+                        <a:srgbClr val="D1FAE2"/>
                       </a:solidFill>
                       <a:prstDash val="solid"/>
                     </a:lnL>
                     <a:lnR w="9525" cap="flat" cmpd="sng" algn="ctr">
                       <a:solidFill>
-                        <a:srgbClr val="D1FAF7"/>
+                        <a:srgbClr val="D1FAE2"/>
                       </a:solidFill>
                       <a:prstDash val="solid"/>
                     </a:lnR>
                     <a:lnT w="9525" cap="flat" cmpd="sng" algn="ctr">
                       <a:solidFill>
-                        <a:srgbClr val="D1FAF7"/>
+                        <a:srgbClr val="D1FAE2"/>
                       </a:solidFill>
                       <a:prstDash val="solid"/>
                     </a:lnT>
                     <a:lnB w="9525" cap="flat" cmpd="sng" algn="ctr">
                       <a:solidFill>
-                        <a:srgbClr val="D1FAF7"/>
+                        <a:srgbClr val="D1FAE2"/>
                       </a:solidFill>
                       <a:prstDash val="solid"/>
                     </a:lnB>
@@ -5427,7 +5621,7 @@
                       <a:r>
                         <a:rPr sz="1400" b="0">
                           <a:solidFill>
-                            <a:srgbClr val="2B2B2B"/>
+                            <a:srgbClr val="26231F"/>
                           </a:solidFill>
                         </a:rPr>
                         <a:t/>
@@ -5437,25 +5631,25 @@
                   <a:tcPr anchor="ctr" marL="73152" marR="73152">
                     <a:lnL w="9525" cap="flat" cmpd="sng" algn="ctr">
                       <a:solidFill>
-                        <a:srgbClr val="D1FAF7"/>
+                        <a:srgbClr val="D1FAE2"/>
                       </a:solidFill>
                       <a:prstDash val="solid"/>
                     </a:lnL>
                     <a:lnR w="9525" cap="flat" cmpd="sng" algn="ctr">
                       <a:solidFill>
-                        <a:srgbClr val="D1FAF7"/>
+                        <a:srgbClr val="D1FAE2"/>
                       </a:solidFill>
                       <a:prstDash val="solid"/>
                     </a:lnR>
                     <a:lnT w="9525" cap="flat" cmpd="sng" algn="ctr">
                       <a:solidFill>
-                        <a:srgbClr val="D1FAF7"/>
+                        <a:srgbClr val="D1FAE2"/>
                       </a:solidFill>
                       <a:prstDash val="solid"/>
                     </a:lnT>
                     <a:lnB w="9525" cap="flat" cmpd="sng" algn="ctr">
                       <a:solidFill>
-                        <a:srgbClr val="D1FAF7"/>
+                        <a:srgbClr val="D1FAE2"/>
                       </a:solidFill>
                       <a:prstDash val="solid"/>
                     </a:lnB>
@@ -5473,7 +5667,7 @@
                       <a:r>
                         <a:rPr sz="1400" b="0">
                           <a:solidFill>
-                            <a:srgbClr val="2B2B2B"/>
+                            <a:srgbClr val="26231F"/>
                           </a:solidFill>
                         </a:rPr>
                         <a:t/>
@@ -5483,25 +5677,25 @@
                   <a:tcPr anchor="ctr" marL="73152" marR="73152">
                     <a:lnL w="9525" cap="flat" cmpd="sng" algn="ctr">
                       <a:solidFill>
-                        <a:srgbClr val="D1FAF7"/>
+                        <a:srgbClr val="D1FAE2"/>
                       </a:solidFill>
                       <a:prstDash val="solid"/>
                     </a:lnL>
                     <a:lnR w="9525" cap="flat" cmpd="sng" algn="ctr">
                       <a:solidFill>
-                        <a:srgbClr val="D1FAF7"/>
+                        <a:srgbClr val="D1FAE2"/>
                       </a:solidFill>
                       <a:prstDash val="solid"/>
                     </a:lnR>
                     <a:lnT w="9525" cap="flat" cmpd="sng" algn="ctr">
                       <a:solidFill>
-                        <a:srgbClr val="D1FAF7"/>
+                        <a:srgbClr val="D1FAE2"/>
                       </a:solidFill>
                       <a:prstDash val="solid"/>
                     </a:lnT>
                     <a:lnB w="9525" cap="flat" cmpd="sng" algn="ctr">
                       <a:solidFill>
-                        <a:srgbClr val="D1FAF7"/>
+                        <a:srgbClr val="D1FAE2"/>
                       </a:solidFill>
                       <a:prstDash val="solid"/>
                     </a:lnB>
@@ -5519,7 +5713,7 @@
                       <a:r>
                         <a:rPr sz="1400" b="0">
                           <a:solidFill>
-                            <a:srgbClr val="2B2B2B"/>
+                            <a:srgbClr val="26231F"/>
                           </a:solidFill>
                         </a:rPr>
                         <a:t/>
@@ -5529,25 +5723,25 @@
                   <a:tcPr anchor="ctr" marL="73152" marR="73152">
                     <a:lnL w="9525" cap="flat" cmpd="sng" algn="ctr">
                       <a:solidFill>
-                        <a:srgbClr val="D1FAF7"/>
+                        <a:srgbClr val="D1FAE2"/>
                       </a:solidFill>
                       <a:prstDash val="solid"/>
                     </a:lnL>
                     <a:lnR w="9525" cap="flat" cmpd="sng" algn="ctr">
                       <a:solidFill>
-                        <a:srgbClr val="D1FAF7"/>
+                        <a:srgbClr val="D1FAE2"/>
                       </a:solidFill>
                       <a:prstDash val="solid"/>
                     </a:lnR>
                     <a:lnT w="9525" cap="flat" cmpd="sng" algn="ctr">
                       <a:solidFill>
-                        <a:srgbClr val="D1FAF7"/>
+                        <a:srgbClr val="D1FAE2"/>
                       </a:solidFill>
                       <a:prstDash val="solid"/>
                     </a:lnT>
                     <a:lnB w="9525" cap="flat" cmpd="sng" algn="ctr">
                       <a:solidFill>
-                        <a:srgbClr val="D1FAF7"/>
+                        <a:srgbClr val="D1FAE2"/>
                       </a:solidFill>
                       <a:prstDash val="solid"/>
                     </a:lnB>
@@ -5565,7 +5759,7 @@
                       <a:r>
                         <a:rPr sz="1400" b="0">
                           <a:solidFill>
-                            <a:srgbClr val="2B2B2B"/>
+                            <a:srgbClr val="26231F"/>
                           </a:solidFill>
                         </a:rPr>
                         <a:t/>
@@ -5575,25 +5769,25 @@
                   <a:tcPr anchor="ctr" marL="73152" marR="73152">
                     <a:lnL w="9525" cap="flat" cmpd="sng" algn="ctr">
                       <a:solidFill>
-                        <a:srgbClr val="D1FAF7"/>
+                        <a:srgbClr val="D1FAE2"/>
                       </a:solidFill>
                       <a:prstDash val="solid"/>
                     </a:lnL>
                     <a:lnR w="9525" cap="flat" cmpd="sng" algn="ctr">
                       <a:solidFill>
-                        <a:srgbClr val="D1FAF7"/>
+                        <a:srgbClr val="D1FAE2"/>
                       </a:solidFill>
                       <a:prstDash val="solid"/>
                     </a:lnR>
                     <a:lnT w="9525" cap="flat" cmpd="sng" algn="ctr">
                       <a:solidFill>
-                        <a:srgbClr val="D1FAF7"/>
+                        <a:srgbClr val="D1FAE2"/>
                       </a:solidFill>
                       <a:prstDash val="solid"/>
                     </a:lnT>
                     <a:lnB w="9525" cap="flat" cmpd="sng" algn="ctr">
                       <a:solidFill>
-                        <a:srgbClr val="D1FAF7"/>
+                        <a:srgbClr val="D1FAE2"/>
                       </a:solidFill>
                       <a:prstDash val="solid"/>
                     </a:lnB>
@@ -5613,7 +5807,7 @@
                       <a:r>
                         <a:rPr sz="1400" b="0">
                           <a:solidFill>
-                            <a:srgbClr val="2B2B2B"/>
+                            <a:srgbClr val="26231F"/>
                           </a:solidFill>
                         </a:rPr>
                         <a:t/>
@@ -5623,30 +5817,30 @@
                   <a:tcPr anchor="ctr" marL="73152" marR="73152">
                     <a:lnL w="9525" cap="flat" cmpd="sng" algn="ctr">
                       <a:solidFill>
-                        <a:srgbClr val="D1FAF7"/>
+                        <a:srgbClr val="D1FAE2"/>
                       </a:solidFill>
                       <a:prstDash val="solid"/>
                     </a:lnL>
                     <a:lnR w="9525" cap="flat" cmpd="sng" algn="ctr">
                       <a:solidFill>
-                        <a:srgbClr val="D1FAF7"/>
+                        <a:srgbClr val="D1FAE2"/>
                       </a:solidFill>
                       <a:prstDash val="solid"/>
                     </a:lnR>
                     <a:lnT w="9525" cap="flat" cmpd="sng" algn="ctr">
                       <a:solidFill>
-                        <a:srgbClr val="D1FAF7"/>
+                        <a:srgbClr val="D1FAE2"/>
                       </a:solidFill>
                       <a:prstDash val="solid"/>
                     </a:lnT>
                     <a:lnB w="9525" cap="flat" cmpd="sng" algn="ctr">
                       <a:solidFill>
-                        <a:srgbClr val="D1FAF7"/>
+                        <a:srgbClr val="D1FAE2"/>
                       </a:solidFill>
                       <a:prstDash val="solid"/>
                     </a:lnB>
                     <a:solidFill>
-                      <a:srgbClr val="EEFCFB"/>
+                      <a:srgbClr val="EAFDF2"/>
                     </a:solidFill>
                   </a:tcPr>
                 </a:tc>
@@ -5659,7 +5853,7 @@
                       <a:r>
                         <a:rPr sz="1400" b="0">
                           <a:solidFill>
-                            <a:srgbClr val="2B2B2B"/>
+                            <a:srgbClr val="26231F"/>
                           </a:solidFill>
                         </a:rPr>
                         <a:t/>
@@ -5669,30 +5863,30 @@
                   <a:tcPr anchor="ctr" marL="73152" marR="73152">
                     <a:lnL w="9525" cap="flat" cmpd="sng" algn="ctr">
                       <a:solidFill>
-                        <a:srgbClr val="D1FAF7"/>
+                        <a:srgbClr val="D1FAE2"/>
                       </a:solidFill>
                       <a:prstDash val="solid"/>
                     </a:lnL>
                     <a:lnR w="9525" cap="flat" cmpd="sng" algn="ctr">
                       <a:solidFill>
-                        <a:srgbClr val="D1FAF7"/>
+                        <a:srgbClr val="D1FAE2"/>
                       </a:solidFill>
                       <a:prstDash val="solid"/>
                     </a:lnR>
                     <a:lnT w="9525" cap="flat" cmpd="sng" algn="ctr">
                       <a:solidFill>
-                        <a:srgbClr val="D1FAF7"/>
+                        <a:srgbClr val="D1FAE2"/>
                       </a:solidFill>
                       <a:prstDash val="solid"/>
                     </a:lnT>
                     <a:lnB w="9525" cap="flat" cmpd="sng" algn="ctr">
                       <a:solidFill>
-                        <a:srgbClr val="D1FAF7"/>
+                        <a:srgbClr val="D1FAE2"/>
                       </a:solidFill>
                       <a:prstDash val="solid"/>
                     </a:lnB>
                     <a:solidFill>
-                      <a:srgbClr val="EEFCFB"/>
+                      <a:srgbClr val="EAFDF2"/>
                     </a:solidFill>
                   </a:tcPr>
                 </a:tc>
@@ -5705,7 +5899,7 @@
                       <a:r>
                         <a:rPr sz="1400" b="0">
                           <a:solidFill>
-                            <a:srgbClr val="2B2B2B"/>
+                            <a:srgbClr val="26231F"/>
                           </a:solidFill>
                         </a:rPr>
                         <a:t/>
@@ -5715,30 +5909,30 @@
                   <a:tcPr anchor="ctr" marL="73152" marR="73152">
                     <a:lnL w="9525" cap="flat" cmpd="sng" algn="ctr">
                       <a:solidFill>
-                        <a:srgbClr val="D1FAF7"/>
+                        <a:srgbClr val="D1FAE2"/>
                       </a:solidFill>
                       <a:prstDash val="solid"/>
                     </a:lnL>
                     <a:lnR w="9525" cap="flat" cmpd="sng" algn="ctr">
                       <a:solidFill>
-                        <a:srgbClr val="D1FAF7"/>
+                        <a:srgbClr val="D1FAE2"/>
                       </a:solidFill>
                       <a:prstDash val="solid"/>
                     </a:lnR>
                     <a:lnT w="9525" cap="flat" cmpd="sng" algn="ctr">
                       <a:solidFill>
-                        <a:srgbClr val="D1FAF7"/>
+                        <a:srgbClr val="D1FAE2"/>
                       </a:solidFill>
                       <a:prstDash val="solid"/>
                     </a:lnT>
                     <a:lnB w="9525" cap="flat" cmpd="sng" algn="ctr">
                       <a:solidFill>
-                        <a:srgbClr val="D1FAF7"/>
+                        <a:srgbClr val="D1FAE2"/>
                       </a:solidFill>
                       <a:prstDash val="solid"/>
                     </a:lnB>
                     <a:solidFill>
-                      <a:srgbClr val="EEFCFB"/>
+                      <a:srgbClr val="EAFDF2"/>
                     </a:solidFill>
                   </a:tcPr>
                 </a:tc>
@@ -5751,7 +5945,7 @@
                       <a:r>
                         <a:rPr sz="1400" b="0">
                           <a:solidFill>
-                            <a:srgbClr val="2B2B2B"/>
+                            <a:srgbClr val="26231F"/>
                           </a:solidFill>
                         </a:rPr>
                         <a:t/>
@@ -5761,30 +5955,30 @@
                   <a:tcPr anchor="ctr" marL="73152" marR="73152">
                     <a:lnL w="9525" cap="flat" cmpd="sng" algn="ctr">
                       <a:solidFill>
-                        <a:srgbClr val="D1FAF7"/>
+                        <a:srgbClr val="D1FAE2"/>
                       </a:solidFill>
                       <a:prstDash val="solid"/>
                     </a:lnL>
                     <a:lnR w="9525" cap="flat" cmpd="sng" algn="ctr">
                       <a:solidFill>
-                        <a:srgbClr val="D1FAF7"/>
+                        <a:srgbClr val="D1FAE2"/>
                       </a:solidFill>
                       <a:prstDash val="solid"/>
                     </a:lnR>
                     <a:lnT w="9525" cap="flat" cmpd="sng" algn="ctr">
                       <a:solidFill>
-                        <a:srgbClr val="D1FAF7"/>
+                        <a:srgbClr val="D1FAE2"/>
                       </a:solidFill>
                       <a:prstDash val="solid"/>
                     </a:lnT>
                     <a:lnB w="9525" cap="flat" cmpd="sng" algn="ctr">
                       <a:solidFill>
-                        <a:srgbClr val="D1FAF7"/>
+                        <a:srgbClr val="D1FAE2"/>
                       </a:solidFill>
                       <a:prstDash val="solid"/>
                     </a:lnB>
                     <a:solidFill>
-                      <a:srgbClr val="EEFCFB"/>
+                      <a:srgbClr val="EAFDF2"/>
                     </a:solidFill>
                   </a:tcPr>
                 </a:tc>
@@ -5797,7 +5991,7 @@
                       <a:r>
                         <a:rPr sz="1400" b="0">
                           <a:solidFill>
-                            <a:srgbClr val="2B2B2B"/>
+                            <a:srgbClr val="26231F"/>
                           </a:solidFill>
                         </a:rPr>
                         <a:t/>
@@ -5807,30 +6001,30 @@
                   <a:tcPr anchor="ctr" marL="73152" marR="73152">
                     <a:lnL w="9525" cap="flat" cmpd="sng" algn="ctr">
                       <a:solidFill>
-                        <a:srgbClr val="D1FAF7"/>
+                        <a:srgbClr val="D1FAE2"/>
                       </a:solidFill>
                       <a:prstDash val="solid"/>
                     </a:lnL>
                     <a:lnR w="9525" cap="flat" cmpd="sng" algn="ctr">
                       <a:solidFill>
-                        <a:srgbClr val="D1FAF7"/>
+                        <a:srgbClr val="D1FAE2"/>
                       </a:solidFill>
                       <a:prstDash val="solid"/>
                     </a:lnR>
                     <a:lnT w="9525" cap="flat" cmpd="sng" algn="ctr">
                       <a:solidFill>
-                        <a:srgbClr val="D1FAF7"/>
+                        <a:srgbClr val="D1FAE2"/>
                       </a:solidFill>
                       <a:prstDash val="solid"/>
                     </a:lnT>
                     <a:lnB w="9525" cap="flat" cmpd="sng" algn="ctr">
                       <a:solidFill>
-                        <a:srgbClr val="D1FAF7"/>
+                        <a:srgbClr val="D1FAE2"/>
                       </a:solidFill>
                       <a:prstDash val="solid"/>
                     </a:lnB>
                     <a:solidFill>
-                      <a:srgbClr val="EEFCFB"/>
+                      <a:srgbClr val="EAFDF2"/>
                     </a:solidFill>
                   </a:tcPr>
                 </a:tc>
@@ -5853,7 +6047,7 @@
     <p:bg>
       <p:bgPr>
         <a:solidFill>
-          <a:srgbClr val="EEFCFB"/>
+          <a:srgbClr val="EAFDF2"/>
         </a:solidFill>
         <a:effectLst/>
       </p:bgPr>
@@ -5873,46 +6067,84 @@
         </p:nvSpPr>
         <p:spPr>
           <a:xfrm>
-            <a:off x="256032" y="256032"/>
-            <a:ext cx="11679631" cy="6345936"/>
+            <a:off x="640080" y="566928"/>
+            <a:ext cx="10911535" cy="10972"/>
+          </a:xfrm>
+          <a:prstGeom prst="rect">
+            <a:avLst/>
+          </a:prstGeom>
+          <a:solidFill>
+            <a:srgbClr val="26231F"/>
+          </a:solidFill>
+          <a:ln>
+            <a:noFill/>
+          </a:ln>
+        </p:spPr>
+        <p:txBody>
+          <a:bodyPr rtlCol="0" anchor="ctr"/>
+          <a:lstStyle/>
+          <a:p>
+            <a:pPr algn="ctr"/>
+          </a:p>
+        </p:txBody>
+      </p:sp>
+      <p:sp>
+        <p:nvSpPr>
+          <p:cNvPr id="4" name="상단 라벨"/>
+          <p:cNvSpPr txBox="1"/>
+          <p:nvPr/>
+        </p:nvSpPr>
+        <p:spPr>
+          <a:xfrm>
+            <a:off x="640080" y="237744"/>
+            <a:ext cx="5486400" cy="274320"/>
           </a:xfrm>
           <a:prstGeom prst="rect">
             <a:avLst/>
           </a:prstGeom>
           <a:noFill/>
-          <a:ln w="28575">
-            <a:solidFill>
-              <a:srgbClr val="26C5B8"/>
-            </a:solidFill>
-          </a:ln>
-        </p:spPr>
-        <p:txBody>
-          <a:bodyPr rtlCol="0" anchor="ctr"/>
-          <a:lstStyle/>
-          <a:p>
-            <a:pPr algn="ctr"/>
-          </a:p>
-        </p:txBody>
-      </p:sp>
-      <p:sp>
-        <p:nvSpPr>
-          <p:cNvPr id="4" name="장식"/>
+        </p:spPr>
+        <p:txBody>
+          <a:bodyPr wrap="square" lIns="54864" rIns="54864" tIns="27432" bIns="27432" anchor="ctr">
+            <a:noAutofit/>
+          </a:bodyPr>
+          <a:lstStyle/>
+          <a:p>
+            <a:pPr algn="l">
+              <a:lnSpc>
+                <a:spcPct val="115000"/>
+              </a:lnSpc>
+            </a:pPr>
+            <a:r>
+              <a:rPr sz="900" b="1" i="0" spc="250">
+                <a:solidFill>
+                  <a:srgbClr val="26231F"/>
+                </a:solidFill>
+              </a:rPr>
+              <a:t>INSURANCE CHECK</a:t>
+            </a:r>
+          </a:p>
+        </p:txBody>
+      </p:sp>
+      <p:sp>
+        <p:nvSpPr>
+          <p:cNvPr id="5" name="포인트"/>
           <p:cNvSpPr/>
           <p:nvPr/>
         </p:nvSpPr>
         <p:spPr>
           <a:xfrm>
-            <a:off x="384048" y="384048"/>
-            <a:ext cx="11423599" cy="6089904"/>
-          </a:xfrm>
-          <a:prstGeom prst="rect">
+            <a:off x="11204143" y="246888"/>
+            <a:ext cx="237744" cy="237744"/>
+          </a:xfrm>
+          <a:prstGeom prst="round2SameRect">
             <a:avLst/>
           </a:prstGeom>
-          <a:noFill/>
-          <a:ln w="9525">
-            <a:solidFill>
-              <a:srgbClr val="D1FAF7"/>
-            </a:solidFill>
+          <a:solidFill>
+            <a:srgbClr val="7BEAA9"/>
+          </a:solidFill>
+          <a:ln>
+            <a:noFill/>
           </a:ln>
         </p:spPr>
         <p:txBody>
@@ -5935,8 +6167,8 @@
         </p:nvSpPr>
         <p:spPr>
           <a:xfrm>
-            <a:off x="822960" y="548640"/>
-            <a:ext cx="9265615" cy="822960"/>
+            <a:off x="640080" y="731520"/>
+            <a:ext cx="10911535" cy="822960"/>
           </a:xfrm>
         </p:spPr>
         <p:txBody>
@@ -5953,7 +6185,7 @@
             <a:r>
               <a:rPr sz="3000" b="1" i="0">
                 <a:solidFill>
-                  <a:srgbClr val="115F59"/>
+                  <a:srgbClr val="26231F"/>
                 </a:solidFill>
               </a:rPr>
               <a:t>보장 항목 체크</a:t>
@@ -5963,15 +6195,15 @@
       </p:sp>
       <p:graphicFrame>
         <p:nvGraphicFramePr>
-          <p:cNvPr id="5" name="표"/>
+          <p:cNvPr id="6" name="표"/>
           <p:cNvGraphicFramePr>
             <a:graphicFrameLocks noGrp="1"/>
           </p:cNvGraphicFramePr>
           <p:nvPr/>
         </p:nvGraphicFramePr>
         <p:xfrm>
-          <a:off x="822960" y="1554480"/>
-          <a:ext cx="10545774" cy="4773168"/>
+          <a:off x="640080" y="1783080"/>
+          <a:ext cx="10911534" cy="4773168"/>
         </p:xfrm>
         <a:graphic>
           <a:graphicData uri="http://schemas.openxmlformats.org/drawingml/2006/table">
@@ -5981,9 +6213,9 @@
               </a:tblPr>
               <a:tblGrid>
                 <a:gridCol w="3657600"/>
-                <a:gridCol w="2296058"/>
-                <a:gridCol w="2296058"/>
-                <a:gridCol w="2296058"/>
+                <a:gridCol w="2417978"/>
+                <a:gridCol w="2417978"/>
+                <a:gridCol w="2417978"/>
               </a:tblGrid>
               <a:tr h="530352">
                 <a:tc>
@@ -5995,7 +6227,7 @@
                       <a:r>
                         <a:rPr sz="1400" b="1">
                           <a:solidFill>
-                            <a:srgbClr val="FFFFFF"/>
+                            <a:srgbClr val="26231F"/>
                           </a:solidFill>
                         </a:rPr>
                         <a:t>보장 항목</a:t>
@@ -6005,30 +6237,30 @@
                   <a:tcPr anchor="ctr" marL="73152" marR="73152">
                     <a:lnL w="9525" cap="flat" cmpd="sng" algn="ctr">
                       <a:solidFill>
-                        <a:srgbClr val="26C5B8"/>
+                        <a:srgbClr val="7BEAA9"/>
                       </a:solidFill>
                       <a:prstDash val="solid"/>
                     </a:lnL>
                     <a:lnR w="9525" cap="flat" cmpd="sng" algn="ctr">
                       <a:solidFill>
-                        <a:srgbClr val="26C5B8"/>
+                        <a:srgbClr val="7BEAA9"/>
                       </a:solidFill>
                       <a:prstDash val="solid"/>
                     </a:lnR>
                     <a:lnT w="9525" cap="flat" cmpd="sng" algn="ctr">
                       <a:solidFill>
-                        <a:srgbClr val="26C5B8"/>
+                        <a:srgbClr val="7BEAA9"/>
                       </a:solidFill>
                       <a:prstDash val="solid"/>
                     </a:lnT>
                     <a:lnB w="9525" cap="flat" cmpd="sng" algn="ctr">
                       <a:solidFill>
-                        <a:srgbClr val="26C5B8"/>
+                        <a:srgbClr val="7BEAA9"/>
                       </a:solidFill>
                       <a:prstDash val="solid"/>
                     </a:lnB>
                     <a:solidFill>
-                      <a:srgbClr val="26C5B8"/>
+                      <a:srgbClr val="7BEAA9"/>
                     </a:solidFill>
                   </a:tcPr>
                 </a:tc>
@@ -6041,7 +6273,7 @@
                       <a:r>
                         <a:rPr sz="1400" b="1">
                           <a:solidFill>
-                            <a:srgbClr val="FFFFFF"/>
+                            <a:srgbClr val="26231F"/>
                           </a:solidFill>
                         </a:rPr>
                         <a:t>가입 확인</a:t>
@@ -6051,30 +6283,30 @@
                   <a:tcPr anchor="ctr" marL="73152" marR="73152">
                     <a:lnL w="9525" cap="flat" cmpd="sng" algn="ctr">
                       <a:solidFill>
-                        <a:srgbClr val="26C5B8"/>
+                        <a:srgbClr val="7BEAA9"/>
                       </a:solidFill>
                       <a:prstDash val="solid"/>
                     </a:lnL>
                     <a:lnR w="9525" cap="flat" cmpd="sng" algn="ctr">
                       <a:solidFill>
-                        <a:srgbClr val="26C5B8"/>
+                        <a:srgbClr val="7BEAA9"/>
                       </a:solidFill>
                       <a:prstDash val="solid"/>
                     </a:lnR>
                     <a:lnT w="9525" cap="flat" cmpd="sng" algn="ctr">
                       <a:solidFill>
-                        <a:srgbClr val="26C5B8"/>
+                        <a:srgbClr val="7BEAA9"/>
                       </a:solidFill>
                       <a:prstDash val="solid"/>
                     </a:lnT>
                     <a:lnB w="9525" cap="flat" cmpd="sng" algn="ctr">
                       <a:solidFill>
-                        <a:srgbClr val="26C5B8"/>
+                        <a:srgbClr val="7BEAA9"/>
                       </a:solidFill>
                       <a:prstDash val="solid"/>
                     </a:lnB>
                     <a:solidFill>
-                      <a:srgbClr val="26C5B8"/>
+                      <a:srgbClr val="7BEAA9"/>
                     </a:solidFill>
                   </a:tcPr>
                 </a:tc>
@@ -6087,7 +6319,7 @@
                       <a:r>
                         <a:rPr sz="1400" b="1">
                           <a:solidFill>
-                            <a:srgbClr val="FFFFFF"/>
+                            <a:srgbClr val="26231F"/>
                           </a:solidFill>
                         </a:rPr>
                         <a:t>확인 필요</a:t>
@@ -6097,30 +6329,30 @@
                   <a:tcPr anchor="ctr" marL="73152" marR="73152">
                     <a:lnL w="9525" cap="flat" cmpd="sng" algn="ctr">
                       <a:solidFill>
-                        <a:srgbClr val="26C5B8"/>
+                        <a:srgbClr val="7BEAA9"/>
                       </a:solidFill>
                       <a:prstDash val="solid"/>
                     </a:lnL>
                     <a:lnR w="9525" cap="flat" cmpd="sng" algn="ctr">
                       <a:solidFill>
-                        <a:srgbClr val="26C5B8"/>
+                        <a:srgbClr val="7BEAA9"/>
                       </a:solidFill>
                       <a:prstDash val="solid"/>
                     </a:lnR>
                     <a:lnT w="9525" cap="flat" cmpd="sng" algn="ctr">
                       <a:solidFill>
-                        <a:srgbClr val="26C5B8"/>
+                        <a:srgbClr val="7BEAA9"/>
                       </a:solidFill>
                       <a:prstDash val="solid"/>
                     </a:lnT>
                     <a:lnB w="9525" cap="flat" cmpd="sng" algn="ctr">
                       <a:solidFill>
-                        <a:srgbClr val="26C5B8"/>
+                        <a:srgbClr val="7BEAA9"/>
                       </a:solidFill>
                       <a:prstDash val="solid"/>
                     </a:lnB>
                     <a:solidFill>
-                      <a:srgbClr val="26C5B8"/>
+                      <a:srgbClr val="7BEAA9"/>
                     </a:solidFill>
                   </a:tcPr>
                 </a:tc>
@@ -6133,7 +6365,7 @@
                       <a:r>
                         <a:rPr sz="1400" b="1">
                           <a:solidFill>
-                            <a:srgbClr val="FFFFFF"/>
+                            <a:srgbClr val="26231F"/>
                           </a:solidFill>
                         </a:rPr>
                         <a:t>해당 없음</a:t>
@@ -6143,30 +6375,30 @@
                   <a:tcPr anchor="ctr" marL="73152" marR="73152">
                     <a:lnL w="9525" cap="flat" cmpd="sng" algn="ctr">
                       <a:solidFill>
-                        <a:srgbClr val="26C5B8"/>
+                        <a:srgbClr val="7BEAA9"/>
                       </a:solidFill>
                       <a:prstDash val="solid"/>
                     </a:lnL>
                     <a:lnR w="9525" cap="flat" cmpd="sng" algn="ctr">
                       <a:solidFill>
-                        <a:srgbClr val="26C5B8"/>
+                        <a:srgbClr val="7BEAA9"/>
                       </a:solidFill>
                       <a:prstDash val="solid"/>
                     </a:lnR>
                     <a:lnT w="9525" cap="flat" cmpd="sng" algn="ctr">
                       <a:solidFill>
-                        <a:srgbClr val="26C5B8"/>
+                        <a:srgbClr val="7BEAA9"/>
                       </a:solidFill>
                       <a:prstDash val="solid"/>
                     </a:lnT>
                     <a:lnB w="9525" cap="flat" cmpd="sng" algn="ctr">
                       <a:solidFill>
-                        <a:srgbClr val="26C5B8"/>
+                        <a:srgbClr val="7BEAA9"/>
                       </a:solidFill>
                       <a:prstDash val="solid"/>
                     </a:lnB>
                     <a:solidFill>
-                      <a:srgbClr val="26C5B8"/>
+                      <a:srgbClr val="7BEAA9"/>
                     </a:solidFill>
                   </a:tcPr>
                 </a:tc>
@@ -6181,7 +6413,7 @@
                       <a:r>
                         <a:rPr sz="1400" b="1">
                           <a:solidFill>
-                            <a:srgbClr val="115F59"/>
+                            <a:srgbClr val="274935"/>
                           </a:solidFill>
                         </a:rPr>
                         <a:t>사망·재해</a:t>
@@ -6191,30 +6423,30 @@
                   <a:tcPr anchor="ctr" marL="73152" marR="73152">
                     <a:lnL w="9525" cap="flat" cmpd="sng" algn="ctr">
                       <a:solidFill>
-                        <a:srgbClr val="D1FAF7"/>
+                        <a:srgbClr val="D1FAE2"/>
                       </a:solidFill>
                       <a:prstDash val="solid"/>
                     </a:lnL>
                     <a:lnR w="9525" cap="flat" cmpd="sng" algn="ctr">
                       <a:solidFill>
-                        <a:srgbClr val="D1FAF7"/>
+                        <a:srgbClr val="D1FAE2"/>
                       </a:solidFill>
                       <a:prstDash val="solid"/>
                     </a:lnR>
                     <a:lnT w="9525" cap="flat" cmpd="sng" algn="ctr">
                       <a:solidFill>
-                        <a:srgbClr val="D1FAF7"/>
+                        <a:srgbClr val="D1FAE2"/>
                       </a:solidFill>
                       <a:prstDash val="solid"/>
                     </a:lnT>
                     <a:lnB w="9525" cap="flat" cmpd="sng" algn="ctr">
                       <a:solidFill>
-                        <a:srgbClr val="D1FAF7"/>
+                        <a:srgbClr val="D1FAE2"/>
                       </a:solidFill>
                       <a:prstDash val="solid"/>
                     </a:lnB>
                     <a:solidFill>
-                      <a:srgbClr val="D1FAF7"/>
+                      <a:srgbClr val="D1FAE2"/>
                     </a:solidFill>
                   </a:tcPr>
                 </a:tc>
@@ -6227,7 +6459,7 @@
                       <a:r>
                         <a:rPr sz="1400" b="0">
                           <a:solidFill>
-                            <a:srgbClr val="2B2B2B"/>
+                            <a:srgbClr val="26231F"/>
                           </a:solidFill>
                         </a:rPr>
                         <a:t>□</a:t>
@@ -6237,25 +6469,25 @@
                   <a:tcPr anchor="ctr" marL="73152" marR="73152">
                     <a:lnL w="9525" cap="flat" cmpd="sng" algn="ctr">
                       <a:solidFill>
-                        <a:srgbClr val="D1FAF7"/>
+                        <a:srgbClr val="D1FAE2"/>
                       </a:solidFill>
                       <a:prstDash val="solid"/>
                     </a:lnL>
                     <a:lnR w="9525" cap="flat" cmpd="sng" algn="ctr">
                       <a:solidFill>
-                        <a:srgbClr val="D1FAF7"/>
+                        <a:srgbClr val="D1FAE2"/>
                       </a:solidFill>
                       <a:prstDash val="solid"/>
                     </a:lnR>
                     <a:lnT w="9525" cap="flat" cmpd="sng" algn="ctr">
                       <a:solidFill>
-                        <a:srgbClr val="D1FAF7"/>
+                        <a:srgbClr val="D1FAE2"/>
                       </a:solidFill>
                       <a:prstDash val="solid"/>
                     </a:lnT>
                     <a:lnB w="9525" cap="flat" cmpd="sng" algn="ctr">
                       <a:solidFill>
-                        <a:srgbClr val="D1FAF7"/>
+                        <a:srgbClr val="D1FAE2"/>
                       </a:solidFill>
                       <a:prstDash val="solid"/>
                     </a:lnB>
@@ -6273,7 +6505,7 @@
                       <a:r>
                         <a:rPr sz="1400" b="0">
                           <a:solidFill>
-                            <a:srgbClr val="2B2B2B"/>
+                            <a:srgbClr val="26231F"/>
                           </a:solidFill>
                         </a:rPr>
                         <a:t>□</a:t>
@@ -6283,25 +6515,25 @@
                   <a:tcPr anchor="ctr" marL="73152" marR="73152">
                     <a:lnL w="9525" cap="flat" cmpd="sng" algn="ctr">
                       <a:solidFill>
-                        <a:srgbClr val="D1FAF7"/>
+                        <a:srgbClr val="D1FAE2"/>
                       </a:solidFill>
                       <a:prstDash val="solid"/>
                     </a:lnL>
                     <a:lnR w="9525" cap="flat" cmpd="sng" algn="ctr">
                       <a:solidFill>
-                        <a:srgbClr val="D1FAF7"/>
+                        <a:srgbClr val="D1FAE2"/>
                       </a:solidFill>
                       <a:prstDash val="solid"/>
                     </a:lnR>
                     <a:lnT w="9525" cap="flat" cmpd="sng" algn="ctr">
                       <a:solidFill>
-                        <a:srgbClr val="D1FAF7"/>
+                        <a:srgbClr val="D1FAE2"/>
                       </a:solidFill>
                       <a:prstDash val="solid"/>
                     </a:lnT>
                     <a:lnB w="9525" cap="flat" cmpd="sng" algn="ctr">
                       <a:solidFill>
-                        <a:srgbClr val="D1FAF7"/>
+                        <a:srgbClr val="D1FAE2"/>
                       </a:solidFill>
                       <a:prstDash val="solid"/>
                     </a:lnB>
@@ -6319,7 +6551,7 @@
                       <a:r>
                         <a:rPr sz="1400" b="0">
                           <a:solidFill>
-                            <a:srgbClr val="2B2B2B"/>
+                            <a:srgbClr val="26231F"/>
                           </a:solidFill>
                         </a:rPr>
                         <a:t>□</a:t>
@@ -6329,25 +6561,25 @@
                   <a:tcPr anchor="ctr" marL="73152" marR="73152">
                     <a:lnL w="9525" cap="flat" cmpd="sng" algn="ctr">
                       <a:solidFill>
-                        <a:srgbClr val="D1FAF7"/>
+                        <a:srgbClr val="D1FAE2"/>
                       </a:solidFill>
                       <a:prstDash val="solid"/>
                     </a:lnL>
                     <a:lnR w="9525" cap="flat" cmpd="sng" algn="ctr">
                       <a:solidFill>
-                        <a:srgbClr val="D1FAF7"/>
+                        <a:srgbClr val="D1FAE2"/>
                       </a:solidFill>
                       <a:prstDash val="solid"/>
                     </a:lnR>
                     <a:lnT w="9525" cap="flat" cmpd="sng" algn="ctr">
                       <a:solidFill>
-                        <a:srgbClr val="D1FAF7"/>
+                        <a:srgbClr val="D1FAE2"/>
                       </a:solidFill>
                       <a:prstDash val="solid"/>
                     </a:lnT>
                     <a:lnB w="9525" cap="flat" cmpd="sng" algn="ctr">
                       <a:solidFill>
-                        <a:srgbClr val="D1FAF7"/>
+                        <a:srgbClr val="D1FAE2"/>
                       </a:solidFill>
                       <a:prstDash val="solid"/>
                     </a:lnB>
@@ -6367,7 +6599,7 @@
                       <a:r>
                         <a:rPr sz="1400" b="1">
                           <a:solidFill>
-                            <a:srgbClr val="115F59"/>
+                            <a:srgbClr val="274935"/>
                           </a:solidFill>
                         </a:rPr>
                         <a:t>질병 진단</a:t>
@@ -6377,30 +6609,30 @@
                   <a:tcPr anchor="ctr" marL="73152" marR="73152">
                     <a:lnL w="9525" cap="flat" cmpd="sng" algn="ctr">
                       <a:solidFill>
-                        <a:srgbClr val="D1FAF7"/>
+                        <a:srgbClr val="D1FAE2"/>
                       </a:solidFill>
                       <a:prstDash val="solid"/>
                     </a:lnL>
                     <a:lnR w="9525" cap="flat" cmpd="sng" algn="ctr">
                       <a:solidFill>
-                        <a:srgbClr val="D1FAF7"/>
+                        <a:srgbClr val="D1FAE2"/>
                       </a:solidFill>
                       <a:prstDash val="solid"/>
                     </a:lnR>
                     <a:lnT w="9525" cap="flat" cmpd="sng" algn="ctr">
                       <a:solidFill>
-                        <a:srgbClr val="D1FAF7"/>
+                        <a:srgbClr val="D1FAE2"/>
                       </a:solidFill>
                       <a:prstDash val="solid"/>
                     </a:lnT>
                     <a:lnB w="9525" cap="flat" cmpd="sng" algn="ctr">
                       <a:solidFill>
-                        <a:srgbClr val="D1FAF7"/>
+                        <a:srgbClr val="D1FAE2"/>
                       </a:solidFill>
                       <a:prstDash val="solid"/>
                     </a:lnB>
                     <a:solidFill>
-                      <a:srgbClr val="D1FAF7"/>
+                      <a:srgbClr val="D1FAE2"/>
                     </a:solidFill>
                   </a:tcPr>
                 </a:tc>
@@ -6413,7 +6645,7 @@
                       <a:r>
                         <a:rPr sz="1400" b="0">
                           <a:solidFill>
-                            <a:srgbClr val="2B2B2B"/>
+                            <a:srgbClr val="26231F"/>
                           </a:solidFill>
                         </a:rPr>
                         <a:t>□</a:t>
@@ -6423,30 +6655,30 @@
                   <a:tcPr anchor="ctr" marL="73152" marR="73152">
                     <a:lnL w="9525" cap="flat" cmpd="sng" algn="ctr">
                       <a:solidFill>
-                        <a:srgbClr val="D1FAF7"/>
+                        <a:srgbClr val="D1FAE2"/>
                       </a:solidFill>
                       <a:prstDash val="solid"/>
                     </a:lnL>
                     <a:lnR w="9525" cap="flat" cmpd="sng" algn="ctr">
                       <a:solidFill>
-                        <a:srgbClr val="D1FAF7"/>
+                        <a:srgbClr val="D1FAE2"/>
                       </a:solidFill>
                       <a:prstDash val="solid"/>
                     </a:lnR>
                     <a:lnT w="9525" cap="flat" cmpd="sng" algn="ctr">
                       <a:solidFill>
-                        <a:srgbClr val="D1FAF7"/>
+                        <a:srgbClr val="D1FAE2"/>
                       </a:solidFill>
                       <a:prstDash val="solid"/>
                     </a:lnT>
                     <a:lnB w="9525" cap="flat" cmpd="sng" algn="ctr">
                       <a:solidFill>
-                        <a:srgbClr val="D1FAF7"/>
+                        <a:srgbClr val="D1FAE2"/>
                       </a:solidFill>
                       <a:prstDash val="solid"/>
                     </a:lnB>
                     <a:solidFill>
-                      <a:srgbClr val="EEFCFB"/>
+                      <a:srgbClr val="EAFDF2"/>
                     </a:solidFill>
                   </a:tcPr>
                 </a:tc>
@@ -6459,7 +6691,7 @@
                       <a:r>
                         <a:rPr sz="1400" b="0">
                           <a:solidFill>
-                            <a:srgbClr val="2B2B2B"/>
+                            <a:srgbClr val="26231F"/>
                           </a:solidFill>
                         </a:rPr>
                         <a:t>□</a:t>
@@ -6469,30 +6701,30 @@
                   <a:tcPr anchor="ctr" marL="73152" marR="73152">
                     <a:lnL w="9525" cap="flat" cmpd="sng" algn="ctr">
                       <a:solidFill>
-                        <a:srgbClr val="D1FAF7"/>
+                        <a:srgbClr val="D1FAE2"/>
                       </a:solidFill>
                       <a:prstDash val="solid"/>
                     </a:lnL>
                     <a:lnR w="9525" cap="flat" cmpd="sng" algn="ctr">
                       <a:solidFill>
-                        <a:srgbClr val="D1FAF7"/>
+                        <a:srgbClr val="D1FAE2"/>
                       </a:solidFill>
                       <a:prstDash val="solid"/>
                     </a:lnR>
                     <a:lnT w="9525" cap="flat" cmpd="sng" algn="ctr">
                       <a:solidFill>
-                        <a:srgbClr val="D1FAF7"/>
+                        <a:srgbClr val="D1FAE2"/>
                       </a:solidFill>
                       <a:prstDash val="solid"/>
                     </a:lnT>
                     <a:lnB w="9525" cap="flat" cmpd="sng" algn="ctr">
                       <a:solidFill>
-                        <a:srgbClr val="D1FAF7"/>
+                        <a:srgbClr val="D1FAE2"/>
                       </a:solidFill>
                       <a:prstDash val="solid"/>
                     </a:lnB>
                     <a:solidFill>
-                      <a:srgbClr val="EEFCFB"/>
+                      <a:srgbClr val="EAFDF2"/>
                     </a:solidFill>
                   </a:tcPr>
                 </a:tc>
@@ -6505,7 +6737,7 @@
                       <a:r>
                         <a:rPr sz="1400" b="0">
                           <a:solidFill>
-                            <a:srgbClr val="2B2B2B"/>
+                            <a:srgbClr val="26231F"/>
                           </a:solidFill>
                         </a:rPr>
                         <a:t>□</a:t>
@@ -6515,30 +6747,30 @@
                   <a:tcPr anchor="ctr" marL="73152" marR="73152">
                     <a:lnL w="9525" cap="flat" cmpd="sng" algn="ctr">
                       <a:solidFill>
-                        <a:srgbClr val="D1FAF7"/>
+                        <a:srgbClr val="D1FAE2"/>
                       </a:solidFill>
                       <a:prstDash val="solid"/>
                     </a:lnL>
                     <a:lnR w="9525" cap="flat" cmpd="sng" algn="ctr">
                       <a:solidFill>
-                        <a:srgbClr val="D1FAF7"/>
+                        <a:srgbClr val="D1FAE2"/>
                       </a:solidFill>
                       <a:prstDash val="solid"/>
                     </a:lnR>
                     <a:lnT w="9525" cap="flat" cmpd="sng" algn="ctr">
                       <a:solidFill>
-                        <a:srgbClr val="D1FAF7"/>
+                        <a:srgbClr val="D1FAE2"/>
                       </a:solidFill>
                       <a:prstDash val="solid"/>
                     </a:lnT>
                     <a:lnB w="9525" cap="flat" cmpd="sng" algn="ctr">
                       <a:solidFill>
-                        <a:srgbClr val="D1FAF7"/>
+                        <a:srgbClr val="D1FAE2"/>
                       </a:solidFill>
                       <a:prstDash val="solid"/>
                     </a:lnB>
                     <a:solidFill>
-                      <a:srgbClr val="EEFCFB"/>
+                      <a:srgbClr val="EAFDF2"/>
                     </a:solidFill>
                   </a:tcPr>
                 </a:tc>
@@ -6553,7 +6785,7 @@
                       <a:r>
                         <a:rPr sz="1400" b="1">
                           <a:solidFill>
-                            <a:srgbClr val="115F59"/>
+                            <a:srgbClr val="274935"/>
                           </a:solidFill>
                         </a:rPr>
                         <a:t>암</a:t>
@@ -6563,30 +6795,30 @@
                   <a:tcPr anchor="ctr" marL="73152" marR="73152">
                     <a:lnL w="9525" cap="flat" cmpd="sng" algn="ctr">
                       <a:solidFill>
-                        <a:srgbClr val="D1FAF7"/>
+                        <a:srgbClr val="D1FAE2"/>
                       </a:solidFill>
                       <a:prstDash val="solid"/>
                     </a:lnL>
                     <a:lnR w="9525" cap="flat" cmpd="sng" algn="ctr">
                       <a:solidFill>
-                        <a:srgbClr val="D1FAF7"/>
+                        <a:srgbClr val="D1FAE2"/>
                       </a:solidFill>
                       <a:prstDash val="solid"/>
                     </a:lnR>
                     <a:lnT w="9525" cap="flat" cmpd="sng" algn="ctr">
                       <a:solidFill>
-                        <a:srgbClr val="D1FAF7"/>
+                        <a:srgbClr val="D1FAE2"/>
                       </a:solidFill>
                       <a:prstDash val="solid"/>
                     </a:lnT>
                     <a:lnB w="9525" cap="flat" cmpd="sng" algn="ctr">
                       <a:solidFill>
-                        <a:srgbClr val="D1FAF7"/>
+                        <a:srgbClr val="D1FAE2"/>
                       </a:solidFill>
                       <a:prstDash val="solid"/>
                     </a:lnB>
                     <a:solidFill>
-                      <a:srgbClr val="D1FAF7"/>
+                      <a:srgbClr val="D1FAE2"/>
                     </a:solidFill>
                   </a:tcPr>
                 </a:tc>
@@ -6599,7 +6831,7 @@
                       <a:r>
                         <a:rPr sz="1400" b="0">
                           <a:solidFill>
-                            <a:srgbClr val="2B2B2B"/>
+                            <a:srgbClr val="26231F"/>
                           </a:solidFill>
                         </a:rPr>
                         <a:t>□</a:t>
@@ -6609,25 +6841,25 @@
                   <a:tcPr anchor="ctr" marL="73152" marR="73152">
                     <a:lnL w="9525" cap="flat" cmpd="sng" algn="ctr">
                       <a:solidFill>
-                        <a:srgbClr val="D1FAF7"/>
+                        <a:srgbClr val="D1FAE2"/>
                       </a:solidFill>
                       <a:prstDash val="solid"/>
                     </a:lnL>
                     <a:lnR w="9525" cap="flat" cmpd="sng" algn="ctr">
                       <a:solidFill>
-                        <a:srgbClr val="D1FAF7"/>
+                        <a:srgbClr val="D1FAE2"/>
                       </a:solidFill>
                       <a:prstDash val="solid"/>
                     </a:lnR>
                     <a:lnT w="9525" cap="flat" cmpd="sng" algn="ctr">
                       <a:solidFill>
-                        <a:srgbClr val="D1FAF7"/>
+                        <a:srgbClr val="D1FAE2"/>
                       </a:solidFill>
                       <a:prstDash val="solid"/>
                     </a:lnT>
                     <a:lnB w="9525" cap="flat" cmpd="sng" algn="ctr">
                       <a:solidFill>
-                        <a:srgbClr val="D1FAF7"/>
+                        <a:srgbClr val="D1FAE2"/>
                       </a:solidFill>
                       <a:prstDash val="solid"/>
                     </a:lnB>
@@ -6645,7 +6877,7 @@
                       <a:r>
                         <a:rPr sz="1400" b="0">
                           <a:solidFill>
-                            <a:srgbClr val="2B2B2B"/>
+                            <a:srgbClr val="26231F"/>
                           </a:solidFill>
                         </a:rPr>
                         <a:t>□</a:t>
@@ -6655,25 +6887,25 @@
                   <a:tcPr anchor="ctr" marL="73152" marR="73152">
                     <a:lnL w="9525" cap="flat" cmpd="sng" algn="ctr">
                       <a:solidFill>
-                        <a:srgbClr val="D1FAF7"/>
+                        <a:srgbClr val="D1FAE2"/>
                       </a:solidFill>
                       <a:prstDash val="solid"/>
                     </a:lnL>
                     <a:lnR w="9525" cap="flat" cmpd="sng" algn="ctr">
                       <a:solidFill>
-                        <a:srgbClr val="D1FAF7"/>
+                        <a:srgbClr val="D1FAE2"/>
                       </a:solidFill>
                       <a:prstDash val="solid"/>
                     </a:lnR>
                     <a:lnT w="9525" cap="flat" cmpd="sng" algn="ctr">
                       <a:solidFill>
-                        <a:srgbClr val="D1FAF7"/>
+                        <a:srgbClr val="D1FAE2"/>
                       </a:solidFill>
                       <a:prstDash val="solid"/>
                     </a:lnT>
                     <a:lnB w="9525" cap="flat" cmpd="sng" algn="ctr">
                       <a:solidFill>
-                        <a:srgbClr val="D1FAF7"/>
+                        <a:srgbClr val="D1FAE2"/>
                       </a:solidFill>
                       <a:prstDash val="solid"/>
                     </a:lnB>
@@ -6691,7 +6923,7 @@
                       <a:r>
                         <a:rPr sz="1400" b="0">
                           <a:solidFill>
-                            <a:srgbClr val="2B2B2B"/>
+                            <a:srgbClr val="26231F"/>
                           </a:solidFill>
                         </a:rPr>
                         <a:t>□</a:t>
@@ -6701,25 +6933,25 @@
                   <a:tcPr anchor="ctr" marL="73152" marR="73152">
                     <a:lnL w="9525" cap="flat" cmpd="sng" algn="ctr">
                       <a:solidFill>
-                        <a:srgbClr val="D1FAF7"/>
+                        <a:srgbClr val="D1FAE2"/>
                       </a:solidFill>
                       <a:prstDash val="solid"/>
                     </a:lnL>
                     <a:lnR w="9525" cap="flat" cmpd="sng" algn="ctr">
                       <a:solidFill>
-                        <a:srgbClr val="D1FAF7"/>
+                        <a:srgbClr val="D1FAE2"/>
                       </a:solidFill>
                       <a:prstDash val="solid"/>
                     </a:lnR>
                     <a:lnT w="9525" cap="flat" cmpd="sng" algn="ctr">
                       <a:solidFill>
-                        <a:srgbClr val="D1FAF7"/>
+                        <a:srgbClr val="D1FAE2"/>
                       </a:solidFill>
                       <a:prstDash val="solid"/>
                     </a:lnT>
                     <a:lnB w="9525" cap="flat" cmpd="sng" algn="ctr">
                       <a:solidFill>
-                        <a:srgbClr val="D1FAF7"/>
+                        <a:srgbClr val="D1FAE2"/>
                       </a:solidFill>
                       <a:prstDash val="solid"/>
                     </a:lnB>
@@ -6739,7 +6971,7 @@
                       <a:r>
                         <a:rPr sz="1400" b="1">
                           <a:solidFill>
-                            <a:srgbClr val="115F59"/>
+                            <a:srgbClr val="274935"/>
                           </a:solidFill>
                         </a:rPr>
                         <a:t>뇌·심장</a:t>
@@ -6749,30 +6981,30 @@
                   <a:tcPr anchor="ctr" marL="73152" marR="73152">
                     <a:lnL w="9525" cap="flat" cmpd="sng" algn="ctr">
                       <a:solidFill>
-                        <a:srgbClr val="D1FAF7"/>
+                        <a:srgbClr val="D1FAE2"/>
                       </a:solidFill>
                       <a:prstDash val="solid"/>
                     </a:lnL>
                     <a:lnR w="9525" cap="flat" cmpd="sng" algn="ctr">
                       <a:solidFill>
-                        <a:srgbClr val="D1FAF7"/>
+                        <a:srgbClr val="D1FAE2"/>
                       </a:solidFill>
                       <a:prstDash val="solid"/>
                     </a:lnR>
                     <a:lnT w="9525" cap="flat" cmpd="sng" algn="ctr">
                       <a:solidFill>
-                        <a:srgbClr val="D1FAF7"/>
+                        <a:srgbClr val="D1FAE2"/>
                       </a:solidFill>
                       <a:prstDash val="solid"/>
                     </a:lnT>
                     <a:lnB w="9525" cap="flat" cmpd="sng" algn="ctr">
                       <a:solidFill>
-                        <a:srgbClr val="D1FAF7"/>
+                        <a:srgbClr val="D1FAE2"/>
                       </a:solidFill>
                       <a:prstDash val="solid"/>
                     </a:lnB>
                     <a:solidFill>
-                      <a:srgbClr val="D1FAF7"/>
+                      <a:srgbClr val="D1FAE2"/>
                     </a:solidFill>
                   </a:tcPr>
                 </a:tc>
@@ -6785,7 +7017,7 @@
                       <a:r>
                         <a:rPr sz="1400" b="0">
                           <a:solidFill>
-                            <a:srgbClr val="2B2B2B"/>
+                            <a:srgbClr val="26231F"/>
                           </a:solidFill>
                         </a:rPr>
                         <a:t>□</a:t>
@@ -6795,30 +7027,30 @@
                   <a:tcPr anchor="ctr" marL="73152" marR="73152">
                     <a:lnL w="9525" cap="flat" cmpd="sng" algn="ctr">
                       <a:solidFill>
-                        <a:srgbClr val="D1FAF7"/>
+                        <a:srgbClr val="D1FAE2"/>
                       </a:solidFill>
                       <a:prstDash val="solid"/>
                     </a:lnL>
                     <a:lnR w="9525" cap="flat" cmpd="sng" algn="ctr">
                       <a:solidFill>
-                        <a:srgbClr val="D1FAF7"/>
+                        <a:srgbClr val="D1FAE2"/>
                       </a:solidFill>
                       <a:prstDash val="solid"/>
                     </a:lnR>
                     <a:lnT w="9525" cap="flat" cmpd="sng" algn="ctr">
                       <a:solidFill>
-                        <a:srgbClr val="D1FAF7"/>
+                        <a:srgbClr val="D1FAE2"/>
                       </a:solidFill>
                       <a:prstDash val="solid"/>
                     </a:lnT>
                     <a:lnB w="9525" cap="flat" cmpd="sng" algn="ctr">
                       <a:solidFill>
-                        <a:srgbClr val="D1FAF7"/>
+                        <a:srgbClr val="D1FAE2"/>
                       </a:solidFill>
                       <a:prstDash val="solid"/>
                     </a:lnB>
                     <a:solidFill>
-                      <a:srgbClr val="EEFCFB"/>
+                      <a:srgbClr val="EAFDF2"/>
                     </a:solidFill>
                   </a:tcPr>
                 </a:tc>
@@ -6831,7 +7063,7 @@
                       <a:r>
                         <a:rPr sz="1400" b="0">
                           <a:solidFill>
-                            <a:srgbClr val="2B2B2B"/>
+                            <a:srgbClr val="26231F"/>
                           </a:solidFill>
                         </a:rPr>
                         <a:t>□</a:t>
@@ -6841,30 +7073,30 @@
                   <a:tcPr anchor="ctr" marL="73152" marR="73152">
                     <a:lnL w="9525" cap="flat" cmpd="sng" algn="ctr">
                       <a:solidFill>
-                        <a:srgbClr val="D1FAF7"/>
+                        <a:srgbClr val="D1FAE2"/>
                       </a:solidFill>
                       <a:prstDash val="solid"/>
                     </a:lnL>
                     <a:lnR w="9525" cap="flat" cmpd="sng" algn="ctr">
                       <a:solidFill>
-                        <a:srgbClr val="D1FAF7"/>
+                        <a:srgbClr val="D1FAE2"/>
                       </a:solidFill>
                       <a:prstDash val="solid"/>
                     </a:lnR>
                     <a:lnT w="9525" cap="flat" cmpd="sng" algn="ctr">
                       <a:solidFill>
-                        <a:srgbClr val="D1FAF7"/>
+                        <a:srgbClr val="D1FAE2"/>
                       </a:solidFill>
                       <a:prstDash val="solid"/>
                     </a:lnT>
                     <a:lnB w="9525" cap="flat" cmpd="sng" algn="ctr">
                       <a:solidFill>
-                        <a:srgbClr val="D1FAF7"/>
+                        <a:srgbClr val="D1FAE2"/>
                       </a:solidFill>
                       <a:prstDash val="solid"/>
                     </a:lnB>
                     <a:solidFill>
-                      <a:srgbClr val="EEFCFB"/>
+                      <a:srgbClr val="EAFDF2"/>
                     </a:solidFill>
                   </a:tcPr>
                 </a:tc>
@@ -6877,7 +7109,7 @@
                       <a:r>
                         <a:rPr sz="1400" b="0">
                           <a:solidFill>
-                            <a:srgbClr val="2B2B2B"/>
+                            <a:srgbClr val="26231F"/>
                           </a:solidFill>
                         </a:rPr>
                         <a:t>□</a:t>
@@ -6887,30 +7119,30 @@
                   <a:tcPr anchor="ctr" marL="73152" marR="73152">
                     <a:lnL w="9525" cap="flat" cmpd="sng" algn="ctr">
                       <a:solidFill>
-                        <a:srgbClr val="D1FAF7"/>
+                        <a:srgbClr val="D1FAE2"/>
                       </a:solidFill>
                       <a:prstDash val="solid"/>
                     </a:lnL>
                     <a:lnR w="9525" cap="flat" cmpd="sng" algn="ctr">
                       <a:solidFill>
-                        <a:srgbClr val="D1FAF7"/>
+                        <a:srgbClr val="D1FAE2"/>
                       </a:solidFill>
                       <a:prstDash val="solid"/>
                     </a:lnR>
                     <a:lnT w="9525" cap="flat" cmpd="sng" algn="ctr">
                       <a:solidFill>
-                        <a:srgbClr val="D1FAF7"/>
+                        <a:srgbClr val="D1FAE2"/>
                       </a:solidFill>
                       <a:prstDash val="solid"/>
                     </a:lnT>
                     <a:lnB w="9525" cap="flat" cmpd="sng" algn="ctr">
                       <a:solidFill>
-                        <a:srgbClr val="D1FAF7"/>
+                        <a:srgbClr val="D1FAE2"/>
                       </a:solidFill>
                       <a:prstDash val="solid"/>
                     </a:lnB>
                     <a:solidFill>
-                      <a:srgbClr val="EEFCFB"/>
+                      <a:srgbClr val="EAFDF2"/>
                     </a:solidFill>
                   </a:tcPr>
                 </a:tc>
@@ -6925,7 +7157,7 @@
                       <a:r>
                         <a:rPr sz="1400" b="1">
                           <a:solidFill>
-                            <a:srgbClr val="115F59"/>
+                            <a:srgbClr val="274935"/>
                           </a:solidFill>
                         </a:rPr>
                         <a:t>입원·수술</a:t>
@@ -6935,30 +7167,30 @@
                   <a:tcPr anchor="ctr" marL="73152" marR="73152">
                     <a:lnL w="9525" cap="flat" cmpd="sng" algn="ctr">
                       <a:solidFill>
-                        <a:srgbClr val="D1FAF7"/>
+                        <a:srgbClr val="D1FAE2"/>
                       </a:solidFill>
                       <a:prstDash val="solid"/>
                     </a:lnL>
                     <a:lnR w="9525" cap="flat" cmpd="sng" algn="ctr">
                       <a:solidFill>
-                        <a:srgbClr val="D1FAF7"/>
+                        <a:srgbClr val="D1FAE2"/>
                       </a:solidFill>
                       <a:prstDash val="solid"/>
                     </a:lnR>
                     <a:lnT w="9525" cap="flat" cmpd="sng" algn="ctr">
                       <a:solidFill>
-                        <a:srgbClr val="D1FAF7"/>
+                        <a:srgbClr val="D1FAE2"/>
                       </a:solidFill>
                       <a:prstDash val="solid"/>
                     </a:lnT>
                     <a:lnB w="9525" cap="flat" cmpd="sng" algn="ctr">
                       <a:solidFill>
-                        <a:srgbClr val="D1FAF7"/>
+                        <a:srgbClr val="D1FAE2"/>
                       </a:solidFill>
                       <a:prstDash val="solid"/>
                     </a:lnB>
                     <a:solidFill>
-                      <a:srgbClr val="D1FAF7"/>
+                      <a:srgbClr val="D1FAE2"/>
                     </a:solidFill>
                   </a:tcPr>
                 </a:tc>
@@ -6971,7 +7203,7 @@
                       <a:r>
                         <a:rPr sz="1400" b="0">
                           <a:solidFill>
-                            <a:srgbClr val="2B2B2B"/>
+                            <a:srgbClr val="26231F"/>
                           </a:solidFill>
                         </a:rPr>
                         <a:t>□</a:t>
@@ -6981,25 +7213,25 @@
                   <a:tcPr anchor="ctr" marL="73152" marR="73152">
                     <a:lnL w="9525" cap="flat" cmpd="sng" algn="ctr">
                       <a:solidFill>
-                        <a:srgbClr val="D1FAF7"/>
+                        <a:srgbClr val="D1FAE2"/>
                       </a:solidFill>
                       <a:prstDash val="solid"/>
                     </a:lnL>
                     <a:lnR w="9525" cap="flat" cmpd="sng" algn="ctr">
                       <a:solidFill>
-                        <a:srgbClr val="D1FAF7"/>
+                        <a:srgbClr val="D1FAE2"/>
                       </a:solidFill>
                       <a:prstDash val="solid"/>
                     </a:lnR>
                     <a:lnT w="9525" cap="flat" cmpd="sng" algn="ctr">
                       <a:solidFill>
-                        <a:srgbClr val="D1FAF7"/>
+                        <a:srgbClr val="D1FAE2"/>
                       </a:solidFill>
                       <a:prstDash val="solid"/>
                     </a:lnT>
                     <a:lnB w="9525" cap="flat" cmpd="sng" algn="ctr">
                       <a:solidFill>
-                        <a:srgbClr val="D1FAF7"/>
+                        <a:srgbClr val="D1FAE2"/>
                       </a:solidFill>
                       <a:prstDash val="solid"/>
                     </a:lnB>
@@ -7017,7 +7249,7 @@
                       <a:r>
                         <a:rPr sz="1400" b="0">
                           <a:solidFill>
-                            <a:srgbClr val="2B2B2B"/>
+                            <a:srgbClr val="26231F"/>
                           </a:solidFill>
                         </a:rPr>
                         <a:t>□</a:t>
@@ -7027,25 +7259,25 @@
                   <a:tcPr anchor="ctr" marL="73152" marR="73152">
                     <a:lnL w="9525" cap="flat" cmpd="sng" algn="ctr">
                       <a:solidFill>
-                        <a:srgbClr val="D1FAF7"/>
+                        <a:srgbClr val="D1FAE2"/>
                       </a:solidFill>
                       <a:prstDash val="solid"/>
                     </a:lnL>
                     <a:lnR w="9525" cap="flat" cmpd="sng" algn="ctr">
                       <a:solidFill>
-                        <a:srgbClr val="D1FAF7"/>
+                        <a:srgbClr val="D1FAE2"/>
                       </a:solidFill>
                       <a:prstDash val="solid"/>
                     </a:lnR>
                     <a:lnT w="9525" cap="flat" cmpd="sng" algn="ctr">
                       <a:solidFill>
-                        <a:srgbClr val="D1FAF7"/>
+                        <a:srgbClr val="D1FAE2"/>
                       </a:solidFill>
                       <a:prstDash val="solid"/>
                     </a:lnT>
                     <a:lnB w="9525" cap="flat" cmpd="sng" algn="ctr">
                       <a:solidFill>
-                        <a:srgbClr val="D1FAF7"/>
+                        <a:srgbClr val="D1FAE2"/>
                       </a:solidFill>
                       <a:prstDash val="solid"/>
                     </a:lnB>
@@ -7063,7 +7295,7 @@
                       <a:r>
                         <a:rPr sz="1400" b="0">
                           <a:solidFill>
-                            <a:srgbClr val="2B2B2B"/>
+                            <a:srgbClr val="26231F"/>
                           </a:solidFill>
                         </a:rPr>
                         <a:t>□</a:t>
@@ -7073,25 +7305,25 @@
                   <a:tcPr anchor="ctr" marL="73152" marR="73152">
                     <a:lnL w="9525" cap="flat" cmpd="sng" algn="ctr">
                       <a:solidFill>
-                        <a:srgbClr val="D1FAF7"/>
+                        <a:srgbClr val="D1FAE2"/>
                       </a:solidFill>
                       <a:prstDash val="solid"/>
                     </a:lnL>
                     <a:lnR w="9525" cap="flat" cmpd="sng" algn="ctr">
                       <a:solidFill>
-                        <a:srgbClr val="D1FAF7"/>
+                        <a:srgbClr val="D1FAE2"/>
                       </a:solidFill>
                       <a:prstDash val="solid"/>
                     </a:lnR>
                     <a:lnT w="9525" cap="flat" cmpd="sng" algn="ctr">
                       <a:solidFill>
-                        <a:srgbClr val="D1FAF7"/>
+                        <a:srgbClr val="D1FAE2"/>
                       </a:solidFill>
                       <a:prstDash val="solid"/>
                     </a:lnT>
                     <a:lnB w="9525" cap="flat" cmpd="sng" algn="ctr">
                       <a:solidFill>
-                        <a:srgbClr val="D1FAF7"/>
+                        <a:srgbClr val="D1FAE2"/>
                       </a:solidFill>
                       <a:prstDash val="solid"/>
                     </a:lnB>
@@ -7111,7 +7343,7 @@
                       <a:r>
                         <a:rPr sz="1400" b="1">
                           <a:solidFill>
-                            <a:srgbClr val="115F59"/>
+                            <a:srgbClr val="274935"/>
                           </a:solidFill>
                         </a:rPr>
                         <a:t>상해</a:t>
@@ -7121,30 +7353,30 @@
                   <a:tcPr anchor="ctr" marL="73152" marR="73152">
                     <a:lnL w="9525" cap="flat" cmpd="sng" algn="ctr">
                       <a:solidFill>
-                        <a:srgbClr val="D1FAF7"/>
+                        <a:srgbClr val="D1FAE2"/>
                       </a:solidFill>
                       <a:prstDash val="solid"/>
                     </a:lnL>
                     <a:lnR w="9525" cap="flat" cmpd="sng" algn="ctr">
                       <a:solidFill>
-                        <a:srgbClr val="D1FAF7"/>
+                        <a:srgbClr val="D1FAE2"/>
                       </a:solidFill>
                       <a:prstDash val="solid"/>
                     </a:lnR>
                     <a:lnT w="9525" cap="flat" cmpd="sng" algn="ctr">
                       <a:solidFill>
-                        <a:srgbClr val="D1FAF7"/>
+                        <a:srgbClr val="D1FAE2"/>
                       </a:solidFill>
                       <a:prstDash val="solid"/>
                     </a:lnT>
                     <a:lnB w="9525" cap="flat" cmpd="sng" algn="ctr">
                       <a:solidFill>
-                        <a:srgbClr val="D1FAF7"/>
+                        <a:srgbClr val="D1FAE2"/>
                       </a:solidFill>
                       <a:prstDash val="solid"/>
                     </a:lnB>
                     <a:solidFill>
-                      <a:srgbClr val="D1FAF7"/>
+                      <a:srgbClr val="D1FAE2"/>
                     </a:solidFill>
                   </a:tcPr>
                 </a:tc>
@@ -7157,7 +7389,7 @@
                       <a:r>
                         <a:rPr sz="1400" b="0">
                           <a:solidFill>
-                            <a:srgbClr val="2B2B2B"/>
+                            <a:srgbClr val="26231F"/>
                           </a:solidFill>
                         </a:rPr>
                         <a:t>□</a:t>
@@ -7167,30 +7399,30 @@
                   <a:tcPr anchor="ctr" marL="73152" marR="73152">
                     <a:lnL w="9525" cap="flat" cmpd="sng" algn="ctr">
                       <a:solidFill>
-                        <a:srgbClr val="D1FAF7"/>
+                        <a:srgbClr val="D1FAE2"/>
                       </a:solidFill>
                       <a:prstDash val="solid"/>
                     </a:lnL>
                     <a:lnR w="9525" cap="flat" cmpd="sng" algn="ctr">
                       <a:solidFill>
-                        <a:srgbClr val="D1FAF7"/>
+                        <a:srgbClr val="D1FAE2"/>
                       </a:solidFill>
                       <a:prstDash val="solid"/>
                     </a:lnR>
                     <a:lnT w="9525" cap="flat" cmpd="sng" algn="ctr">
                       <a:solidFill>
-                        <a:srgbClr val="D1FAF7"/>
+                        <a:srgbClr val="D1FAE2"/>
                       </a:solidFill>
                       <a:prstDash val="solid"/>
                     </a:lnT>
                     <a:lnB w="9525" cap="flat" cmpd="sng" algn="ctr">
                       <a:solidFill>
-                        <a:srgbClr val="D1FAF7"/>
+                        <a:srgbClr val="D1FAE2"/>
                       </a:solidFill>
                       <a:prstDash val="solid"/>
                     </a:lnB>
                     <a:solidFill>
-                      <a:srgbClr val="EEFCFB"/>
+                      <a:srgbClr val="EAFDF2"/>
                     </a:solidFill>
                   </a:tcPr>
                 </a:tc>
@@ -7203,7 +7435,7 @@
                       <a:r>
                         <a:rPr sz="1400" b="0">
                           <a:solidFill>
-                            <a:srgbClr val="2B2B2B"/>
+                            <a:srgbClr val="26231F"/>
                           </a:solidFill>
                         </a:rPr>
                         <a:t>□</a:t>
@@ -7213,30 +7445,30 @@
                   <a:tcPr anchor="ctr" marL="73152" marR="73152">
                     <a:lnL w="9525" cap="flat" cmpd="sng" algn="ctr">
                       <a:solidFill>
-                        <a:srgbClr val="D1FAF7"/>
+                        <a:srgbClr val="D1FAE2"/>
                       </a:solidFill>
                       <a:prstDash val="solid"/>
                     </a:lnL>
                     <a:lnR w="9525" cap="flat" cmpd="sng" algn="ctr">
                       <a:solidFill>
-                        <a:srgbClr val="D1FAF7"/>
+                        <a:srgbClr val="D1FAE2"/>
                       </a:solidFill>
                       <a:prstDash val="solid"/>
                     </a:lnR>
                     <a:lnT w="9525" cap="flat" cmpd="sng" algn="ctr">
                       <a:solidFill>
-                        <a:srgbClr val="D1FAF7"/>
+                        <a:srgbClr val="D1FAE2"/>
                       </a:solidFill>
                       <a:prstDash val="solid"/>
                     </a:lnT>
                     <a:lnB w="9525" cap="flat" cmpd="sng" algn="ctr">
                       <a:solidFill>
-                        <a:srgbClr val="D1FAF7"/>
+                        <a:srgbClr val="D1FAE2"/>
                       </a:solidFill>
                       <a:prstDash val="solid"/>
                     </a:lnB>
                     <a:solidFill>
-                      <a:srgbClr val="EEFCFB"/>
+                      <a:srgbClr val="EAFDF2"/>
                     </a:solidFill>
                   </a:tcPr>
                 </a:tc>
@@ -7249,7 +7481,7 @@
                       <a:r>
                         <a:rPr sz="1400" b="0">
                           <a:solidFill>
-                            <a:srgbClr val="2B2B2B"/>
+                            <a:srgbClr val="26231F"/>
                           </a:solidFill>
                         </a:rPr>
                         <a:t>□</a:t>
@@ -7259,30 +7491,30 @@
                   <a:tcPr anchor="ctr" marL="73152" marR="73152">
                     <a:lnL w="9525" cap="flat" cmpd="sng" algn="ctr">
                       <a:solidFill>
-                        <a:srgbClr val="D1FAF7"/>
+                        <a:srgbClr val="D1FAE2"/>
                       </a:solidFill>
                       <a:prstDash val="solid"/>
                     </a:lnL>
                     <a:lnR w="9525" cap="flat" cmpd="sng" algn="ctr">
                       <a:solidFill>
-                        <a:srgbClr val="D1FAF7"/>
+                        <a:srgbClr val="D1FAE2"/>
                       </a:solidFill>
                       <a:prstDash val="solid"/>
                     </a:lnR>
                     <a:lnT w="9525" cap="flat" cmpd="sng" algn="ctr">
                       <a:solidFill>
-                        <a:srgbClr val="D1FAF7"/>
+                        <a:srgbClr val="D1FAE2"/>
                       </a:solidFill>
                       <a:prstDash val="solid"/>
                     </a:lnT>
                     <a:lnB w="9525" cap="flat" cmpd="sng" algn="ctr">
                       <a:solidFill>
-                        <a:srgbClr val="D1FAF7"/>
+                        <a:srgbClr val="D1FAE2"/>
                       </a:solidFill>
                       <a:prstDash val="solid"/>
                     </a:lnB>
                     <a:solidFill>
-                      <a:srgbClr val="EEFCFB"/>
+                      <a:srgbClr val="EAFDF2"/>
                     </a:solidFill>
                   </a:tcPr>
                 </a:tc>
@@ -7297,7 +7529,7 @@
                       <a:r>
                         <a:rPr sz="1400" b="1">
                           <a:solidFill>
-                            <a:srgbClr val="115F59"/>
+                            <a:srgbClr val="274935"/>
                           </a:solidFill>
                         </a:rPr>
                         <a:t>실손의료</a:t>
@@ -7307,30 +7539,30 @@
                   <a:tcPr anchor="ctr" marL="73152" marR="73152">
                     <a:lnL w="9525" cap="flat" cmpd="sng" algn="ctr">
                       <a:solidFill>
-                        <a:srgbClr val="D1FAF7"/>
+                        <a:srgbClr val="D1FAE2"/>
                       </a:solidFill>
                       <a:prstDash val="solid"/>
                     </a:lnL>
                     <a:lnR w="9525" cap="flat" cmpd="sng" algn="ctr">
                       <a:solidFill>
-                        <a:srgbClr val="D1FAF7"/>
+                        <a:srgbClr val="D1FAE2"/>
                       </a:solidFill>
                       <a:prstDash val="solid"/>
                     </a:lnR>
                     <a:lnT w="9525" cap="flat" cmpd="sng" algn="ctr">
                       <a:solidFill>
-                        <a:srgbClr val="D1FAF7"/>
+                        <a:srgbClr val="D1FAE2"/>
                       </a:solidFill>
                       <a:prstDash val="solid"/>
                     </a:lnT>
                     <a:lnB w="9525" cap="flat" cmpd="sng" algn="ctr">
                       <a:solidFill>
-                        <a:srgbClr val="D1FAF7"/>
+                        <a:srgbClr val="D1FAE2"/>
                       </a:solidFill>
                       <a:prstDash val="solid"/>
                     </a:lnB>
                     <a:solidFill>
-                      <a:srgbClr val="D1FAF7"/>
+                      <a:srgbClr val="D1FAE2"/>
                     </a:solidFill>
                   </a:tcPr>
                 </a:tc>
@@ -7343,7 +7575,7 @@
                       <a:r>
                         <a:rPr sz="1400" b="0">
                           <a:solidFill>
-                            <a:srgbClr val="2B2B2B"/>
+                            <a:srgbClr val="26231F"/>
                           </a:solidFill>
                         </a:rPr>
                         <a:t>□</a:t>
@@ -7353,25 +7585,25 @@
                   <a:tcPr anchor="ctr" marL="73152" marR="73152">
                     <a:lnL w="9525" cap="flat" cmpd="sng" algn="ctr">
                       <a:solidFill>
-                        <a:srgbClr val="D1FAF7"/>
+                        <a:srgbClr val="D1FAE2"/>
                       </a:solidFill>
                       <a:prstDash val="solid"/>
                     </a:lnL>
                     <a:lnR w="9525" cap="flat" cmpd="sng" algn="ctr">
                       <a:solidFill>
-                        <a:srgbClr val="D1FAF7"/>
+                        <a:srgbClr val="D1FAE2"/>
                       </a:solidFill>
                       <a:prstDash val="solid"/>
                     </a:lnR>
                     <a:lnT w="9525" cap="flat" cmpd="sng" algn="ctr">
                       <a:solidFill>
-                        <a:srgbClr val="D1FAF7"/>
+                        <a:srgbClr val="D1FAE2"/>
                       </a:solidFill>
                       <a:prstDash val="solid"/>
                     </a:lnT>
                     <a:lnB w="9525" cap="flat" cmpd="sng" algn="ctr">
                       <a:solidFill>
-                        <a:srgbClr val="D1FAF7"/>
+                        <a:srgbClr val="D1FAE2"/>
                       </a:solidFill>
                       <a:prstDash val="solid"/>
                     </a:lnB>
@@ -7389,7 +7621,7 @@
                       <a:r>
                         <a:rPr sz="1400" b="0">
                           <a:solidFill>
-                            <a:srgbClr val="2B2B2B"/>
+                            <a:srgbClr val="26231F"/>
                           </a:solidFill>
                         </a:rPr>
                         <a:t>□</a:t>
@@ -7399,25 +7631,25 @@
                   <a:tcPr anchor="ctr" marL="73152" marR="73152">
                     <a:lnL w="9525" cap="flat" cmpd="sng" algn="ctr">
                       <a:solidFill>
-                        <a:srgbClr val="D1FAF7"/>
+                        <a:srgbClr val="D1FAE2"/>
                       </a:solidFill>
                       <a:prstDash val="solid"/>
                     </a:lnL>
                     <a:lnR w="9525" cap="flat" cmpd="sng" algn="ctr">
                       <a:solidFill>
-                        <a:srgbClr val="D1FAF7"/>
+                        <a:srgbClr val="D1FAE2"/>
                       </a:solidFill>
                       <a:prstDash val="solid"/>
                     </a:lnR>
                     <a:lnT w="9525" cap="flat" cmpd="sng" algn="ctr">
                       <a:solidFill>
-                        <a:srgbClr val="D1FAF7"/>
+                        <a:srgbClr val="D1FAE2"/>
                       </a:solidFill>
                       <a:prstDash val="solid"/>
                     </a:lnT>
                     <a:lnB w="9525" cap="flat" cmpd="sng" algn="ctr">
                       <a:solidFill>
-                        <a:srgbClr val="D1FAF7"/>
+                        <a:srgbClr val="D1FAE2"/>
                       </a:solidFill>
                       <a:prstDash val="solid"/>
                     </a:lnB>
@@ -7435,7 +7667,7 @@
                       <a:r>
                         <a:rPr sz="1400" b="0">
                           <a:solidFill>
-                            <a:srgbClr val="2B2B2B"/>
+                            <a:srgbClr val="26231F"/>
                           </a:solidFill>
                         </a:rPr>
                         <a:t>□</a:t>
@@ -7445,25 +7677,25 @@
                   <a:tcPr anchor="ctr" marL="73152" marR="73152">
                     <a:lnL w="9525" cap="flat" cmpd="sng" algn="ctr">
                       <a:solidFill>
-                        <a:srgbClr val="D1FAF7"/>
+                        <a:srgbClr val="D1FAE2"/>
                       </a:solidFill>
                       <a:prstDash val="solid"/>
                     </a:lnL>
                     <a:lnR w="9525" cap="flat" cmpd="sng" algn="ctr">
                       <a:solidFill>
-                        <a:srgbClr val="D1FAF7"/>
+                        <a:srgbClr val="D1FAE2"/>
                       </a:solidFill>
                       <a:prstDash val="solid"/>
                     </a:lnR>
                     <a:lnT w="9525" cap="flat" cmpd="sng" algn="ctr">
                       <a:solidFill>
-                        <a:srgbClr val="D1FAF7"/>
+                        <a:srgbClr val="D1FAE2"/>
                       </a:solidFill>
                       <a:prstDash val="solid"/>
                     </a:lnT>
                     <a:lnB w="9525" cap="flat" cmpd="sng" algn="ctr">
                       <a:solidFill>
-                        <a:srgbClr val="D1FAF7"/>
+                        <a:srgbClr val="D1FAE2"/>
                       </a:solidFill>
                       <a:prstDash val="solid"/>
                     </a:lnB>
@@ -7483,7 +7715,7 @@
                       <a:r>
                         <a:rPr sz="1400" b="1">
                           <a:solidFill>
-                            <a:srgbClr val="115F59"/>
+                            <a:srgbClr val="274935"/>
                           </a:solidFill>
                         </a:rPr>
                         <a:t>연금·노후자금</a:t>
@@ -7493,30 +7725,30 @@
                   <a:tcPr anchor="ctr" marL="73152" marR="73152">
                     <a:lnL w="9525" cap="flat" cmpd="sng" algn="ctr">
                       <a:solidFill>
-                        <a:srgbClr val="D1FAF7"/>
+                        <a:srgbClr val="D1FAE2"/>
                       </a:solidFill>
                       <a:prstDash val="solid"/>
                     </a:lnL>
                     <a:lnR w="9525" cap="flat" cmpd="sng" algn="ctr">
                       <a:solidFill>
-                        <a:srgbClr val="D1FAF7"/>
+                        <a:srgbClr val="D1FAE2"/>
                       </a:solidFill>
                       <a:prstDash val="solid"/>
                     </a:lnR>
                     <a:lnT w="9525" cap="flat" cmpd="sng" algn="ctr">
                       <a:solidFill>
-                        <a:srgbClr val="D1FAF7"/>
+                        <a:srgbClr val="D1FAE2"/>
                       </a:solidFill>
                       <a:prstDash val="solid"/>
                     </a:lnT>
                     <a:lnB w="9525" cap="flat" cmpd="sng" algn="ctr">
                       <a:solidFill>
-                        <a:srgbClr val="D1FAF7"/>
+                        <a:srgbClr val="D1FAE2"/>
                       </a:solidFill>
                       <a:prstDash val="solid"/>
                     </a:lnB>
                     <a:solidFill>
-                      <a:srgbClr val="D1FAF7"/>
+                      <a:srgbClr val="D1FAE2"/>
                     </a:solidFill>
                   </a:tcPr>
                 </a:tc>
@@ -7529,7 +7761,7 @@
                       <a:r>
                         <a:rPr sz="1400" b="0">
                           <a:solidFill>
-                            <a:srgbClr val="2B2B2B"/>
+                            <a:srgbClr val="26231F"/>
                           </a:solidFill>
                         </a:rPr>
                         <a:t>□</a:t>
@@ -7539,30 +7771,30 @@
                   <a:tcPr anchor="ctr" marL="73152" marR="73152">
                     <a:lnL w="9525" cap="flat" cmpd="sng" algn="ctr">
                       <a:solidFill>
-                        <a:srgbClr val="D1FAF7"/>
+                        <a:srgbClr val="D1FAE2"/>
                       </a:solidFill>
                       <a:prstDash val="solid"/>
                     </a:lnL>
                     <a:lnR w="9525" cap="flat" cmpd="sng" algn="ctr">
                       <a:solidFill>
-                        <a:srgbClr val="D1FAF7"/>
+                        <a:srgbClr val="D1FAE2"/>
                       </a:solidFill>
                       <a:prstDash val="solid"/>
                     </a:lnR>
                     <a:lnT w="9525" cap="flat" cmpd="sng" algn="ctr">
                       <a:solidFill>
-                        <a:srgbClr val="D1FAF7"/>
+                        <a:srgbClr val="D1FAE2"/>
                       </a:solidFill>
                       <a:prstDash val="solid"/>
                     </a:lnT>
                     <a:lnB w="9525" cap="flat" cmpd="sng" algn="ctr">
                       <a:solidFill>
-                        <a:srgbClr val="D1FAF7"/>
+                        <a:srgbClr val="D1FAE2"/>
                       </a:solidFill>
                       <a:prstDash val="solid"/>
                     </a:lnB>
                     <a:solidFill>
-                      <a:srgbClr val="EEFCFB"/>
+                      <a:srgbClr val="EAFDF2"/>
                     </a:solidFill>
                   </a:tcPr>
                 </a:tc>
@@ -7575,7 +7807,7 @@
                       <a:r>
                         <a:rPr sz="1400" b="0">
                           <a:solidFill>
-                            <a:srgbClr val="2B2B2B"/>
+                            <a:srgbClr val="26231F"/>
                           </a:solidFill>
                         </a:rPr>
                         <a:t>□</a:t>
@@ -7585,30 +7817,30 @@
                   <a:tcPr anchor="ctr" marL="73152" marR="73152">
                     <a:lnL w="9525" cap="flat" cmpd="sng" algn="ctr">
                       <a:solidFill>
-                        <a:srgbClr val="D1FAF7"/>
+                        <a:srgbClr val="D1FAE2"/>
                       </a:solidFill>
                       <a:prstDash val="solid"/>
                     </a:lnL>
                     <a:lnR w="9525" cap="flat" cmpd="sng" algn="ctr">
                       <a:solidFill>
-                        <a:srgbClr val="D1FAF7"/>
+                        <a:srgbClr val="D1FAE2"/>
                       </a:solidFill>
                       <a:prstDash val="solid"/>
                     </a:lnR>
                     <a:lnT w="9525" cap="flat" cmpd="sng" algn="ctr">
                       <a:solidFill>
-                        <a:srgbClr val="D1FAF7"/>
+                        <a:srgbClr val="D1FAE2"/>
                       </a:solidFill>
                       <a:prstDash val="solid"/>
                     </a:lnT>
                     <a:lnB w="9525" cap="flat" cmpd="sng" algn="ctr">
                       <a:solidFill>
-                        <a:srgbClr val="D1FAF7"/>
+                        <a:srgbClr val="D1FAE2"/>
                       </a:solidFill>
                       <a:prstDash val="solid"/>
                     </a:lnB>
                     <a:solidFill>
-                      <a:srgbClr val="EEFCFB"/>
+                      <a:srgbClr val="EAFDF2"/>
                     </a:solidFill>
                   </a:tcPr>
                 </a:tc>
@@ -7621,7 +7853,7 @@
                       <a:r>
                         <a:rPr sz="1400" b="0">
                           <a:solidFill>
-                            <a:srgbClr val="2B2B2B"/>
+                            <a:srgbClr val="26231F"/>
                           </a:solidFill>
                         </a:rPr>
                         <a:t>□</a:t>
@@ -7631,30 +7863,30 @@
                   <a:tcPr anchor="ctr" marL="73152" marR="73152">
                     <a:lnL w="9525" cap="flat" cmpd="sng" algn="ctr">
                       <a:solidFill>
-                        <a:srgbClr val="D1FAF7"/>
+                        <a:srgbClr val="D1FAE2"/>
                       </a:solidFill>
                       <a:prstDash val="solid"/>
                     </a:lnL>
                     <a:lnR w="9525" cap="flat" cmpd="sng" algn="ctr">
                       <a:solidFill>
-                        <a:srgbClr val="D1FAF7"/>
+                        <a:srgbClr val="D1FAE2"/>
                       </a:solidFill>
                       <a:prstDash val="solid"/>
                     </a:lnR>
                     <a:lnT w="9525" cap="flat" cmpd="sng" algn="ctr">
                       <a:solidFill>
-                        <a:srgbClr val="D1FAF7"/>
+                        <a:srgbClr val="D1FAE2"/>
                       </a:solidFill>
                       <a:prstDash val="solid"/>
                     </a:lnT>
                     <a:lnB w="9525" cap="flat" cmpd="sng" algn="ctr">
                       <a:solidFill>
-                        <a:srgbClr val="D1FAF7"/>
+                        <a:srgbClr val="D1FAE2"/>
                       </a:solidFill>
                       <a:prstDash val="solid"/>
                     </a:lnB>
                     <a:solidFill>
-                      <a:srgbClr val="EEFCFB"/>
+                      <a:srgbClr val="EAFDF2"/>
                     </a:solidFill>
                   </a:tcPr>
                 </a:tc>
@@ -7677,7 +7909,7 @@
     <p:bg>
       <p:bgPr>
         <a:solidFill>
-          <a:srgbClr val="EEFCFB"/>
+          <a:srgbClr val="EAFDF2"/>
         </a:solidFill>
         <a:effectLst/>
       </p:bgPr>
@@ -7697,46 +7929,84 @@
         </p:nvSpPr>
         <p:spPr>
           <a:xfrm>
-            <a:off x="256032" y="256032"/>
-            <a:ext cx="11679631" cy="6345936"/>
+            <a:off x="640080" y="566928"/>
+            <a:ext cx="10911535" cy="10972"/>
+          </a:xfrm>
+          <a:prstGeom prst="rect">
+            <a:avLst/>
+          </a:prstGeom>
+          <a:solidFill>
+            <a:srgbClr val="26231F"/>
+          </a:solidFill>
+          <a:ln>
+            <a:noFill/>
+          </a:ln>
+        </p:spPr>
+        <p:txBody>
+          <a:bodyPr rtlCol="0" anchor="ctr"/>
+          <a:lstStyle/>
+          <a:p>
+            <a:pPr algn="ctr"/>
+          </a:p>
+        </p:txBody>
+      </p:sp>
+      <p:sp>
+        <p:nvSpPr>
+          <p:cNvPr id="4" name="상단 라벨"/>
+          <p:cNvSpPr txBox="1"/>
+          <p:nvPr/>
+        </p:nvSpPr>
+        <p:spPr>
+          <a:xfrm>
+            <a:off x="640080" y="237744"/>
+            <a:ext cx="5486400" cy="274320"/>
           </a:xfrm>
           <a:prstGeom prst="rect">
             <a:avLst/>
           </a:prstGeom>
           <a:noFill/>
-          <a:ln w="28575">
-            <a:solidFill>
-              <a:srgbClr val="26C5B8"/>
-            </a:solidFill>
-          </a:ln>
-        </p:spPr>
-        <p:txBody>
-          <a:bodyPr rtlCol="0" anchor="ctr"/>
-          <a:lstStyle/>
-          <a:p>
-            <a:pPr algn="ctr"/>
-          </a:p>
-        </p:txBody>
-      </p:sp>
-      <p:sp>
-        <p:nvSpPr>
-          <p:cNvPr id="4" name="장식"/>
+        </p:spPr>
+        <p:txBody>
+          <a:bodyPr wrap="square" lIns="54864" rIns="54864" tIns="27432" bIns="27432" anchor="ctr">
+            <a:noAutofit/>
+          </a:bodyPr>
+          <a:lstStyle/>
+          <a:p>
+            <a:pPr algn="l">
+              <a:lnSpc>
+                <a:spcPct val="115000"/>
+              </a:lnSpc>
+            </a:pPr>
+            <a:r>
+              <a:rPr sz="900" b="1" i="0" spc="250">
+                <a:solidFill>
+                  <a:srgbClr val="26231F"/>
+                </a:solidFill>
+              </a:rPr>
+              <a:t>INSURANCE CHECK</a:t>
+            </a:r>
+          </a:p>
+        </p:txBody>
+      </p:sp>
+      <p:sp>
+        <p:nvSpPr>
+          <p:cNvPr id="5" name="포인트"/>
           <p:cNvSpPr/>
           <p:nvPr/>
         </p:nvSpPr>
         <p:spPr>
           <a:xfrm>
-            <a:off x="384048" y="384048"/>
-            <a:ext cx="11423599" cy="6089904"/>
-          </a:xfrm>
-          <a:prstGeom prst="rect">
+            <a:off x="11204143" y="246888"/>
+            <a:ext cx="237744" cy="237744"/>
+          </a:xfrm>
+          <a:prstGeom prst="round2SameRect">
             <a:avLst/>
           </a:prstGeom>
-          <a:noFill/>
-          <a:ln w="9525">
-            <a:solidFill>
-              <a:srgbClr val="D1FAF7"/>
-            </a:solidFill>
+          <a:solidFill>
+            <a:srgbClr val="7BEAA9"/>
+          </a:solidFill>
+          <a:ln>
+            <a:noFill/>
           </a:ln>
         </p:spPr>
         <p:txBody>
@@ -7759,8 +8029,8 @@
         </p:nvSpPr>
         <p:spPr>
           <a:xfrm>
-            <a:off x="822960" y="548640"/>
-            <a:ext cx="9265615" cy="822960"/>
+            <a:off x="640080" y="731520"/>
+            <a:ext cx="10911535" cy="822960"/>
           </a:xfrm>
         </p:spPr>
         <p:txBody>
@@ -7777,7 +8047,7 @@
             <a:r>
               <a:rPr sz="3000" b="1" i="0">
                 <a:solidFill>
-                  <a:srgbClr val="115F59"/>
+                  <a:srgbClr val="26231F"/>
                 </a:solidFill>
               </a:rPr>
               <a:t>월 보험료 한눈에</a:t>
@@ -7787,27 +8057,25 @@
       </p:sp>
       <p:sp>
         <p:nvSpPr>
-          <p:cNvPr id="5" name="카드 1"/>
+          <p:cNvPr id="6" name="카드 1"/>
           <p:cNvSpPr/>
           <p:nvPr/>
         </p:nvSpPr>
         <p:spPr>
           <a:xfrm>
-            <a:off x="822960" y="1554480"/>
-            <a:ext cx="3362858" cy="2926080"/>
+            <a:off x="640080" y="1783080"/>
+            <a:ext cx="3484778" cy="2926080"/>
           </a:xfrm>
           <a:prstGeom prst="roundRect">
             <a:avLst>
-              <a:gd name="adj" fmla="val 8000"/>
+              <a:gd name="adj" fmla="val 4000"/>
             </a:avLst>
           </a:prstGeom>
           <a:solidFill>
-            <a:srgbClr val="EEFCFB"/>
+            <a:srgbClr val="EAFDF2"/>
           </a:solidFill>
-          <a:ln w="15875">
-            <a:solidFill>
-              <a:srgbClr val="D1FAF7"/>
-            </a:solidFill>
+          <a:ln>
+            <a:noFill/>
           </a:ln>
         </p:spPr>
         <p:txBody>
@@ -7820,20 +8088,49 @@
       </p:sp>
       <p:sp>
         <p:nvSpPr>
-          <p:cNvPr id="6" name="번호 1"/>
+          <p:cNvPr id="7" name="포인트 막대"/>
           <p:cNvSpPr/>
           <p:nvPr/>
         </p:nvSpPr>
         <p:spPr>
           <a:xfrm>
-            <a:off x="1005840" y="1737360"/>
+            <a:off x="640080" y="1892807"/>
+            <a:ext cx="54864" cy="2706624"/>
+          </a:xfrm>
+          <a:prstGeom prst="rect">
+            <a:avLst/>
+          </a:prstGeom>
+          <a:solidFill>
+            <a:srgbClr val="7BEAA9"/>
+          </a:solidFill>
+          <a:ln>
+            <a:noFill/>
+          </a:ln>
+        </p:spPr>
+        <p:txBody>
+          <a:bodyPr rtlCol="0" anchor="ctr"/>
+          <a:lstStyle/>
+          <a:p>
+            <a:pPr algn="ctr"/>
+          </a:p>
+        </p:txBody>
+      </p:sp>
+      <p:sp>
+        <p:nvSpPr>
+          <p:cNvPr id="8" name="번호 1"/>
+          <p:cNvSpPr/>
+          <p:nvPr/>
+        </p:nvSpPr>
+        <p:spPr>
+          <a:xfrm>
+            <a:off x="822959" y="1965960"/>
             <a:ext cx="457200" cy="457200"/>
           </a:xfrm>
           <a:prstGeom prst="ellipse">
             <a:avLst/>
           </a:prstGeom>
           <a:solidFill>
-            <a:srgbClr val="26C5B8"/>
+            <a:srgbClr val="7BEAA9"/>
           </a:solidFill>
           <a:ln>
             <a:noFill/>
@@ -7853,7 +8150,7 @@
             <a:r>
               <a:rPr sz="1600" b="1" i="0">
                 <a:solidFill>
-                  <a:srgbClr val="FFFFFF"/>
+                  <a:srgbClr val="26231F"/>
                 </a:solidFill>
               </a:rPr>
               <a:t>1</a:t>
@@ -7863,14 +8160,14 @@
       </p:sp>
       <p:sp>
         <p:nvSpPr>
-          <p:cNvPr id="7" name="TextBox 6"/>
+          <p:cNvPr id="9" name="TextBox 8"/>
           <p:cNvSpPr txBox="1"/>
           <p:nvPr/>
         </p:nvSpPr>
         <p:spPr>
           <a:xfrm>
-            <a:off x="960120" y="2331720"/>
-            <a:ext cx="3088538" cy="640080"/>
+            <a:off x="777240" y="2560320"/>
+            <a:ext cx="3210458" cy="640080"/>
           </a:xfrm>
           <a:prstGeom prst="rect">
             <a:avLst/>
@@ -7891,7 +8188,7 @@
             <a:r>
               <a:rPr sz="1700" b="1" i="0">
                 <a:solidFill>
-                  <a:srgbClr val="115F59"/>
+                  <a:srgbClr val="274935"/>
                 </a:solidFill>
               </a:rPr>
               <a:t>월 보험료 합계</a:t>
@@ -7901,14 +8198,14 @@
       </p:sp>
       <p:sp>
         <p:nvSpPr>
-          <p:cNvPr id="8" name="TextBox 7"/>
+          <p:cNvPr id="10" name="TextBox 9"/>
           <p:cNvSpPr txBox="1"/>
           <p:nvPr/>
         </p:nvSpPr>
         <p:spPr>
           <a:xfrm>
-            <a:off x="960120" y="3017520"/>
-            <a:ext cx="3088538" cy="1325880"/>
+            <a:off x="777240" y="3246120"/>
+            <a:ext cx="3210458" cy="1325880"/>
           </a:xfrm>
           <a:prstGeom prst="rect">
             <a:avLst/>
@@ -7929,7 +8226,7 @@
             <a:r>
               <a:rPr sz="3000" b="0" i="0">
                 <a:solidFill>
-                  <a:srgbClr val="2B2B2B"/>
+                  <a:srgbClr val="26231F"/>
                 </a:solidFill>
               </a:rPr>
               <a:t>0원</a:t>
@@ -7939,27 +8236,25 @@
       </p:sp>
       <p:sp>
         <p:nvSpPr>
-          <p:cNvPr id="9" name="카드 2"/>
+          <p:cNvPr id="11" name="카드 2"/>
           <p:cNvSpPr/>
           <p:nvPr/>
         </p:nvSpPr>
         <p:spPr>
           <a:xfrm>
-            <a:off x="4414418" y="1554480"/>
-            <a:ext cx="3362858" cy="2926080"/>
+            <a:off x="4353458" y="1783080"/>
+            <a:ext cx="3484778" cy="2926080"/>
           </a:xfrm>
           <a:prstGeom prst="roundRect">
             <a:avLst>
-              <a:gd name="adj" fmla="val 8000"/>
+              <a:gd name="adj" fmla="val 4000"/>
             </a:avLst>
           </a:prstGeom>
           <a:solidFill>
-            <a:srgbClr val="EEFCFB"/>
+            <a:srgbClr val="EAFDF2"/>
           </a:solidFill>
-          <a:ln w="15875">
-            <a:solidFill>
-              <a:srgbClr val="D1FAF7"/>
-            </a:solidFill>
+          <a:ln>
+            <a:noFill/>
           </a:ln>
         </p:spPr>
         <p:txBody>
@@ -7972,20 +8267,49 @@
       </p:sp>
       <p:sp>
         <p:nvSpPr>
-          <p:cNvPr id="10" name="번호 2"/>
+          <p:cNvPr id="12" name="포인트 막대"/>
           <p:cNvSpPr/>
           <p:nvPr/>
         </p:nvSpPr>
         <p:spPr>
           <a:xfrm>
-            <a:off x="4597298" y="1737360"/>
+            <a:off x="4353458" y="1892807"/>
+            <a:ext cx="54864" cy="2706624"/>
+          </a:xfrm>
+          <a:prstGeom prst="rect">
+            <a:avLst/>
+          </a:prstGeom>
+          <a:solidFill>
+            <a:srgbClr val="7BEAA9"/>
+          </a:solidFill>
+          <a:ln>
+            <a:noFill/>
+          </a:ln>
+        </p:spPr>
+        <p:txBody>
+          <a:bodyPr rtlCol="0" anchor="ctr"/>
+          <a:lstStyle/>
+          <a:p>
+            <a:pPr algn="ctr"/>
+          </a:p>
+        </p:txBody>
+      </p:sp>
+      <p:sp>
+        <p:nvSpPr>
+          <p:cNvPr id="13" name="번호 2"/>
+          <p:cNvSpPr/>
+          <p:nvPr/>
+        </p:nvSpPr>
+        <p:spPr>
+          <a:xfrm>
+            <a:off x="4536338" y="1965960"/>
             <a:ext cx="457200" cy="457200"/>
           </a:xfrm>
           <a:prstGeom prst="ellipse">
             <a:avLst/>
           </a:prstGeom>
           <a:solidFill>
-            <a:srgbClr val="26C5B8"/>
+            <a:srgbClr val="7BEAA9"/>
           </a:solidFill>
           <a:ln>
             <a:noFill/>
@@ -8005,7 +8329,7 @@
             <a:r>
               <a:rPr sz="1600" b="1" i="0">
                 <a:solidFill>
-                  <a:srgbClr val="FFFFFF"/>
+                  <a:srgbClr val="26231F"/>
                 </a:solidFill>
               </a:rPr>
               <a:t>2</a:t>
@@ -8015,14 +8339,14 @@
       </p:sp>
       <p:sp>
         <p:nvSpPr>
-          <p:cNvPr id="11" name="TextBox 10"/>
+          <p:cNvPr id="14" name="TextBox 13"/>
           <p:cNvSpPr txBox="1"/>
           <p:nvPr/>
         </p:nvSpPr>
         <p:spPr>
           <a:xfrm>
-            <a:off x="4551578" y="2331720"/>
-            <a:ext cx="3088538" cy="640080"/>
+            <a:off x="4490618" y="2560320"/>
+            <a:ext cx="3210458" cy="640080"/>
           </a:xfrm>
           <a:prstGeom prst="rect">
             <a:avLst/>
@@ -8043,7 +8367,7 @@
             <a:r>
               <a:rPr sz="1700" b="1" i="0">
                 <a:solidFill>
-                  <a:srgbClr val="115F59"/>
+                  <a:srgbClr val="274935"/>
                 </a:solidFill>
               </a:rPr>
               <a:t>연 보험료 합계</a:t>
@@ -8053,14 +8377,14 @@
       </p:sp>
       <p:sp>
         <p:nvSpPr>
-          <p:cNvPr id="12" name="TextBox 11"/>
+          <p:cNvPr id="15" name="TextBox 14"/>
           <p:cNvSpPr txBox="1"/>
           <p:nvPr/>
         </p:nvSpPr>
         <p:spPr>
           <a:xfrm>
-            <a:off x="4551578" y="3017520"/>
-            <a:ext cx="3088538" cy="1325880"/>
+            <a:off x="4490618" y="3246120"/>
+            <a:ext cx="3210458" cy="1325880"/>
           </a:xfrm>
           <a:prstGeom prst="rect">
             <a:avLst/>
@@ -8081,7 +8405,7 @@
             <a:r>
               <a:rPr sz="3000" b="0" i="0">
                 <a:solidFill>
-                  <a:srgbClr val="2B2B2B"/>
+                  <a:srgbClr val="26231F"/>
                 </a:solidFill>
               </a:rPr>
               <a:t>0원</a:t>
@@ -8091,27 +8415,25 @@
       </p:sp>
       <p:sp>
         <p:nvSpPr>
-          <p:cNvPr id="13" name="카드 3"/>
+          <p:cNvPr id="16" name="카드 3"/>
           <p:cNvSpPr/>
           <p:nvPr/>
         </p:nvSpPr>
         <p:spPr>
           <a:xfrm>
-            <a:off x="8005876" y="1554480"/>
-            <a:ext cx="3362858" cy="2926080"/>
+            <a:off x="8066836" y="1783080"/>
+            <a:ext cx="3484778" cy="2926080"/>
           </a:xfrm>
           <a:prstGeom prst="roundRect">
             <a:avLst>
-              <a:gd name="adj" fmla="val 8000"/>
+              <a:gd name="adj" fmla="val 4000"/>
             </a:avLst>
           </a:prstGeom>
           <a:solidFill>
-            <a:srgbClr val="EEFCFB"/>
+            <a:srgbClr val="EAFDF2"/>
           </a:solidFill>
-          <a:ln w="15875">
-            <a:solidFill>
-              <a:srgbClr val="D1FAF7"/>
-            </a:solidFill>
+          <a:ln>
+            <a:noFill/>
           </a:ln>
         </p:spPr>
         <p:txBody>
@@ -8124,20 +8446,49 @@
       </p:sp>
       <p:sp>
         <p:nvSpPr>
-          <p:cNvPr id="14" name="번호 3"/>
+          <p:cNvPr id="17" name="포인트 막대"/>
           <p:cNvSpPr/>
           <p:nvPr/>
         </p:nvSpPr>
         <p:spPr>
           <a:xfrm>
-            <a:off x="8188756" y="1737360"/>
+            <a:off x="8066836" y="1892807"/>
+            <a:ext cx="54864" cy="2706624"/>
+          </a:xfrm>
+          <a:prstGeom prst="rect">
+            <a:avLst/>
+          </a:prstGeom>
+          <a:solidFill>
+            <a:srgbClr val="7BEAA9"/>
+          </a:solidFill>
+          <a:ln>
+            <a:noFill/>
+          </a:ln>
+        </p:spPr>
+        <p:txBody>
+          <a:bodyPr rtlCol="0" anchor="ctr"/>
+          <a:lstStyle/>
+          <a:p>
+            <a:pPr algn="ctr"/>
+          </a:p>
+        </p:txBody>
+      </p:sp>
+      <p:sp>
+        <p:nvSpPr>
+          <p:cNvPr id="18" name="번호 3"/>
+          <p:cNvSpPr/>
+          <p:nvPr/>
+        </p:nvSpPr>
+        <p:spPr>
+          <a:xfrm>
+            <a:off x="8249716" y="1965960"/>
             <a:ext cx="457200" cy="457200"/>
           </a:xfrm>
           <a:prstGeom prst="ellipse">
             <a:avLst/>
           </a:prstGeom>
           <a:solidFill>
-            <a:srgbClr val="26C5B8"/>
+            <a:srgbClr val="7BEAA9"/>
           </a:solidFill>
           <a:ln>
             <a:noFill/>
@@ -8157,7 +8508,7 @@
             <a:r>
               <a:rPr sz="1600" b="1" i="0">
                 <a:solidFill>
-                  <a:srgbClr val="FFFFFF"/>
+                  <a:srgbClr val="26231F"/>
                 </a:solidFill>
               </a:rPr>
               <a:t>3</a:t>
@@ -8167,14 +8518,14 @@
       </p:sp>
       <p:sp>
         <p:nvSpPr>
-          <p:cNvPr id="15" name="TextBox 14"/>
+          <p:cNvPr id="19" name="TextBox 18"/>
           <p:cNvSpPr txBox="1"/>
           <p:nvPr/>
         </p:nvSpPr>
         <p:spPr>
           <a:xfrm>
-            <a:off x="8143036" y="2331720"/>
-            <a:ext cx="3088538" cy="640080"/>
+            <a:off x="8203996" y="2560320"/>
+            <a:ext cx="3210458" cy="640080"/>
           </a:xfrm>
           <a:prstGeom prst="rect">
             <a:avLst/>
@@ -8195,7 +8546,7 @@
             <a:r>
               <a:rPr sz="1700" b="1" i="0">
                 <a:solidFill>
-                  <a:srgbClr val="115F59"/>
+                  <a:srgbClr val="274935"/>
                 </a:solidFill>
               </a:rPr>
               <a:t>월 소득 대비</a:t>
@@ -8205,14 +8556,14 @@
       </p:sp>
       <p:sp>
         <p:nvSpPr>
-          <p:cNvPr id="16" name="TextBox 15"/>
+          <p:cNvPr id="20" name="TextBox 19"/>
           <p:cNvSpPr txBox="1"/>
           <p:nvPr/>
         </p:nvSpPr>
         <p:spPr>
           <a:xfrm>
-            <a:off x="8143036" y="3017520"/>
-            <a:ext cx="3088538" cy="1325880"/>
+            <a:off x="8203996" y="3246120"/>
+            <a:ext cx="3210458" cy="1325880"/>
           </a:xfrm>
           <a:prstGeom prst="rect">
             <a:avLst/>
@@ -8233,7 +8584,7 @@
             <a:r>
               <a:rPr sz="3000" b="0" i="0">
                 <a:solidFill>
-                  <a:srgbClr val="2B2B2B"/>
+                  <a:srgbClr val="26231F"/>
                 </a:solidFill>
               </a:rPr>
               <a:t>0 %</a:t>
@@ -8243,14 +8594,14 @@
       </p:sp>
       <p:sp>
         <p:nvSpPr>
-          <p:cNvPr id="17" name="안내"/>
+          <p:cNvPr id="21" name="안내"/>
           <p:cNvSpPr txBox="1"/>
           <p:nvPr/>
         </p:nvSpPr>
         <p:spPr>
           <a:xfrm>
-            <a:off x="822960" y="4663440"/>
-            <a:ext cx="10545775" cy="365760"/>
+            <a:off x="640080" y="4892040"/>
+            <a:ext cx="10911535" cy="365760"/>
           </a:xfrm>
           <a:prstGeom prst="rect">
             <a:avLst/>
@@ -8293,7 +8644,7 @@
     <p:bg>
       <p:bgPr>
         <a:solidFill>
-          <a:srgbClr val="EEFCFB"/>
+          <a:srgbClr val="EAFDF2"/>
         </a:solidFill>
         <a:effectLst/>
       </p:bgPr>
@@ -8313,46 +8664,84 @@
         </p:nvSpPr>
         <p:spPr>
           <a:xfrm>
-            <a:off x="256032" y="256032"/>
-            <a:ext cx="11679631" cy="6345936"/>
+            <a:off x="640080" y="566928"/>
+            <a:ext cx="10911535" cy="10972"/>
+          </a:xfrm>
+          <a:prstGeom prst="rect">
+            <a:avLst/>
+          </a:prstGeom>
+          <a:solidFill>
+            <a:srgbClr val="26231F"/>
+          </a:solidFill>
+          <a:ln>
+            <a:noFill/>
+          </a:ln>
+        </p:spPr>
+        <p:txBody>
+          <a:bodyPr rtlCol="0" anchor="ctr"/>
+          <a:lstStyle/>
+          <a:p>
+            <a:pPr algn="ctr"/>
+          </a:p>
+        </p:txBody>
+      </p:sp>
+      <p:sp>
+        <p:nvSpPr>
+          <p:cNvPr id="4" name="상단 라벨"/>
+          <p:cNvSpPr txBox="1"/>
+          <p:nvPr/>
+        </p:nvSpPr>
+        <p:spPr>
+          <a:xfrm>
+            <a:off x="640080" y="237744"/>
+            <a:ext cx="5486400" cy="274320"/>
           </a:xfrm>
           <a:prstGeom prst="rect">
             <a:avLst/>
           </a:prstGeom>
           <a:noFill/>
-          <a:ln w="28575">
-            <a:solidFill>
-              <a:srgbClr val="26C5B8"/>
-            </a:solidFill>
-          </a:ln>
-        </p:spPr>
-        <p:txBody>
-          <a:bodyPr rtlCol="0" anchor="ctr"/>
-          <a:lstStyle/>
-          <a:p>
-            <a:pPr algn="ctr"/>
-          </a:p>
-        </p:txBody>
-      </p:sp>
-      <p:sp>
-        <p:nvSpPr>
-          <p:cNvPr id="4" name="장식"/>
+        </p:spPr>
+        <p:txBody>
+          <a:bodyPr wrap="square" lIns="54864" rIns="54864" tIns="27432" bIns="27432" anchor="ctr">
+            <a:noAutofit/>
+          </a:bodyPr>
+          <a:lstStyle/>
+          <a:p>
+            <a:pPr algn="l">
+              <a:lnSpc>
+                <a:spcPct val="115000"/>
+              </a:lnSpc>
+            </a:pPr>
+            <a:r>
+              <a:rPr sz="900" b="1" i="0" spc="250">
+                <a:solidFill>
+                  <a:srgbClr val="26231F"/>
+                </a:solidFill>
+              </a:rPr>
+              <a:t>INSURANCE CHECK</a:t>
+            </a:r>
+          </a:p>
+        </p:txBody>
+      </p:sp>
+      <p:sp>
+        <p:nvSpPr>
+          <p:cNvPr id="5" name="포인트"/>
           <p:cNvSpPr/>
           <p:nvPr/>
         </p:nvSpPr>
         <p:spPr>
           <a:xfrm>
-            <a:off x="384048" y="384048"/>
-            <a:ext cx="11423599" cy="6089904"/>
-          </a:xfrm>
-          <a:prstGeom prst="rect">
+            <a:off x="11204143" y="246888"/>
+            <a:ext cx="237744" cy="237744"/>
+          </a:xfrm>
+          <a:prstGeom prst="round2SameRect">
             <a:avLst/>
           </a:prstGeom>
-          <a:noFill/>
-          <a:ln w="9525">
-            <a:solidFill>
-              <a:srgbClr val="D1FAF7"/>
-            </a:solidFill>
+          <a:solidFill>
+            <a:srgbClr val="7BEAA9"/>
+          </a:solidFill>
+          <a:ln>
+            <a:noFill/>
           </a:ln>
         </p:spPr>
         <p:txBody>
@@ -8375,8 +8764,8 @@
         </p:nvSpPr>
         <p:spPr>
           <a:xfrm>
-            <a:off x="822960" y="548640"/>
-            <a:ext cx="9265615" cy="822960"/>
+            <a:off x="640080" y="731520"/>
+            <a:ext cx="10911535" cy="822960"/>
           </a:xfrm>
         </p:spPr>
         <p:txBody>
@@ -8393,7 +8782,7 @@
             <a:r>
               <a:rPr sz="3000" b="1" i="0">
                 <a:solidFill>
-                  <a:srgbClr val="115F59"/>
+                  <a:srgbClr val="26231F"/>
                 </a:solidFill>
               </a:rPr>
               <a:t>점검 메모와 다음 할 일</a:t>
@@ -8403,27 +8792,25 @@
       </p:sp>
       <p:sp>
         <p:nvSpPr>
-          <p:cNvPr id="5" name="카드 1"/>
+          <p:cNvPr id="6" name="카드 1"/>
           <p:cNvSpPr/>
           <p:nvPr/>
         </p:nvSpPr>
         <p:spPr>
           <a:xfrm>
-            <a:off x="822960" y="1554480"/>
-            <a:ext cx="3362858" cy="3977639"/>
+            <a:off x="640080" y="1783080"/>
+            <a:ext cx="3484778" cy="3931920"/>
           </a:xfrm>
           <a:prstGeom prst="roundRect">
             <a:avLst>
-              <a:gd name="adj" fmla="val 8000"/>
+              <a:gd name="adj" fmla="val 4000"/>
             </a:avLst>
           </a:prstGeom>
           <a:solidFill>
-            <a:srgbClr val="EEFCFB"/>
+            <a:srgbClr val="EAFDF2"/>
           </a:solidFill>
-          <a:ln w="15875">
-            <a:solidFill>
-              <a:srgbClr val="D1FAF7"/>
-            </a:solidFill>
+          <a:ln>
+            <a:noFill/>
           </a:ln>
         </p:spPr>
         <p:txBody>
@@ -8436,20 +8823,49 @@
       </p:sp>
       <p:sp>
         <p:nvSpPr>
-          <p:cNvPr id="6" name="번호 1"/>
+          <p:cNvPr id="7" name="포인트 막대"/>
           <p:cNvSpPr/>
           <p:nvPr/>
         </p:nvSpPr>
         <p:spPr>
           <a:xfrm>
-            <a:off x="1005840" y="1737360"/>
+            <a:off x="640080" y="1892807"/>
+            <a:ext cx="54864" cy="3712463"/>
+          </a:xfrm>
+          <a:prstGeom prst="rect">
+            <a:avLst/>
+          </a:prstGeom>
+          <a:solidFill>
+            <a:srgbClr val="7BEAA9"/>
+          </a:solidFill>
+          <a:ln>
+            <a:noFill/>
+          </a:ln>
+        </p:spPr>
+        <p:txBody>
+          <a:bodyPr rtlCol="0" anchor="ctr"/>
+          <a:lstStyle/>
+          <a:p>
+            <a:pPr algn="ctr"/>
+          </a:p>
+        </p:txBody>
+      </p:sp>
+      <p:sp>
+        <p:nvSpPr>
+          <p:cNvPr id="8" name="번호 1"/>
+          <p:cNvSpPr/>
+          <p:nvPr/>
+        </p:nvSpPr>
+        <p:spPr>
+          <a:xfrm>
+            <a:off x="822959" y="1965960"/>
             <a:ext cx="457200" cy="457200"/>
           </a:xfrm>
           <a:prstGeom prst="ellipse">
             <a:avLst/>
           </a:prstGeom>
           <a:solidFill>
-            <a:srgbClr val="26C5B8"/>
+            <a:srgbClr val="7BEAA9"/>
           </a:solidFill>
           <a:ln>
             <a:noFill/>
@@ -8469,7 +8885,7 @@
             <a:r>
               <a:rPr sz="1600" b="1" i="0">
                 <a:solidFill>
-                  <a:srgbClr val="FFFFFF"/>
+                  <a:srgbClr val="26231F"/>
                 </a:solidFill>
               </a:rPr>
               <a:t>1</a:t>
@@ -8479,14 +8895,14 @@
       </p:sp>
       <p:sp>
         <p:nvSpPr>
-          <p:cNvPr id="7" name="TextBox 6"/>
+          <p:cNvPr id="9" name="TextBox 8"/>
           <p:cNvSpPr txBox="1"/>
           <p:nvPr/>
         </p:nvSpPr>
         <p:spPr>
           <a:xfrm>
-            <a:off x="960120" y="2331720"/>
-            <a:ext cx="3088538" cy="640080"/>
+            <a:off x="777240" y="2560320"/>
+            <a:ext cx="3210458" cy="640080"/>
           </a:xfrm>
           <a:prstGeom prst="rect">
             <a:avLst/>
@@ -8507,7 +8923,7 @@
             <a:r>
               <a:rPr sz="1800" b="1" i="0">
                 <a:solidFill>
-                  <a:srgbClr val="115F59"/>
+                  <a:srgbClr val="274935"/>
                 </a:solidFill>
               </a:rPr>
               <a:t>확인할 것</a:t>
@@ -8517,14 +8933,14 @@
       </p:sp>
       <p:sp>
         <p:nvSpPr>
-          <p:cNvPr id="8" name="TextBox 7"/>
+          <p:cNvPr id="10" name="TextBox 9"/>
           <p:cNvSpPr txBox="1"/>
           <p:nvPr/>
         </p:nvSpPr>
         <p:spPr>
           <a:xfrm>
-            <a:off x="960120" y="3017520"/>
-            <a:ext cx="3088538" cy="2377439"/>
+            <a:off x="777240" y="3246120"/>
+            <a:ext cx="3210458" cy="2331720"/>
           </a:xfrm>
           <a:prstGeom prst="rect">
             <a:avLst/>
@@ -8545,7 +8961,7 @@
             <a:r>
               <a:rPr sz="1500" b="0" i="0">
                 <a:solidFill>
-                  <a:srgbClr val="2B2B2B"/>
+                  <a:srgbClr val="26231F"/>
                 </a:solidFill>
               </a:rPr>
               <a:t>내용을 입력하세요</a:t>
@@ -8555,27 +8971,25 @@
       </p:sp>
       <p:sp>
         <p:nvSpPr>
-          <p:cNvPr id="9" name="카드 2"/>
+          <p:cNvPr id="11" name="카드 2"/>
           <p:cNvSpPr/>
           <p:nvPr/>
         </p:nvSpPr>
         <p:spPr>
           <a:xfrm>
-            <a:off x="4414418" y="1554480"/>
-            <a:ext cx="3362858" cy="3977639"/>
+            <a:off x="4353458" y="1783080"/>
+            <a:ext cx="3484778" cy="3931920"/>
           </a:xfrm>
           <a:prstGeom prst="roundRect">
             <a:avLst>
-              <a:gd name="adj" fmla="val 8000"/>
+              <a:gd name="adj" fmla="val 4000"/>
             </a:avLst>
           </a:prstGeom>
           <a:solidFill>
-            <a:srgbClr val="EEFCFB"/>
+            <a:srgbClr val="EAFDF2"/>
           </a:solidFill>
-          <a:ln w="15875">
-            <a:solidFill>
-              <a:srgbClr val="D1FAF7"/>
-            </a:solidFill>
+          <a:ln>
+            <a:noFill/>
           </a:ln>
         </p:spPr>
         <p:txBody>
@@ -8588,20 +9002,49 @@
       </p:sp>
       <p:sp>
         <p:nvSpPr>
-          <p:cNvPr id="10" name="번호 2"/>
+          <p:cNvPr id="12" name="포인트 막대"/>
           <p:cNvSpPr/>
           <p:nvPr/>
         </p:nvSpPr>
         <p:spPr>
           <a:xfrm>
-            <a:off x="4597298" y="1737360"/>
+            <a:off x="4353458" y="1892807"/>
+            <a:ext cx="54864" cy="3712463"/>
+          </a:xfrm>
+          <a:prstGeom prst="rect">
+            <a:avLst/>
+          </a:prstGeom>
+          <a:solidFill>
+            <a:srgbClr val="7BEAA9"/>
+          </a:solidFill>
+          <a:ln>
+            <a:noFill/>
+          </a:ln>
+        </p:spPr>
+        <p:txBody>
+          <a:bodyPr rtlCol="0" anchor="ctr"/>
+          <a:lstStyle/>
+          <a:p>
+            <a:pPr algn="ctr"/>
+          </a:p>
+        </p:txBody>
+      </p:sp>
+      <p:sp>
+        <p:nvSpPr>
+          <p:cNvPr id="13" name="번호 2"/>
+          <p:cNvSpPr/>
+          <p:nvPr/>
+        </p:nvSpPr>
+        <p:spPr>
+          <a:xfrm>
+            <a:off x="4536338" y="1965960"/>
             <a:ext cx="457200" cy="457200"/>
           </a:xfrm>
           <a:prstGeom prst="ellipse">
             <a:avLst/>
           </a:prstGeom>
           <a:solidFill>
-            <a:srgbClr val="26C5B8"/>
+            <a:srgbClr val="7BEAA9"/>
           </a:solidFill>
           <a:ln>
             <a:noFill/>
@@ -8621,7 +9064,7 @@
             <a:r>
               <a:rPr sz="1600" b="1" i="0">
                 <a:solidFill>
-                  <a:srgbClr val="FFFFFF"/>
+                  <a:srgbClr val="26231F"/>
                 </a:solidFill>
               </a:rPr>
               <a:t>2</a:t>
@@ -8631,14 +9074,14 @@
       </p:sp>
       <p:sp>
         <p:nvSpPr>
-          <p:cNvPr id="11" name="TextBox 10"/>
+          <p:cNvPr id="14" name="TextBox 13"/>
           <p:cNvSpPr txBox="1"/>
           <p:nvPr/>
         </p:nvSpPr>
         <p:spPr>
           <a:xfrm>
-            <a:off x="4551578" y="2331720"/>
-            <a:ext cx="3088538" cy="640080"/>
+            <a:off x="4490618" y="2560320"/>
+            <a:ext cx="3210458" cy="640080"/>
           </a:xfrm>
           <a:prstGeom prst="rect">
             <a:avLst/>
@@ -8659,7 +9102,7 @@
             <a:r>
               <a:rPr sz="1800" b="1" i="0">
                 <a:solidFill>
-                  <a:srgbClr val="115F59"/>
+                  <a:srgbClr val="274935"/>
                 </a:solidFill>
               </a:rPr>
               <a:t>문의할 것</a:t>
@@ -8669,14 +9112,14 @@
       </p:sp>
       <p:sp>
         <p:nvSpPr>
-          <p:cNvPr id="12" name="TextBox 11"/>
+          <p:cNvPr id="15" name="TextBox 14"/>
           <p:cNvSpPr txBox="1"/>
           <p:nvPr/>
         </p:nvSpPr>
         <p:spPr>
           <a:xfrm>
-            <a:off x="4551578" y="3017520"/>
-            <a:ext cx="3088538" cy="2377439"/>
+            <a:off x="4490618" y="3246120"/>
+            <a:ext cx="3210458" cy="2331720"/>
           </a:xfrm>
           <a:prstGeom prst="rect">
             <a:avLst/>
@@ -8697,7 +9140,7 @@
             <a:r>
               <a:rPr sz="1500" b="0" i="0">
                 <a:solidFill>
-                  <a:srgbClr val="2B2B2B"/>
+                  <a:srgbClr val="26231F"/>
                 </a:solidFill>
               </a:rPr>
               <a:t>내용을 입력하세요</a:t>
@@ -8707,27 +9150,25 @@
       </p:sp>
       <p:sp>
         <p:nvSpPr>
-          <p:cNvPr id="13" name="카드 3"/>
+          <p:cNvPr id="16" name="카드 3"/>
           <p:cNvSpPr/>
           <p:nvPr/>
         </p:nvSpPr>
         <p:spPr>
           <a:xfrm>
-            <a:off x="8005876" y="1554480"/>
-            <a:ext cx="3362858" cy="3977639"/>
+            <a:off x="8066836" y="1783080"/>
+            <a:ext cx="3484778" cy="3931920"/>
           </a:xfrm>
           <a:prstGeom prst="roundRect">
             <a:avLst>
-              <a:gd name="adj" fmla="val 8000"/>
+              <a:gd name="adj" fmla="val 4000"/>
             </a:avLst>
           </a:prstGeom>
           <a:solidFill>
-            <a:srgbClr val="EEFCFB"/>
+            <a:srgbClr val="EAFDF2"/>
           </a:solidFill>
-          <a:ln w="15875">
-            <a:solidFill>
-              <a:srgbClr val="D1FAF7"/>
-            </a:solidFill>
+          <a:ln>
+            <a:noFill/>
           </a:ln>
         </p:spPr>
         <p:txBody>
@@ -8740,20 +9181,49 @@
       </p:sp>
       <p:sp>
         <p:nvSpPr>
-          <p:cNvPr id="14" name="번호 3"/>
+          <p:cNvPr id="17" name="포인트 막대"/>
           <p:cNvSpPr/>
           <p:nvPr/>
         </p:nvSpPr>
         <p:spPr>
           <a:xfrm>
-            <a:off x="8188756" y="1737360"/>
+            <a:off x="8066836" y="1892807"/>
+            <a:ext cx="54864" cy="3712463"/>
+          </a:xfrm>
+          <a:prstGeom prst="rect">
+            <a:avLst/>
+          </a:prstGeom>
+          <a:solidFill>
+            <a:srgbClr val="7BEAA9"/>
+          </a:solidFill>
+          <a:ln>
+            <a:noFill/>
+          </a:ln>
+        </p:spPr>
+        <p:txBody>
+          <a:bodyPr rtlCol="0" anchor="ctr"/>
+          <a:lstStyle/>
+          <a:p>
+            <a:pPr algn="ctr"/>
+          </a:p>
+        </p:txBody>
+      </p:sp>
+      <p:sp>
+        <p:nvSpPr>
+          <p:cNvPr id="18" name="번호 3"/>
+          <p:cNvSpPr/>
+          <p:nvPr/>
+        </p:nvSpPr>
+        <p:spPr>
+          <a:xfrm>
+            <a:off x="8249716" y="1965960"/>
             <a:ext cx="457200" cy="457200"/>
           </a:xfrm>
           <a:prstGeom prst="ellipse">
             <a:avLst/>
           </a:prstGeom>
           <a:solidFill>
-            <a:srgbClr val="26C5B8"/>
+            <a:srgbClr val="7BEAA9"/>
           </a:solidFill>
           <a:ln>
             <a:noFill/>
@@ -8773,7 +9243,7 @@
             <a:r>
               <a:rPr sz="1600" b="1" i="0">
                 <a:solidFill>
-                  <a:srgbClr val="FFFFFF"/>
+                  <a:srgbClr val="26231F"/>
                 </a:solidFill>
               </a:rPr>
               <a:t>3</a:t>
@@ -8783,14 +9253,14 @@
       </p:sp>
       <p:sp>
         <p:nvSpPr>
-          <p:cNvPr id="15" name="TextBox 14"/>
+          <p:cNvPr id="19" name="TextBox 18"/>
           <p:cNvSpPr txBox="1"/>
           <p:nvPr/>
         </p:nvSpPr>
         <p:spPr>
           <a:xfrm>
-            <a:off x="8143036" y="2331720"/>
-            <a:ext cx="3088538" cy="640080"/>
+            <a:off x="8203996" y="2560320"/>
+            <a:ext cx="3210458" cy="640080"/>
           </a:xfrm>
           <a:prstGeom prst="rect">
             <a:avLst/>
@@ -8811,7 +9281,7 @@
             <a:r>
               <a:rPr sz="1800" b="1" i="0">
                 <a:solidFill>
-                  <a:srgbClr val="115F59"/>
+                  <a:srgbClr val="274935"/>
                 </a:solidFill>
               </a:rPr>
               <a:t>정리할 날짜</a:t>
@@ -8821,14 +9291,14 @@
       </p:sp>
       <p:sp>
         <p:nvSpPr>
-          <p:cNvPr id="16" name="TextBox 15"/>
+          <p:cNvPr id="20" name="TextBox 19"/>
           <p:cNvSpPr txBox="1"/>
           <p:nvPr/>
         </p:nvSpPr>
         <p:spPr>
           <a:xfrm>
-            <a:off x="8143036" y="3017520"/>
-            <a:ext cx="3088538" cy="2377439"/>
+            <a:off x="8203996" y="3246120"/>
+            <a:ext cx="3210458" cy="2331720"/>
           </a:xfrm>
           <a:prstGeom prst="rect">
             <a:avLst/>
@@ -8849,7 +9319,7 @@
             <a:r>
               <a:rPr sz="1500" b="0" i="0">
                 <a:solidFill>
-                  <a:srgbClr val="2B2B2B"/>
+                  <a:srgbClr val="26231F"/>
                 </a:solidFill>
               </a:rPr>
               <a:t>내용을 입력하세요</a:t>
@@ -8859,14 +9329,14 @@
       </p:sp>
       <p:sp>
         <p:nvSpPr>
-          <p:cNvPr id="17" name="안내 문구"/>
+          <p:cNvPr id="21" name="안내 문구"/>
           <p:cNvSpPr txBox="1"/>
           <p:nvPr/>
         </p:nvSpPr>
         <p:spPr>
           <a:xfrm>
-            <a:off x="822960" y="5623560"/>
-            <a:ext cx="10545775" cy="548640"/>
+            <a:off x="640080" y="5806440"/>
+            <a:ext cx="10911535" cy="548640"/>
           </a:xfrm>
           <a:prstGeom prst="rect">
             <a:avLst/>
@@ -8914,34 +9384,34 @@
         <a:sysClr val="window" lastClr="FFFFFF"/>
       </a:lt1>
       <a:dk2>
-        <a:srgbClr val="115F59"/>
+        <a:srgbClr val="274935"/>
       </a:dk2>
       <a:lt2>
-        <a:srgbClr val="EEFCFB"/>
+        <a:srgbClr val="EAFDF2"/>
       </a:lt2>
       <a:accent1>
-        <a:srgbClr val="26C5B8"/>
+        <a:srgbClr val="7BEAA9"/>
       </a:accent1>
       <a:accent2>
-        <a:srgbClr val="209DB6"/>
+        <a:srgbClr val="9FEFE6"/>
       </a:accent2>
       <a:accent3>
-        <a:srgbClr val="115F59"/>
+        <a:srgbClr val="274935"/>
       </a:accent3>
       <a:accent4>
-        <a:srgbClr val="D1FAF7"/>
+        <a:srgbClr val="D1FAE2"/>
       </a:accent4>
       <a:accent5>
-        <a:srgbClr val="23B1B7"/>
+        <a:srgbClr val="8DECC8"/>
       </a:accent5>
       <a:accent6>
-        <a:srgbClr val="709F9B"/>
+        <a:srgbClr val="7D9286"/>
       </a:accent6>
       <a:hlink>
-        <a:srgbClr val="26C5B8"/>
+        <a:srgbClr val="7BEAA9"/>
       </a:hlink>
       <a:folHlink>
-        <a:srgbClr val="115F59"/>
+        <a:srgbClr val="274935"/>
       </a:folHlink>
     </a:clrScheme>
     <a:fontScheme name="Office">
